--- a/AI漫剧制作课程/PPT课件/模块07-Seedance 2.0深度精通.pptx
+++ b/AI漫剧制作课程/PPT课件/模块07-Seedance 2.0深度精通.pptx
@@ -3094,7 +3094,7 @@
     <p:bg>
       <p:bgPr>
         <a:solidFill>
-          <a:srgbClr val="0B1120"/>
+          <a:srgbClr val="0A0E1A"/>
         </a:solidFill>
         <a:effectLst/>
       </p:bgPr>
@@ -3115,13 +3115,13 @@
         <p:spPr>
           <a:xfrm>
             <a:off x="0" y="0"/>
-            <a:ext cx="5029200" cy="6858000"/>
-          </a:xfrm>
-          <a:prstGeom prst="rect">
-            <a:avLst/>
-          </a:prstGeom>
-          <a:solidFill>
-            <a:srgbClr val="7C3AED"/>
+            <a:ext cx="4754880" cy="6858000"/>
+          </a:xfrm>
+          <a:prstGeom prst="rect">
+            <a:avLst/>
+          </a:prstGeom>
+          <a:solidFill>
+            <a:srgbClr val="8B5CF6"/>
           </a:solidFill>
           <a:ln>
             <a:noFill/>
@@ -3158,13 +3158,13 @@
         <p:spPr>
           <a:xfrm>
             <a:off x="0" y="0"/>
-            <a:ext cx="5029200" cy="109728"/>
-          </a:xfrm>
-          <a:prstGeom prst="rect">
-            <a:avLst/>
-          </a:prstGeom>
-          <a:solidFill>
-            <a:srgbClr val="FFFFFF"/>
+            <a:ext cx="4754880" cy="25400"/>
+          </a:xfrm>
+          <a:prstGeom prst="rect">
+            <a:avLst/>
+          </a:prstGeom>
+          <a:solidFill>
+            <a:srgbClr val="F0F4FC"/>
           </a:solidFill>
           <a:ln>
             <a:noFill/>
@@ -3201,13 +3201,13 @@
         <p:spPr>
           <a:xfrm>
             <a:off x="0" y="0"/>
-            <a:ext cx="109728" cy="6858000"/>
-          </a:xfrm>
-          <a:prstGeom prst="rect">
-            <a:avLst/>
-          </a:prstGeom>
-          <a:solidFill>
-            <a:srgbClr val="FFFFFF"/>
+            <a:ext cx="25400" cy="6858000"/>
+          </a:xfrm>
+          <a:prstGeom prst="rect">
+            <a:avLst/>
+          </a:prstGeom>
+          <a:solidFill>
+            <a:srgbClr val="F0F4FC"/>
           </a:solidFill>
           <a:ln>
             <a:noFill/>
@@ -3243,8 +3243,8 @@
         </p:nvSpPr>
         <p:spPr>
           <a:xfrm>
-            <a:off x="457200" y="1371600"/>
-            <a:ext cx="4114800" cy="2286000"/>
+            <a:off x="548640" y="1097280"/>
+            <a:ext cx="3657600" cy="2560320"/>
           </a:xfrm>
           <a:prstGeom prst="rect">
             <a:avLst/>
@@ -3258,9 +3258,9 @@
           <a:lstStyle/>
           <a:p>
             <a:pPr algn="l">
-              <a:defRPr sz="14000" b="1">
+              <a:defRPr sz="12000" b="1">
                 <a:solidFill>
-                  <a:srgbClr val="FFFFFF"/>
+                  <a:srgbClr val="F0F4FC"/>
                 </a:solidFill>
                 <a:latin typeface="Microsoft YaHei"/>
               </a:defRPr>
@@ -3279,8 +3279,8 @@
         </p:nvSpPr>
         <p:spPr>
           <a:xfrm>
-            <a:off x="548640" y="3657600"/>
-            <a:ext cx="3657600" cy="457200"/>
+            <a:off x="640080" y="3474720"/>
+            <a:ext cx="2743200" cy="365760"/>
           </a:xfrm>
           <a:prstGeom prst="rect">
             <a:avLst/>
@@ -3294,9 +3294,9 @@
           <a:lstStyle/>
           <a:p>
             <a:pPr algn="l">
-              <a:defRPr sz="1400" b="0">
+              <a:defRPr sz="1200" b="0">
                 <a:solidFill>
-                  <a:srgbClr val="FFFFFF"/>
+                  <a:srgbClr val="F0F4FC"/>
                 </a:solidFill>
                 <a:latin typeface="Microsoft YaHei"/>
               </a:defRPr>
@@ -3309,20 +3309,20 @@
       </p:sp>
       <p:sp>
         <p:nvSpPr>
-          <p:cNvPr id="7" name="Rounded Rectangle 6"/>
-          <p:cNvSpPr/>
-          <p:nvPr/>
-        </p:nvSpPr>
-        <p:spPr>
-          <a:xfrm>
-            <a:off x="5669280" y="1371600"/>
-            <a:ext cx="5943600" cy="457200"/>
-          </a:xfrm>
-          <a:prstGeom prst="roundRect">
-            <a:avLst/>
-          </a:prstGeom>
-          <a:solidFill>
-            <a:srgbClr val="7C3AED"/>
+          <p:cNvPr id="7" name="Rectangle 6"/>
+          <p:cNvSpPr/>
+          <p:nvPr/>
+        </p:nvSpPr>
+        <p:spPr>
+          <a:xfrm>
+            <a:off x="640080" y="3931920"/>
+            <a:ext cx="1371600" cy="19050"/>
+          </a:xfrm>
+          <a:prstGeom prst="rect">
+            <a:avLst/>
+          </a:prstGeom>
+          <a:solidFill>
+            <a:srgbClr val="F0F4FC"/>
           </a:solidFill>
           <a:ln>
             <a:noFill/>
@@ -3352,14 +3352,57 @@
       </p:sp>
       <p:sp>
         <p:nvSpPr>
-          <p:cNvPr id="8" name="TextBox 7"/>
+          <p:cNvPr id="8" name="Rounded Rectangle 7"/>
+          <p:cNvSpPr/>
+          <p:nvPr/>
+        </p:nvSpPr>
+        <p:spPr>
+          <a:xfrm>
+            <a:off x="5486400" y="1371600"/>
+            <a:ext cx="5943600" cy="411480"/>
+          </a:xfrm>
+          <a:prstGeom prst="roundRect">
+            <a:avLst/>
+          </a:prstGeom>
+          <a:solidFill>
+            <a:srgbClr val="8B5CF6"/>
+          </a:solidFill>
+          <a:ln>
+            <a:noFill/>
+          </a:ln>
+        </p:spPr>
+        <p:style>
+          <a:lnRef idx="1">
+            <a:schemeClr val="accent1"/>
+          </a:lnRef>
+          <a:fillRef idx="3">
+            <a:schemeClr val="accent1"/>
+          </a:fillRef>
+          <a:effectRef idx="2">
+            <a:schemeClr val="accent1"/>
+          </a:effectRef>
+          <a:fontRef idx="minor">
+            <a:schemeClr val="lt1"/>
+          </a:fontRef>
+        </p:style>
+        <p:txBody>
+          <a:bodyPr rtlCol="0" anchor="ctr"/>
+          <a:lstStyle/>
+          <a:p>
+            <a:pPr algn="ctr"/>
+          </a:p>
+        </p:txBody>
+      </p:sp>
+      <p:sp>
+        <p:nvSpPr>
+          <p:cNvPr id="9" name="TextBox 8"/>
           <p:cNvSpPr txBox="1"/>
           <p:nvPr/>
         </p:nvSpPr>
         <p:spPr>
           <a:xfrm>
-            <a:off x="5852160" y="1371600"/>
-            <a:ext cx="5486400" cy="457200"/>
+            <a:off x="5669280" y="1371600"/>
+            <a:ext cx="5577840" cy="411480"/>
           </a:xfrm>
           <a:prstGeom prst="rect">
             <a:avLst/>
@@ -3373,9 +3416,9 @@
           <a:lstStyle/>
           <a:p>
             <a:pPr algn="ctr">
-              <a:defRPr sz="1200" b="0">
+              <a:defRPr sz="1100" b="0">
                 <a:solidFill>
-                  <a:srgbClr val="FFFFFF"/>
+                  <a:srgbClr val="F0F4FC"/>
                 </a:solidFill>
                 <a:latin typeface="Microsoft YaHei"/>
               </a:defRPr>
@@ -3388,14 +3431,14 @@
       </p:sp>
       <p:sp>
         <p:nvSpPr>
-          <p:cNvPr id="9" name="TextBox 8"/>
+          <p:cNvPr id="10" name="TextBox 9"/>
           <p:cNvSpPr txBox="1"/>
           <p:nvPr/>
         </p:nvSpPr>
         <p:spPr>
           <a:xfrm>
-            <a:off x="5669280" y="2286000"/>
-            <a:ext cx="5943600" cy="1645920"/>
+            <a:off x="5486400" y="2377440"/>
+            <a:ext cx="5943600" cy="1463040"/>
           </a:xfrm>
           <a:prstGeom prst="rect">
             <a:avLst/>
@@ -3409,9 +3452,9 @@
           <a:lstStyle/>
           <a:p>
             <a:pPr algn="l">
-              <a:defRPr sz="3600" b="1">
+              <a:defRPr sz="4400" b="1">
                 <a:solidFill>
-                  <a:srgbClr val="FFFFFF"/>
+                  <a:srgbClr val="F0F4FC"/>
                 </a:solidFill>
                 <a:latin typeface="Microsoft YaHei"/>
               </a:defRPr>
@@ -3424,20 +3467,20 @@
       </p:sp>
       <p:sp>
         <p:nvSpPr>
-          <p:cNvPr id="10" name="Rectangle 9"/>
-          <p:cNvSpPr/>
-          <p:nvPr/>
-        </p:nvSpPr>
-        <p:spPr>
-          <a:xfrm>
-            <a:off x="5669280" y="4023360"/>
-            <a:ext cx="2743200" cy="38100"/>
-          </a:xfrm>
-          <a:prstGeom prst="rect">
-            <a:avLst/>
-          </a:prstGeom>
-          <a:solidFill>
-            <a:srgbClr val="7C3AED"/>
+          <p:cNvPr id="11" name="Rectangle 10"/>
+          <p:cNvSpPr/>
+          <p:nvPr/>
+        </p:nvSpPr>
+        <p:spPr>
+          <a:xfrm>
+            <a:off x="5486400" y="4023360"/>
+            <a:ext cx="2286000" cy="38100"/>
+          </a:xfrm>
+          <a:prstGeom prst="rect">
+            <a:avLst/>
+          </a:prstGeom>
+          <a:solidFill>
+            <a:srgbClr val="8B5CF6"/>
           </a:solidFill>
           <a:ln>
             <a:noFill/>
@@ -3467,14 +3510,14 @@
       </p:sp>
       <p:sp>
         <p:nvSpPr>
-          <p:cNvPr id="11" name="TextBox 10"/>
+          <p:cNvPr id="12" name="TextBox 11"/>
           <p:cNvSpPr txBox="1"/>
           <p:nvPr/>
         </p:nvSpPr>
         <p:spPr>
           <a:xfrm>
-            <a:off x="5669280" y="4389120"/>
-            <a:ext cx="5943600" cy="914400"/>
+            <a:off x="5486400" y="4389120"/>
+            <a:ext cx="5943600" cy="731520"/>
           </a:xfrm>
           <a:prstGeom prst="rect">
             <a:avLst/>
@@ -3488,9 +3531,9 @@
           <a:lstStyle/>
           <a:p>
             <a:pPr algn="l">
-              <a:defRPr sz="1800" b="0">
+              <a:defRPr sz="1600" b="0">
                 <a:solidFill>
-                  <a:srgbClr val="CBD5E8"/>
+                  <a:srgbClr val="A0AEC4"/>
                 </a:solidFill>
                 <a:latin typeface="Microsoft YaHei"/>
               </a:defRPr>
@@ -3503,20 +3546,20 @@
       </p:sp>
       <p:sp>
         <p:nvSpPr>
-          <p:cNvPr id="12" name="Rectangle 11"/>
-          <p:cNvSpPr/>
-          <p:nvPr/>
-        </p:nvSpPr>
-        <p:spPr>
-          <a:xfrm>
-            <a:off x="5669280" y="5669280"/>
-            <a:ext cx="5943600" cy="640080"/>
-          </a:xfrm>
-          <a:prstGeom prst="rect">
-            <a:avLst/>
-          </a:prstGeom>
-          <a:solidFill>
-            <a:srgbClr val="141E33"/>
+          <p:cNvPr id="13" name="Rectangle 12"/>
+          <p:cNvSpPr/>
+          <p:nvPr/>
+        </p:nvSpPr>
+        <p:spPr>
+          <a:xfrm>
+            <a:off x="5486400" y="5486400"/>
+            <a:ext cx="5943600" cy="594360"/>
+          </a:xfrm>
+          <a:prstGeom prst="rect">
+            <a:avLst/>
+          </a:prstGeom>
+          <a:solidFill>
+            <a:srgbClr val="161F35"/>
           </a:solidFill>
           <a:ln>
             <a:noFill/>
@@ -3546,14 +3589,14 @@
       </p:sp>
       <p:sp>
         <p:nvSpPr>
-          <p:cNvPr id="13" name="TextBox 12"/>
+          <p:cNvPr id="14" name="TextBox 13"/>
           <p:cNvSpPr txBox="1"/>
           <p:nvPr/>
         </p:nvSpPr>
         <p:spPr>
           <a:xfrm>
-            <a:off x="5852160" y="5715000"/>
-            <a:ext cx="1371600" cy="548640"/>
+            <a:off x="5669280" y="5532120"/>
+            <a:ext cx="1280160" cy="502920"/>
           </a:xfrm>
           <a:prstGeom prst="rect">
             <a:avLst/>
@@ -3567,9 +3610,9 @@
           <a:lstStyle/>
           <a:p>
             <a:pPr algn="ctr">
-              <a:defRPr sz="1200" b="1">
+              <a:defRPr sz="1100" b="1">
                 <a:solidFill>
-                  <a:srgbClr val="7C3AED"/>
+                  <a:srgbClr val="8B5CF6"/>
                 </a:solidFill>
                 <a:latin typeface="Microsoft YaHei"/>
               </a:defRPr>
@@ -3582,14 +3625,14 @@
       </p:sp>
       <p:sp>
         <p:nvSpPr>
-          <p:cNvPr id="14" name="TextBox 13"/>
+          <p:cNvPr id="15" name="TextBox 14"/>
           <p:cNvSpPr txBox="1"/>
           <p:nvPr/>
         </p:nvSpPr>
         <p:spPr>
           <a:xfrm>
-            <a:off x="7315200" y="5715000"/>
-            <a:ext cx="1371600" cy="548640"/>
+            <a:off x="7132320" y="5532120"/>
+            <a:ext cx="1280160" cy="502920"/>
           </a:xfrm>
           <a:prstGeom prst="rect">
             <a:avLst/>
@@ -3603,9 +3646,9 @@
           <a:lstStyle/>
           <a:p>
             <a:pPr algn="ctr">
-              <a:defRPr sz="1200" b="1">
+              <a:defRPr sz="1100" b="1">
                 <a:solidFill>
-                  <a:srgbClr val="7C3AED"/>
+                  <a:srgbClr val="8B5CF6"/>
                 </a:solidFill>
                 <a:latin typeface="Microsoft YaHei"/>
               </a:defRPr>
@@ -3618,14 +3661,14 @@
       </p:sp>
       <p:sp>
         <p:nvSpPr>
-          <p:cNvPr id="15" name="TextBox 14"/>
+          <p:cNvPr id="16" name="TextBox 15"/>
           <p:cNvSpPr txBox="1"/>
           <p:nvPr/>
         </p:nvSpPr>
         <p:spPr>
           <a:xfrm>
-            <a:off x="8778240" y="5715000"/>
-            <a:ext cx="1371600" cy="548640"/>
+            <a:off x="8595360" y="5532120"/>
+            <a:ext cx="1280160" cy="502920"/>
           </a:xfrm>
           <a:prstGeom prst="rect">
             <a:avLst/>
@@ -3639,9 +3682,9 @@
           <a:lstStyle/>
           <a:p>
             <a:pPr algn="ctr">
-              <a:defRPr sz="1200" b="1">
+              <a:defRPr sz="1100" b="1">
                 <a:solidFill>
-                  <a:srgbClr val="7C3AED"/>
+                  <a:srgbClr val="8B5CF6"/>
                 </a:solidFill>
                 <a:latin typeface="Microsoft YaHei"/>
               </a:defRPr>
@@ -3654,14 +3697,14 @@
       </p:sp>
       <p:sp>
         <p:nvSpPr>
-          <p:cNvPr id="16" name="TextBox 15"/>
+          <p:cNvPr id="17" name="TextBox 16"/>
           <p:cNvSpPr txBox="1"/>
           <p:nvPr/>
         </p:nvSpPr>
         <p:spPr>
           <a:xfrm>
-            <a:off x="10241280" y="5715000"/>
-            <a:ext cx="1371600" cy="548640"/>
+            <a:off x="10058400" y="5532120"/>
+            <a:ext cx="1280160" cy="502920"/>
           </a:xfrm>
           <a:prstGeom prst="rect">
             <a:avLst/>
@@ -3675,9 +3718,9 @@
           <a:lstStyle/>
           <a:p>
             <a:pPr algn="ctr">
-              <a:defRPr sz="1200" b="1">
+              <a:defRPr sz="1100" b="1">
                 <a:solidFill>
-                  <a:srgbClr val="7C3AED"/>
+                  <a:srgbClr val="8B5CF6"/>
                 </a:solidFill>
                 <a:latin typeface="Microsoft YaHei"/>
               </a:defRPr>
@@ -3702,7 +3745,7 @@
     <p:bg>
       <p:bgPr>
         <a:solidFill>
-          <a:srgbClr val="0B1120"/>
+          <a:srgbClr val="0A0E1A"/>
         </a:solidFill>
         <a:effectLst/>
       </p:bgPr>
@@ -3723,13 +3766,13 @@
         <p:spPr>
           <a:xfrm>
             <a:off x="0" y="0"/>
-            <a:ext cx="12191695" cy="1051560"/>
-          </a:xfrm>
-          <a:prstGeom prst="rect">
-            <a:avLst/>
-          </a:prstGeom>
-          <a:solidFill>
-            <a:srgbClr val="141E33"/>
+            <a:ext cx="12191695" cy="38100"/>
+          </a:xfrm>
+          <a:prstGeom prst="rect">
+            <a:avLst/>
+          </a:prstGeom>
+          <a:solidFill>
+            <a:srgbClr val="10B981"/>
           </a:solidFill>
           <a:ln>
             <a:noFill/>
@@ -3765,14 +3808,14 @@
         </p:nvSpPr>
         <p:spPr>
           <a:xfrm>
-            <a:off x="0" y="0"/>
-            <a:ext cx="109728" cy="1051560"/>
-          </a:xfrm>
-          <a:prstGeom prst="rect">
-            <a:avLst/>
-          </a:prstGeom>
-          <a:solidFill>
-            <a:srgbClr val="10B981"/>
+            <a:off x="0" y="38100"/>
+            <a:ext cx="12191695" cy="914400"/>
+          </a:xfrm>
+          <a:prstGeom prst="rect">
+            <a:avLst/>
+          </a:prstGeom>
+          <a:solidFill>
+            <a:srgbClr val="161F35"/>
           </a:solidFill>
           <a:ln>
             <a:noFill/>
@@ -3802,14 +3845,57 @@
       </p:sp>
       <p:sp>
         <p:nvSpPr>
-          <p:cNvPr id="4" name="TextBox 3"/>
+          <p:cNvPr id="4" name="Rectangle 3"/>
+          <p:cNvSpPr/>
+          <p:nvPr/>
+        </p:nvSpPr>
+        <p:spPr>
+          <a:xfrm>
+            <a:off x="0" y="38100"/>
+            <a:ext cx="91440" cy="914400"/>
+          </a:xfrm>
+          <a:prstGeom prst="rect">
+            <a:avLst/>
+          </a:prstGeom>
+          <a:solidFill>
+            <a:srgbClr val="10B981"/>
+          </a:solidFill>
+          <a:ln>
+            <a:noFill/>
+          </a:ln>
+        </p:spPr>
+        <p:style>
+          <a:lnRef idx="1">
+            <a:schemeClr val="accent1"/>
+          </a:lnRef>
+          <a:fillRef idx="3">
+            <a:schemeClr val="accent1"/>
+          </a:fillRef>
+          <a:effectRef idx="2">
+            <a:schemeClr val="accent1"/>
+          </a:effectRef>
+          <a:fontRef idx="minor">
+            <a:schemeClr val="lt1"/>
+          </a:fontRef>
+        </p:style>
+        <p:txBody>
+          <a:bodyPr rtlCol="0" anchor="ctr"/>
+          <a:lstStyle/>
+          <a:p>
+            <a:pPr algn="ctr"/>
+          </a:p>
+        </p:txBody>
+      </p:sp>
+      <p:sp>
+        <p:nvSpPr>
+          <p:cNvPr id="5" name="TextBox 4"/>
           <p:cNvSpPr txBox="1"/>
           <p:nvPr/>
         </p:nvSpPr>
         <p:spPr>
           <a:xfrm>
-            <a:off x="548640" y="182880"/>
-            <a:ext cx="10058400" cy="640080"/>
+            <a:off x="731520" y="137160"/>
+            <a:ext cx="10728655" cy="640080"/>
           </a:xfrm>
           <a:prstGeom prst="rect">
             <a:avLst/>
@@ -3823,9 +3909,9 @@
           <a:lstStyle/>
           <a:p>
             <a:pPr algn="l">
-              <a:defRPr sz="2600" b="1">
+              <a:defRPr sz="2400" b="1">
                 <a:solidFill>
-                  <a:srgbClr val="FFFFFF"/>
+                  <a:srgbClr val="F0F4FC"/>
                 </a:solidFill>
                 <a:latin typeface="Microsoft YaHei"/>
               </a:defRPr>
@@ -3838,20 +3924,20 @@
       </p:sp>
       <p:sp>
         <p:nvSpPr>
-          <p:cNvPr id="5" name="Rectangle 4"/>
-          <p:cNvSpPr/>
-          <p:nvPr/>
-        </p:nvSpPr>
-        <p:spPr>
-          <a:xfrm>
-            <a:off x="0" y="1051560"/>
-            <a:ext cx="12191695" cy="25400"/>
-          </a:xfrm>
-          <a:prstGeom prst="rect">
-            <a:avLst/>
-          </a:prstGeom>
-          <a:solidFill>
-            <a:srgbClr val="10B981"/>
+          <p:cNvPr id="6" name="Rectangle 5"/>
+          <p:cNvSpPr/>
+          <p:nvPr/>
+        </p:nvSpPr>
+        <p:spPr>
+          <a:xfrm>
+            <a:off x="0" y="1078992"/>
+            <a:ext cx="12191695" cy="12700"/>
+          </a:xfrm>
+          <a:prstGeom prst="rect">
+            <a:avLst/>
+          </a:prstGeom>
+          <a:solidFill>
+            <a:srgbClr val="253350"/>
           </a:solidFill>
           <a:ln>
             <a:noFill/>
@@ -3881,20 +3967,20 @@
       </p:sp>
       <p:sp>
         <p:nvSpPr>
-          <p:cNvPr id="6" name="Rounded Rectangle 5"/>
-          <p:cNvSpPr/>
-          <p:nvPr/>
-        </p:nvSpPr>
-        <p:spPr>
-          <a:xfrm>
-            <a:off x="457200" y="1371600"/>
-            <a:ext cx="11247120" cy="685800"/>
+          <p:cNvPr id="7" name="Rounded Rectangle 6"/>
+          <p:cNvSpPr/>
+          <p:nvPr/>
+        </p:nvSpPr>
+        <p:spPr>
+          <a:xfrm>
+            <a:off x="457200" y="1280160"/>
+            <a:ext cx="11247120" cy="658368"/>
           </a:xfrm>
           <a:prstGeom prst="roundRect">
             <a:avLst/>
           </a:prstGeom>
           <a:solidFill>
-            <a:srgbClr val="141E33"/>
+            <a:srgbClr val="161F35"/>
           </a:solidFill>
           <a:ln>
             <a:noFill/>
@@ -3924,20 +4010,20 @@
       </p:sp>
       <p:sp>
         <p:nvSpPr>
-          <p:cNvPr id="7" name="Rounded Rectangle 6"/>
-          <p:cNvSpPr/>
-          <p:nvPr/>
-        </p:nvSpPr>
-        <p:spPr>
-          <a:xfrm>
-            <a:off x="640080" y="1508760"/>
-            <a:ext cx="365760" cy="365760"/>
+          <p:cNvPr id="8" name="Rounded Rectangle 7"/>
+          <p:cNvSpPr/>
+          <p:nvPr/>
+        </p:nvSpPr>
+        <p:spPr>
+          <a:xfrm>
+            <a:off x="640080" y="1426464"/>
+            <a:ext cx="320040" cy="320040"/>
           </a:xfrm>
           <a:prstGeom prst="roundRect">
             <a:avLst/>
           </a:prstGeom>
           <a:noFill/>
-          <a:ln w="19050">
+          <a:ln w="12700">
             <a:solidFill>
               <a:srgbClr val="10B981"/>
             </a:solidFill>
@@ -3967,13 +4053,13 @@
       </p:sp>
       <p:sp>
         <p:nvSpPr>
-          <p:cNvPr id="8" name="TextBox 7"/>
+          <p:cNvPr id="9" name="TextBox 8"/>
           <p:cNvSpPr txBox="1"/>
           <p:nvPr/>
         </p:nvSpPr>
         <p:spPr>
           <a:xfrm>
-            <a:off x="1188720" y="1463040"/>
+            <a:off x="1097280" y="1371600"/>
             <a:ext cx="457200" cy="457200"/>
           </a:xfrm>
           <a:prstGeom prst="rect">
@@ -3988,7 +4074,7 @@
           <a:lstStyle/>
           <a:p>
             <a:pPr algn="l">
-              <a:defRPr sz="1200" b="1">
+              <a:defRPr sz="1100" b="1">
                 <a:solidFill>
                   <a:srgbClr val="10B981"/>
                 </a:solidFill>
@@ -4003,14 +4089,14 @@
       </p:sp>
       <p:sp>
         <p:nvSpPr>
-          <p:cNvPr id="9" name="TextBox 8"/>
+          <p:cNvPr id="10" name="TextBox 9"/>
           <p:cNvSpPr txBox="1"/>
           <p:nvPr/>
         </p:nvSpPr>
         <p:spPr>
           <a:xfrm>
-            <a:off x="1645920" y="1463040"/>
-            <a:ext cx="9601200" cy="502920"/>
+            <a:off x="1554480" y="1371600"/>
+            <a:ext cx="9601200" cy="457200"/>
           </a:xfrm>
           <a:prstGeom prst="rect">
             <a:avLst/>
@@ -4024,9 +4110,9 @@
           <a:lstStyle/>
           <a:p>
             <a:pPr algn="l">
-              <a:defRPr sz="1500" b="0">
+              <a:defRPr sz="1400" b="0">
                 <a:solidFill>
-                  <a:srgbClr val="CBD5E8"/>
+                  <a:srgbClr val="A0AEC4"/>
                 </a:solidFill>
                 <a:latin typeface="Microsoft YaHei"/>
               </a:defRPr>
@@ -4039,20 +4125,20 @@
       </p:sp>
       <p:sp>
         <p:nvSpPr>
-          <p:cNvPr id="10" name="Rounded Rectangle 9"/>
-          <p:cNvSpPr/>
-          <p:nvPr/>
-        </p:nvSpPr>
-        <p:spPr>
-          <a:xfrm>
-            <a:off x="457200" y="2194560"/>
-            <a:ext cx="11247120" cy="685800"/>
+          <p:cNvPr id="11" name="Rounded Rectangle 10"/>
+          <p:cNvSpPr/>
+          <p:nvPr/>
+        </p:nvSpPr>
+        <p:spPr>
+          <a:xfrm>
+            <a:off x="457200" y="2084832"/>
+            <a:ext cx="11247120" cy="658368"/>
           </a:xfrm>
           <a:prstGeom prst="roundRect">
             <a:avLst/>
           </a:prstGeom>
           <a:solidFill>
-            <a:srgbClr val="141E33"/>
+            <a:srgbClr val="161F35"/>
           </a:solidFill>
           <a:ln>
             <a:noFill/>
@@ -4082,20 +4168,20 @@
       </p:sp>
       <p:sp>
         <p:nvSpPr>
-          <p:cNvPr id="11" name="Rounded Rectangle 10"/>
-          <p:cNvSpPr/>
-          <p:nvPr/>
-        </p:nvSpPr>
-        <p:spPr>
-          <a:xfrm>
-            <a:off x="640080" y="2331720"/>
-            <a:ext cx="365760" cy="365760"/>
+          <p:cNvPr id="12" name="Rounded Rectangle 11"/>
+          <p:cNvSpPr/>
+          <p:nvPr/>
+        </p:nvSpPr>
+        <p:spPr>
+          <a:xfrm>
+            <a:off x="640080" y="2231136"/>
+            <a:ext cx="320040" cy="320040"/>
           </a:xfrm>
           <a:prstGeom prst="roundRect">
             <a:avLst/>
           </a:prstGeom>
           <a:noFill/>
-          <a:ln w="19050">
+          <a:ln w="12700">
             <a:solidFill>
               <a:srgbClr val="10B981"/>
             </a:solidFill>
@@ -4125,13 +4211,13 @@
       </p:sp>
       <p:sp>
         <p:nvSpPr>
-          <p:cNvPr id="12" name="TextBox 11"/>
+          <p:cNvPr id="13" name="TextBox 12"/>
           <p:cNvSpPr txBox="1"/>
           <p:nvPr/>
         </p:nvSpPr>
         <p:spPr>
           <a:xfrm>
-            <a:off x="1188720" y="2286000"/>
+            <a:off x="1097280" y="2176272"/>
             <a:ext cx="457200" cy="457200"/>
           </a:xfrm>
           <a:prstGeom prst="rect">
@@ -4146,7 +4232,7 @@
           <a:lstStyle/>
           <a:p>
             <a:pPr algn="l">
-              <a:defRPr sz="1200" b="1">
+              <a:defRPr sz="1100" b="1">
                 <a:solidFill>
                   <a:srgbClr val="10B981"/>
                 </a:solidFill>
@@ -4161,14 +4247,14 @@
       </p:sp>
       <p:sp>
         <p:nvSpPr>
-          <p:cNvPr id="13" name="TextBox 12"/>
+          <p:cNvPr id="14" name="TextBox 13"/>
           <p:cNvSpPr txBox="1"/>
           <p:nvPr/>
         </p:nvSpPr>
         <p:spPr>
           <a:xfrm>
-            <a:off x="1645920" y="2286000"/>
-            <a:ext cx="9601200" cy="502920"/>
+            <a:off x="1554480" y="2176272"/>
+            <a:ext cx="9601200" cy="457200"/>
           </a:xfrm>
           <a:prstGeom prst="rect">
             <a:avLst/>
@@ -4182,9 +4268,9 @@
           <a:lstStyle/>
           <a:p>
             <a:pPr algn="l">
-              <a:defRPr sz="1500" b="0">
+              <a:defRPr sz="1400" b="0">
                 <a:solidFill>
-                  <a:srgbClr val="CBD5E8"/>
+                  <a:srgbClr val="A0AEC4"/>
                 </a:solidFill>
                 <a:latin typeface="Microsoft YaHei"/>
               </a:defRPr>
@@ -4197,20 +4283,20 @@
       </p:sp>
       <p:sp>
         <p:nvSpPr>
-          <p:cNvPr id="14" name="Rounded Rectangle 13"/>
-          <p:cNvSpPr/>
-          <p:nvPr/>
-        </p:nvSpPr>
-        <p:spPr>
-          <a:xfrm>
-            <a:off x="457200" y="3017520"/>
-            <a:ext cx="11247120" cy="685800"/>
+          <p:cNvPr id="15" name="Rounded Rectangle 14"/>
+          <p:cNvSpPr/>
+          <p:nvPr/>
+        </p:nvSpPr>
+        <p:spPr>
+          <a:xfrm>
+            <a:off x="457200" y="2889504"/>
+            <a:ext cx="11247120" cy="658368"/>
           </a:xfrm>
           <a:prstGeom prst="roundRect">
             <a:avLst/>
           </a:prstGeom>
           <a:solidFill>
-            <a:srgbClr val="141E33"/>
+            <a:srgbClr val="161F35"/>
           </a:solidFill>
           <a:ln>
             <a:noFill/>
@@ -4240,20 +4326,20 @@
       </p:sp>
       <p:sp>
         <p:nvSpPr>
-          <p:cNvPr id="15" name="Rounded Rectangle 14"/>
-          <p:cNvSpPr/>
-          <p:nvPr/>
-        </p:nvSpPr>
-        <p:spPr>
-          <a:xfrm>
-            <a:off x="640080" y="3154680"/>
-            <a:ext cx="365760" cy="365760"/>
+          <p:cNvPr id="16" name="Rounded Rectangle 15"/>
+          <p:cNvSpPr/>
+          <p:nvPr/>
+        </p:nvSpPr>
+        <p:spPr>
+          <a:xfrm>
+            <a:off x="640080" y="3035808"/>
+            <a:ext cx="320040" cy="320040"/>
           </a:xfrm>
           <a:prstGeom prst="roundRect">
             <a:avLst/>
           </a:prstGeom>
           <a:noFill/>
-          <a:ln w="19050">
+          <a:ln w="12700">
             <a:solidFill>
               <a:srgbClr val="10B981"/>
             </a:solidFill>
@@ -4283,13 +4369,13 @@
       </p:sp>
       <p:sp>
         <p:nvSpPr>
-          <p:cNvPr id="16" name="TextBox 15"/>
+          <p:cNvPr id="17" name="TextBox 16"/>
           <p:cNvSpPr txBox="1"/>
           <p:nvPr/>
         </p:nvSpPr>
         <p:spPr>
           <a:xfrm>
-            <a:off x="1188720" y="3108960"/>
+            <a:off x="1097280" y="2980944"/>
             <a:ext cx="457200" cy="457200"/>
           </a:xfrm>
           <a:prstGeom prst="rect">
@@ -4304,7 +4390,7 @@
           <a:lstStyle/>
           <a:p>
             <a:pPr algn="l">
-              <a:defRPr sz="1200" b="1">
+              <a:defRPr sz="1100" b="1">
                 <a:solidFill>
                   <a:srgbClr val="10B981"/>
                 </a:solidFill>
@@ -4319,14 +4405,14 @@
       </p:sp>
       <p:sp>
         <p:nvSpPr>
-          <p:cNvPr id="17" name="TextBox 16"/>
+          <p:cNvPr id="18" name="TextBox 17"/>
           <p:cNvSpPr txBox="1"/>
           <p:nvPr/>
         </p:nvSpPr>
         <p:spPr>
           <a:xfrm>
-            <a:off x="1645920" y="3108960"/>
-            <a:ext cx="9601200" cy="502920"/>
+            <a:off x="1554480" y="2980944"/>
+            <a:ext cx="9601200" cy="457200"/>
           </a:xfrm>
           <a:prstGeom prst="rect">
             <a:avLst/>
@@ -4340,9 +4426,9 @@
           <a:lstStyle/>
           <a:p>
             <a:pPr algn="l">
-              <a:defRPr sz="1500" b="0">
+              <a:defRPr sz="1400" b="0">
                 <a:solidFill>
-                  <a:srgbClr val="CBD5E8"/>
+                  <a:srgbClr val="A0AEC4"/>
                 </a:solidFill>
                 <a:latin typeface="Microsoft YaHei"/>
               </a:defRPr>
@@ -4355,20 +4441,20 @@
       </p:sp>
       <p:sp>
         <p:nvSpPr>
-          <p:cNvPr id="18" name="Rounded Rectangle 17"/>
-          <p:cNvSpPr/>
-          <p:nvPr/>
-        </p:nvSpPr>
-        <p:spPr>
-          <a:xfrm>
-            <a:off x="457200" y="3840480"/>
-            <a:ext cx="11247120" cy="685800"/>
+          <p:cNvPr id="19" name="Rounded Rectangle 18"/>
+          <p:cNvSpPr/>
+          <p:nvPr/>
+        </p:nvSpPr>
+        <p:spPr>
+          <a:xfrm>
+            <a:off x="457200" y="3694176"/>
+            <a:ext cx="11247120" cy="658368"/>
           </a:xfrm>
           <a:prstGeom prst="roundRect">
             <a:avLst/>
           </a:prstGeom>
           <a:solidFill>
-            <a:srgbClr val="141E33"/>
+            <a:srgbClr val="161F35"/>
           </a:solidFill>
           <a:ln>
             <a:noFill/>
@@ -4398,20 +4484,20 @@
       </p:sp>
       <p:sp>
         <p:nvSpPr>
-          <p:cNvPr id="19" name="Rounded Rectangle 18"/>
-          <p:cNvSpPr/>
-          <p:nvPr/>
-        </p:nvSpPr>
-        <p:spPr>
-          <a:xfrm>
-            <a:off x="640080" y="3977640"/>
-            <a:ext cx="365760" cy="365760"/>
+          <p:cNvPr id="20" name="Rounded Rectangle 19"/>
+          <p:cNvSpPr/>
+          <p:nvPr/>
+        </p:nvSpPr>
+        <p:spPr>
+          <a:xfrm>
+            <a:off x="640080" y="3840480"/>
+            <a:ext cx="320040" cy="320040"/>
           </a:xfrm>
           <a:prstGeom prst="roundRect">
             <a:avLst/>
           </a:prstGeom>
           <a:noFill/>
-          <a:ln w="19050">
+          <a:ln w="12700">
             <a:solidFill>
               <a:srgbClr val="10B981"/>
             </a:solidFill>
@@ -4441,13 +4527,13 @@
       </p:sp>
       <p:sp>
         <p:nvSpPr>
-          <p:cNvPr id="20" name="TextBox 19"/>
+          <p:cNvPr id="21" name="TextBox 20"/>
           <p:cNvSpPr txBox="1"/>
           <p:nvPr/>
         </p:nvSpPr>
         <p:spPr>
           <a:xfrm>
-            <a:off x="1188720" y="3931920"/>
+            <a:off x="1097280" y="3785616"/>
             <a:ext cx="457200" cy="457200"/>
           </a:xfrm>
           <a:prstGeom prst="rect">
@@ -4462,7 +4548,7 @@
           <a:lstStyle/>
           <a:p>
             <a:pPr algn="l">
-              <a:defRPr sz="1200" b="1">
+              <a:defRPr sz="1100" b="1">
                 <a:solidFill>
                   <a:srgbClr val="10B981"/>
                 </a:solidFill>
@@ -4477,14 +4563,14 @@
       </p:sp>
       <p:sp>
         <p:nvSpPr>
-          <p:cNvPr id="21" name="TextBox 20"/>
+          <p:cNvPr id="22" name="TextBox 21"/>
           <p:cNvSpPr txBox="1"/>
           <p:nvPr/>
         </p:nvSpPr>
         <p:spPr>
           <a:xfrm>
-            <a:off x="1645920" y="3931920"/>
-            <a:ext cx="9601200" cy="502920"/>
+            <a:off x="1554480" y="3785616"/>
+            <a:ext cx="9601200" cy="457200"/>
           </a:xfrm>
           <a:prstGeom prst="rect">
             <a:avLst/>
@@ -4498,9 +4584,9 @@
           <a:lstStyle/>
           <a:p>
             <a:pPr algn="l">
-              <a:defRPr sz="1500" b="0">
+              <a:defRPr sz="1400" b="0">
                 <a:solidFill>
-                  <a:srgbClr val="CBD5E8"/>
+                  <a:srgbClr val="A0AEC4"/>
                 </a:solidFill>
                 <a:latin typeface="Microsoft YaHei"/>
               </a:defRPr>
@@ -4513,20 +4599,20 @@
       </p:sp>
       <p:sp>
         <p:nvSpPr>
-          <p:cNvPr id="22" name="Rounded Rectangle 21"/>
-          <p:cNvSpPr/>
-          <p:nvPr/>
-        </p:nvSpPr>
-        <p:spPr>
-          <a:xfrm>
-            <a:off x="457200" y="4663440"/>
-            <a:ext cx="11247120" cy="685800"/>
+          <p:cNvPr id="23" name="Rounded Rectangle 22"/>
+          <p:cNvSpPr/>
+          <p:nvPr/>
+        </p:nvSpPr>
+        <p:spPr>
+          <a:xfrm>
+            <a:off x="457200" y="4498848"/>
+            <a:ext cx="11247120" cy="658368"/>
           </a:xfrm>
           <a:prstGeom prst="roundRect">
             <a:avLst/>
           </a:prstGeom>
           <a:solidFill>
-            <a:srgbClr val="141E33"/>
+            <a:srgbClr val="161F35"/>
           </a:solidFill>
           <a:ln>
             <a:noFill/>
@@ -4556,20 +4642,20 @@
       </p:sp>
       <p:sp>
         <p:nvSpPr>
-          <p:cNvPr id="23" name="Rounded Rectangle 22"/>
-          <p:cNvSpPr/>
-          <p:nvPr/>
-        </p:nvSpPr>
-        <p:spPr>
-          <a:xfrm>
-            <a:off x="640080" y="4800600"/>
-            <a:ext cx="365760" cy="365760"/>
+          <p:cNvPr id="24" name="Rounded Rectangle 23"/>
+          <p:cNvSpPr/>
+          <p:nvPr/>
+        </p:nvSpPr>
+        <p:spPr>
+          <a:xfrm>
+            <a:off x="640080" y="4645152"/>
+            <a:ext cx="320040" cy="320040"/>
           </a:xfrm>
           <a:prstGeom prst="roundRect">
             <a:avLst/>
           </a:prstGeom>
           <a:noFill/>
-          <a:ln w="19050">
+          <a:ln w="12700">
             <a:solidFill>
               <a:srgbClr val="10B981"/>
             </a:solidFill>
@@ -4599,13 +4685,13 @@
       </p:sp>
       <p:sp>
         <p:nvSpPr>
-          <p:cNvPr id="24" name="TextBox 23"/>
+          <p:cNvPr id="25" name="TextBox 24"/>
           <p:cNvSpPr txBox="1"/>
           <p:nvPr/>
         </p:nvSpPr>
         <p:spPr>
           <a:xfrm>
-            <a:off x="1188720" y="4754880"/>
+            <a:off x="1097280" y="4590288"/>
             <a:ext cx="457200" cy="457200"/>
           </a:xfrm>
           <a:prstGeom prst="rect">
@@ -4620,7 +4706,7 @@
           <a:lstStyle/>
           <a:p>
             <a:pPr algn="l">
-              <a:defRPr sz="1200" b="1">
+              <a:defRPr sz="1100" b="1">
                 <a:solidFill>
                   <a:srgbClr val="10B981"/>
                 </a:solidFill>
@@ -4635,14 +4721,14 @@
       </p:sp>
       <p:sp>
         <p:nvSpPr>
-          <p:cNvPr id="25" name="TextBox 24"/>
+          <p:cNvPr id="26" name="TextBox 25"/>
           <p:cNvSpPr txBox="1"/>
           <p:nvPr/>
         </p:nvSpPr>
         <p:spPr>
           <a:xfrm>
-            <a:off x="1645920" y="4754880"/>
-            <a:ext cx="9601200" cy="502920"/>
+            <a:off x="1554480" y="4590288"/>
+            <a:ext cx="9601200" cy="457200"/>
           </a:xfrm>
           <a:prstGeom prst="rect">
             <a:avLst/>
@@ -4656,9 +4742,9 @@
           <a:lstStyle/>
           <a:p>
             <a:pPr algn="l">
-              <a:defRPr sz="1500" b="0">
+              <a:defRPr sz="1400" b="0">
                 <a:solidFill>
-                  <a:srgbClr val="CBD5E8"/>
+                  <a:srgbClr val="A0AEC4"/>
                 </a:solidFill>
                 <a:latin typeface="Microsoft YaHei"/>
               </a:defRPr>
@@ -4671,20 +4757,20 @@
       </p:sp>
       <p:sp>
         <p:nvSpPr>
-          <p:cNvPr id="26" name="Rounded Rectangle 25"/>
-          <p:cNvSpPr/>
-          <p:nvPr/>
-        </p:nvSpPr>
-        <p:spPr>
-          <a:xfrm>
-            <a:off x="457200" y="5486400"/>
-            <a:ext cx="11247120" cy="685800"/>
+          <p:cNvPr id="27" name="Rounded Rectangle 26"/>
+          <p:cNvSpPr/>
+          <p:nvPr/>
+        </p:nvSpPr>
+        <p:spPr>
+          <a:xfrm>
+            <a:off x="457200" y="5303520"/>
+            <a:ext cx="11247120" cy="658368"/>
           </a:xfrm>
           <a:prstGeom prst="roundRect">
             <a:avLst/>
           </a:prstGeom>
           <a:solidFill>
-            <a:srgbClr val="141E33"/>
+            <a:srgbClr val="161F35"/>
           </a:solidFill>
           <a:ln>
             <a:noFill/>
@@ -4714,20 +4800,20 @@
       </p:sp>
       <p:sp>
         <p:nvSpPr>
-          <p:cNvPr id="27" name="Rounded Rectangle 26"/>
-          <p:cNvSpPr/>
-          <p:nvPr/>
-        </p:nvSpPr>
-        <p:spPr>
-          <a:xfrm>
-            <a:off x="640080" y="5623560"/>
-            <a:ext cx="365760" cy="365760"/>
+          <p:cNvPr id="28" name="Rounded Rectangle 27"/>
+          <p:cNvSpPr/>
+          <p:nvPr/>
+        </p:nvSpPr>
+        <p:spPr>
+          <a:xfrm>
+            <a:off x="640080" y="5449824"/>
+            <a:ext cx="320040" cy="320040"/>
           </a:xfrm>
           <a:prstGeom prst="roundRect">
             <a:avLst/>
           </a:prstGeom>
           <a:noFill/>
-          <a:ln w="19050">
+          <a:ln w="12700">
             <a:solidFill>
               <a:srgbClr val="10B981"/>
             </a:solidFill>
@@ -4757,13 +4843,13 @@
       </p:sp>
       <p:sp>
         <p:nvSpPr>
-          <p:cNvPr id="28" name="TextBox 27"/>
+          <p:cNvPr id="29" name="TextBox 28"/>
           <p:cNvSpPr txBox="1"/>
           <p:nvPr/>
         </p:nvSpPr>
         <p:spPr>
           <a:xfrm>
-            <a:off x="1188720" y="5577840"/>
+            <a:off x="1097280" y="5394960"/>
             <a:ext cx="457200" cy="457200"/>
           </a:xfrm>
           <a:prstGeom prst="rect">
@@ -4778,7 +4864,7 @@
           <a:lstStyle/>
           <a:p>
             <a:pPr algn="l">
-              <a:defRPr sz="1200" b="1">
+              <a:defRPr sz="1100" b="1">
                 <a:solidFill>
                   <a:srgbClr val="10B981"/>
                 </a:solidFill>
@@ -4793,14 +4879,14 @@
       </p:sp>
       <p:sp>
         <p:nvSpPr>
-          <p:cNvPr id="29" name="TextBox 28"/>
+          <p:cNvPr id="30" name="TextBox 29"/>
           <p:cNvSpPr txBox="1"/>
           <p:nvPr/>
         </p:nvSpPr>
         <p:spPr>
           <a:xfrm>
-            <a:off x="1645920" y="5577840"/>
-            <a:ext cx="9601200" cy="502920"/>
+            <a:off x="1554480" y="5394960"/>
+            <a:ext cx="9601200" cy="457200"/>
           </a:xfrm>
           <a:prstGeom prst="rect">
             <a:avLst/>
@@ -4814,9 +4900,9 @@
           <a:lstStyle/>
           <a:p>
             <a:pPr algn="l">
-              <a:defRPr sz="1500" b="0">
+              <a:defRPr sz="1400" b="0">
                 <a:solidFill>
-                  <a:srgbClr val="CBD5E8"/>
+                  <a:srgbClr val="A0AEC4"/>
                 </a:solidFill>
                 <a:latin typeface="Microsoft YaHei"/>
               </a:defRPr>
@@ -4829,20 +4915,20 @@
       </p:sp>
       <p:sp>
         <p:nvSpPr>
-          <p:cNvPr id="30" name="Rectangle 29"/>
+          <p:cNvPr id="31" name="Rectangle 30"/>
           <p:cNvSpPr/>
           <p:nvPr/>
         </p:nvSpPr>
         <p:spPr>
           <a:xfrm>
             <a:off x="0" y="6446520"/>
-            <a:ext cx="12191695" cy="19050"/>
-          </a:xfrm>
-          <a:prstGeom prst="rect">
-            <a:avLst/>
-          </a:prstGeom>
-          <a:solidFill>
-            <a:srgbClr val="2D3B55"/>
+            <a:ext cx="12191695" cy="12700"/>
+          </a:xfrm>
+          <a:prstGeom prst="rect">
+            <a:avLst/>
+          </a:prstGeom>
+          <a:solidFill>
+            <a:srgbClr val="253350"/>
           </a:solidFill>
           <a:ln>
             <a:noFill/>
@@ -4872,14 +4958,14 @@
       </p:sp>
       <p:sp>
         <p:nvSpPr>
-          <p:cNvPr id="31" name="TextBox 30"/>
+          <p:cNvPr id="32" name="TextBox 31"/>
           <p:cNvSpPr txBox="1"/>
           <p:nvPr/>
         </p:nvSpPr>
         <p:spPr>
           <a:xfrm>
-            <a:off x="457200" y="6492240"/>
-            <a:ext cx="5486400" cy="274320"/>
+            <a:off x="731520" y="6492240"/>
+            <a:ext cx="4572000" cy="274320"/>
           </a:xfrm>
           <a:prstGeom prst="rect">
             <a:avLst/>
@@ -4895,20 +4981,20 @@
             <a:pPr algn="l">
               <a:defRPr sz="900" b="0">
                 <a:solidFill>
-                  <a:srgbClr val="6B7B9E"/>
+                  <a:srgbClr val="607090"/>
                 </a:solidFill>
                 <a:latin typeface="Microsoft YaHei"/>
               </a:defRPr>
             </a:pPr>
             <a:r>
-              <a:t>模块07：Seedance 2.0深度精通</a:t>
-            </a:r>
-          </a:p>
-        </p:txBody>
-      </p:sp>
-      <p:sp>
-        <p:nvSpPr>
-          <p:cNvPr id="32" name="TextBox 31"/>
+              <a:t>模块07 · Seedance 2.0深度精通</a:t>
+            </a:r>
+          </a:p>
+        </p:txBody>
+      </p:sp>
+      <p:sp>
+        <p:nvSpPr>
+          <p:cNvPr id="33" name="TextBox 32"/>
           <p:cNvSpPr txBox="1"/>
           <p:nvPr/>
         </p:nvSpPr>
@@ -4931,7 +5017,7 @@
             <a:pPr algn="r">
               <a:defRPr sz="900" b="0">
                 <a:solidFill>
-                  <a:srgbClr val="6B7B9E"/>
+                  <a:srgbClr val="607090"/>
                 </a:solidFill>
                 <a:latin typeface="Microsoft YaHei"/>
               </a:defRPr>
@@ -4956,7 +5042,7 @@
     <p:bg>
       <p:bgPr>
         <a:solidFill>
-          <a:srgbClr val="0B1120"/>
+          <a:srgbClr val="0A0E1A"/>
         </a:solidFill>
         <a:effectLst/>
       </p:bgPr>
@@ -4976,14 +5062,14 @@
         </p:nvSpPr>
         <p:spPr>
           <a:xfrm>
-            <a:off x="5029200" y="1371600"/>
-            <a:ext cx="2103120" cy="2103120"/>
+            <a:off x="5181447" y="1645920"/>
+            <a:ext cx="1828800" cy="1828800"/>
           </a:xfrm>
           <a:prstGeom prst="ellipse">
             <a:avLst/>
           </a:prstGeom>
           <a:solidFill>
-            <a:srgbClr val="7C3AED"/>
+            <a:srgbClr val="8B5CF6"/>
           </a:solidFill>
           <a:ln>
             <a:noFill/>
@@ -5019,8 +5105,8 @@
         </p:nvSpPr>
         <p:spPr>
           <a:xfrm>
-            <a:off x="5029200" y="1645920"/>
-            <a:ext cx="2103120" cy="1645920"/>
+            <a:off x="5181447" y="1920240"/>
+            <a:ext cx="1828800" cy="1371600"/>
           </a:xfrm>
           <a:prstGeom prst="rect">
             <a:avLst/>
@@ -5034,15 +5120,15 @@
           <a:lstStyle/>
           <a:p>
             <a:pPr algn="ctr">
-              <a:defRPr sz="6000" b="0">
+              <a:defRPr sz="5600" b="1">
                 <a:solidFill>
-                  <a:srgbClr val="FFFFFF"/>
+                  <a:srgbClr val="F0F4FC"/>
                 </a:solidFill>
                 <a:latin typeface="Microsoft YaHei"/>
               </a:defRPr>
             </a:pPr>
             <a:r>
-              <a:t>✅</a:t>
+              <a:t>✓</a:t>
             </a:r>
           </a:p>
         </p:txBody>
@@ -5056,7 +5142,7 @@
         <p:spPr>
           <a:xfrm>
             <a:off x="0" y="3840480"/>
-            <a:ext cx="12191695" cy="731520"/>
+            <a:ext cx="12191695" cy="640080"/>
           </a:xfrm>
           <a:prstGeom prst="rect">
             <a:avLst/>
@@ -5072,7 +5158,7 @@
             <a:pPr algn="ctr">
               <a:defRPr sz="3200" b="1">
                 <a:solidFill>
-                  <a:srgbClr val="FFFFFF"/>
+                  <a:srgbClr val="F0F4FC"/>
                 </a:solidFill>
                 <a:latin typeface="Microsoft YaHei"/>
               </a:defRPr>
@@ -5091,14 +5177,14 @@
         </p:nvSpPr>
         <p:spPr>
           <a:xfrm>
-            <a:off x="5029200" y="4754880"/>
-            <a:ext cx="2103120" cy="38100"/>
-          </a:xfrm>
-          <a:prstGeom prst="rect">
-            <a:avLst/>
-          </a:prstGeom>
-          <a:solidFill>
-            <a:srgbClr val="7C3AED"/>
+            <a:off x="5029200" y="4663440"/>
+            <a:ext cx="2103120" cy="25400"/>
+          </a:xfrm>
+          <a:prstGeom prst="rect">
+            <a:avLst/>
+          </a:prstGeom>
+          <a:solidFill>
+            <a:srgbClr val="8B5CF6"/>
           </a:solidFill>
           <a:ln>
             <a:noFill/>
@@ -5134,7 +5220,7 @@
         </p:nvSpPr>
         <p:spPr>
           <a:xfrm>
-            <a:off x="0" y="5029200"/>
+            <a:off x="0" y="4937760"/>
             <a:ext cx="12191695" cy="457200"/>
           </a:xfrm>
           <a:prstGeom prst="rect">
@@ -5149,9 +5235,9 @@
           <a:lstStyle/>
           <a:p>
             <a:pPr algn="ctr">
-              <a:defRPr sz="1800" b="0">
+              <a:defRPr sz="1600" b="0">
                 <a:solidFill>
-                  <a:srgbClr val="CBD5E8"/>
+                  <a:srgbClr val="A0AEC4"/>
                 </a:solidFill>
                 <a:latin typeface="Microsoft YaHei"/>
               </a:defRPr>
@@ -5185,9 +5271,9 @@
           <a:lstStyle/>
           <a:p>
             <a:pPr algn="ctr">
-              <a:defRPr sz="1200" b="0">
+              <a:defRPr sz="1100" b="0">
                 <a:solidFill>
-                  <a:srgbClr val="6B7B9E"/>
+                  <a:srgbClr val="607090"/>
                 </a:solidFill>
                 <a:latin typeface="Microsoft YaHei"/>
               </a:defRPr>
@@ -5212,7 +5298,7 @@
     <p:bg>
       <p:bgPr>
         <a:solidFill>
-          <a:srgbClr val="0B1120"/>
+          <a:srgbClr val="0A0E1A"/>
         </a:solidFill>
         <a:effectLst/>
       </p:bgPr>
@@ -5233,13 +5319,13 @@
         <p:spPr>
           <a:xfrm>
             <a:off x="0" y="0"/>
-            <a:ext cx="12191695" cy="1051560"/>
-          </a:xfrm>
-          <a:prstGeom prst="rect">
-            <a:avLst/>
-          </a:prstGeom>
-          <a:solidFill>
-            <a:srgbClr val="141E33"/>
+            <a:ext cx="12191695" cy="38100"/>
+          </a:xfrm>
+          <a:prstGeom prst="rect">
+            <a:avLst/>
+          </a:prstGeom>
+          <a:solidFill>
+            <a:srgbClr val="8B5CF6"/>
           </a:solidFill>
           <a:ln>
             <a:noFill/>
@@ -5275,14 +5361,14 @@
         </p:nvSpPr>
         <p:spPr>
           <a:xfrm>
-            <a:off x="0" y="0"/>
-            <a:ext cx="109728" cy="1051560"/>
-          </a:xfrm>
-          <a:prstGeom prst="rect">
-            <a:avLst/>
-          </a:prstGeom>
-          <a:solidFill>
-            <a:srgbClr val="7C3AED"/>
+            <a:off x="0" y="38100"/>
+            <a:ext cx="12191695" cy="914400"/>
+          </a:xfrm>
+          <a:prstGeom prst="rect">
+            <a:avLst/>
+          </a:prstGeom>
+          <a:solidFill>
+            <a:srgbClr val="161F35"/>
           </a:solidFill>
           <a:ln>
             <a:noFill/>
@@ -5312,14 +5398,57 @@
       </p:sp>
       <p:sp>
         <p:nvSpPr>
-          <p:cNvPr id="4" name="TextBox 3"/>
+          <p:cNvPr id="4" name="Rectangle 3"/>
+          <p:cNvSpPr/>
+          <p:nvPr/>
+        </p:nvSpPr>
+        <p:spPr>
+          <a:xfrm>
+            <a:off x="0" y="38100"/>
+            <a:ext cx="91440" cy="914400"/>
+          </a:xfrm>
+          <a:prstGeom prst="rect">
+            <a:avLst/>
+          </a:prstGeom>
+          <a:solidFill>
+            <a:srgbClr val="8B5CF6"/>
+          </a:solidFill>
+          <a:ln>
+            <a:noFill/>
+          </a:ln>
+        </p:spPr>
+        <p:style>
+          <a:lnRef idx="1">
+            <a:schemeClr val="accent1"/>
+          </a:lnRef>
+          <a:fillRef idx="3">
+            <a:schemeClr val="accent1"/>
+          </a:fillRef>
+          <a:effectRef idx="2">
+            <a:schemeClr val="accent1"/>
+          </a:effectRef>
+          <a:fontRef idx="minor">
+            <a:schemeClr val="lt1"/>
+          </a:fontRef>
+        </p:style>
+        <p:txBody>
+          <a:bodyPr rtlCol="0" anchor="ctr"/>
+          <a:lstStyle/>
+          <a:p>
+            <a:pPr algn="ctr"/>
+          </a:p>
+        </p:txBody>
+      </p:sp>
+      <p:sp>
+        <p:nvSpPr>
+          <p:cNvPr id="5" name="TextBox 4"/>
           <p:cNvSpPr txBox="1"/>
           <p:nvPr/>
         </p:nvSpPr>
         <p:spPr>
           <a:xfrm>
-            <a:off x="548640" y="182880"/>
-            <a:ext cx="10058400" cy="640080"/>
+            <a:off x="731520" y="137160"/>
+            <a:ext cx="10728655" cy="640080"/>
           </a:xfrm>
           <a:prstGeom prst="rect">
             <a:avLst/>
@@ -5333,9 +5462,9 @@
           <a:lstStyle/>
           <a:p>
             <a:pPr algn="l">
-              <a:defRPr sz="2600" b="1">
+              <a:defRPr sz="2400" b="1">
                 <a:solidFill>
-                  <a:srgbClr val="FFFFFF"/>
+                  <a:srgbClr val="F0F4FC"/>
                 </a:solidFill>
                 <a:latin typeface="Microsoft YaHei"/>
               </a:defRPr>
@@ -5348,20 +5477,20 @@
       </p:sp>
       <p:sp>
         <p:nvSpPr>
-          <p:cNvPr id="5" name="Rectangle 4"/>
-          <p:cNvSpPr/>
-          <p:nvPr/>
-        </p:nvSpPr>
-        <p:spPr>
-          <a:xfrm>
-            <a:off x="0" y="1051560"/>
-            <a:ext cx="12191695" cy="25400"/>
-          </a:xfrm>
-          <a:prstGeom prst="rect">
-            <a:avLst/>
-          </a:prstGeom>
-          <a:solidFill>
-            <a:srgbClr val="7C3AED"/>
+          <p:cNvPr id="6" name="Rectangle 5"/>
+          <p:cNvSpPr/>
+          <p:nvPr/>
+        </p:nvSpPr>
+        <p:spPr>
+          <a:xfrm>
+            <a:off x="0" y="1078992"/>
+            <a:ext cx="12191695" cy="12700"/>
+          </a:xfrm>
+          <a:prstGeom prst="rect">
+            <a:avLst/>
+          </a:prstGeom>
+          <a:solidFill>
+            <a:srgbClr val="253350"/>
           </a:solidFill>
           <a:ln>
             <a:noFill/>
@@ -5391,24 +5520,24 @@
       </p:sp>
       <p:sp>
         <p:nvSpPr>
-          <p:cNvPr id="6" name="Rounded Rectangle 5"/>
-          <p:cNvSpPr/>
-          <p:nvPr/>
-        </p:nvSpPr>
-        <p:spPr>
-          <a:xfrm>
-            <a:off x="548640" y="1371600"/>
-            <a:ext cx="3383280" cy="1005840"/>
+          <p:cNvPr id="7" name="Rounded Rectangle 6"/>
+          <p:cNvSpPr/>
+          <p:nvPr/>
+        </p:nvSpPr>
+        <p:spPr>
+          <a:xfrm>
+            <a:off x="594360" y="1371600"/>
+            <a:ext cx="3383280" cy="960120"/>
           </a:xfrm>
           <a:prstGeom prst="roundRect">
             <a:avLst/>
           </a:prstGeom>
           <a:solidFill>
-            <a:srgbClr val="141E33"/>
-          </a:solidFill>
-          <a:ln w="19050">
+            <a:srgbClr val="161F35"/>
+          </a:solidFill>
+          <a:ln w="12700">
             <a:solidFill>
-              <a:srgbClr val="7C3AED"/>
+              <a:srgbClr val="253350"/>
             </a:solidFill>
           </a:ln>
         </p:spPr>
@@ -5436,20 +5565,20 @@
       </p:sp>
       <p:sp>
         <p:nvSpPr>
-          <p:cNvPr id="7" name="Oval 6"/>
-          <p:cNvSpPr/>
-          <p:nvPr/>
-        </p:nvSpPr>
-        <p:spPr>
-          <a:xfrm>
-            <a:off x="685800" y="1600200"/>
-            <a:ext cx="457200" cy="457200"/>
+          <p:cNvPr id="8" name="Oval 7"/>
+          <p:cNvSpPr/>
+          <p:nvPr/>
+        </p:nvSpPr>
+        <p:spPr>
+          <a:xfrm>
+            <a:off x="704088" y="1572768"/>
+            <a:ext cx="411480" cy="411480"/>
           </a:xfrm>
           <a:prstGeom prst="ellipse">
             <a:avLst/>
           </a:prstGeom>
           <a:solidFill>
-            <a:srgbClr val="7C3AED"/>
+            <a:srgbClr val="8B5CF6"/>
           </a:solidFill>
           <a:ln>
             <a:noFill/>
@@ -5479,14 +5608,14 @@
       </p:sp>
       <p:sp>
         <p:nvSpPr>
-          <p:cNvPr id="8" name="TextBox 7"/>
+          <p:cNvPr id="9" name="TextBox 8"/>
           <p:cNvSpPr txBox="1"/>
           <p:nvPr/>
         </p:nvSpPr>
         <p:spPr>
           <a:xfrm>
-            <a:off x="685800" y="1600200"/>
-            <a:ext cx="457200" cy="457200"/>
+            <a:off x="704088" y="1572768"/>
+            <a:ext cx="411480" cy="411480"/>
           </a:xfrm>
           <a:prstGeom prst="rect">
             <a:avLst/>
@@ -5500,9 +5629,9 @@
           <a:lstStyle/>
           <a:p>
             <a:pPr algn="ctr">
-              <a:defRPr sz="1400" b="1">
+              <a:defRPr sz="1200" b="1">
                 <a:solidFill>
-                  <a:srgbClr val="FFFFFF"/>
+                  <a:srgbClr val="F0F4FC"/>
                 </a:solidFill>
                 <a:latin typeface="Microsoft YaHei"/>
               </a:defRPr>
@@ -5515,14 +5644,14 @@
       </p:sp>
       <p:sp>
         <p:nvSpPr>
-          <p:cNvPr id="9" name="TextBox 8"/>
+          <p:cNvPr id="10" name="TextBox 9"/>
           <p:cNvSpPr txBox="1"/>
           <p:nvPr/>
         </p:nvSpPr>
         <p:spPr>
           <a:xfrm>
-            <a:off x="1280160" y="1554480"/>
-            <a:ext cx="2468880" cy="640080"/>
+            <a:off x="1234440" y="1536192"/>
+            <a:ext cx="2560320" cy="594360"/>
           </a:xfrm>
           <a:prstGeom prst="rect">
             <a:avLst/>
@@ -5536,9 +5665,9 @@
           <a:lstStyle/>
           <a:p>
             <a:pPr algn="l">
-              <a:defRPr sz="1300" b="0">
+              <a:defRPr sz="1200" b="0">
                 <a:solidFill>
-                  <a:srgbClr val="CBD5E8"/>
+                  <a:srgbClr val="A0AEC4"/>
                 </a:solidFill>
                 <a:latin typeface="Microsoft YaHei"/>
               </a:defRPr>
@@ -5551,24 +5680,24 @@
       </p:sp>
       <p:sp>
         <p:nvSpPr>
-          <p:cNvPr id="10" name="Rounded Rectangle 9"/>
+          <p:cNvPr id="11" name="Rounded Rectangle 10"/>
           <p:cNvSpPr/>
           <p:nvPr/>
         </p:nvSpPr>
         <p:spPr>
           <a:xfrm>
             <a:off x="4251960" y="1371600"/>
-            <a:ext cx="3383280" cy="1005840"/>
+            <a:ext cx="3383280" cy="960120"/>
           </a:xfrm>
           <a:prstGeom prst="roundRect">
             <a:avLst/>
           </a:prstGeom>
           <a:solidFill>
-            <a:srgbClr val="141E33"/>
-          </a:solidFill>
-          <a:ln w="19050">
+            <a:srgbClr val="161F35"/>
+          </a:solidFill>
+          <a:ln w="12700">
             <a:solidFill>
-              <a:srgbClr val="7C3AED"/>
+              <a:srgbClr val="253350"/>
             </a:solidFill>
           </a:ln>
         </p:spPr>
@@ -5596,20 +5725,20 @@
       </p:sp>
       <p:sp>
         <p:nvSpPr>
-          <p:cNvPr id="11" name="Oval 10"/>
-          <p:cNvSpPr/>
-          <p:nvPr/>
-        </p:nvSpPr>
-        <p:spPr>
-          <a:xfrm>
-            <a:off x="4389120" y="1600200"/>
-            <a:ext cx="457200" cy="457200"/>
+          <p:cNvPr id="12" name="Oval 11"/>
+          <p:cNvSpPr/>
+          <p:nvPr/>
+        </p:nvSpPr>
+        <p:spPr>
+          <a:xfrm>
+            <a:off x="4361688" y="1572768"/>
+            <a:ext cx="411480" cy="411480"/>
           </a:xfrm>
           <a:prstGeom prst="ellipse">
             <a:avLst/>
           </a:prstGeom>
           <a:solidFill>
-            <a:srgbClr val="7C3AED"/>
+            <a:srgbClr val="8B5CF6"/>
           </a:solidFill>
           <a:ln>
             <a:noFill/>
@@ -5639,14 +5768,14 @@
       </p:sp>
       <p:sp>
         <p:nvSpPr>
-          <p:cNvPr id="12" name="TextBox 11"/>
+          <p:cNvPr id="13" name="TextBox 12"/>
           <p:cNvSpPr txBox="1"/>
           <p:nvPr/>
         </p:nvSpPr>
         <p:spPr>
           <a:xfrm>
-            <a:off x="4389120" y="1600200"/>
-            <a:ext cx="457200" cy="457200"/>
+            <a:off x="4361688" y="1572768"/>
+            <a:ext cx="411480" cy="411480"/>
           </a:xfrm>
           <a:prstGeom prst="rect">
             <a:avLst/>
@@ -5660,9 +5789,9 @@
           <a:lstStyle/>
           <a:p>
             <a:pPr algn="ctr">
-              <a:defRPr sz="1400" b="1">
+              <a:defRPr sz="1200" b="1">
                 <a:solidFill>
-                  <a:srgbClr val="FFFFFF"/>
+                  <a:srgbClr val="F0F4FC"/>
                 </a:solidFill>
                 <a:latin typeface="Microsoft YaHei"/>
               </a:defRPr>
@@ -5675,14 +5804,14 @@
       </p:sp>
       <p:sp>
         <p:nvSpPr>
-          <p:cNvPr id="13" name="TextBox 12"/>
+          <p:cNvPr id="14" name="TextBox 13"/>
           <p:cNvSpPr txBox="1"/>
           <p:nvPr/>
         </p:nvSpPr>
         <p:spPr>
           <a:xfrm>
-            <a:off x="4983480" y="1554480"/>
-            <a:ext cx="2468880" cy="640080"/>
+            <a:off x="4892040" y="1536192"/>
+            <a:ext cx="2560320" cy="594360"/>
           </a:xfrm>
           <a:prstGeom prst="rect">
             <a:avLst/>
@@ -5696,9 +5825,9 @@
           <a:lstStyle/>
           <a:p>
             <a:pPr algn="l">
-              <a:defRPr sz="1300" b="0">
+              <a:defRPr sz="1200" b="0">
                 <a:solidFill>
-                  <a:srgbClr val="CBD5E8"/>
+                  <a:srgbClr val="A0AEC4"/>
                 </a:solidFill>
                 <a:latin typeface="Microsoft YaHei"/>
               </a:defRPr>
@@ -5711,24 +5840,24 @@
       </p:sp>
       <p:sp>
         <p:nvSpPr>
-          <p:cNvPr id="14" name="Rounded Rectangle 13"/>
-          <p:cNvSpPr/>
-          <p:nvPr/>
-        </p:nvSpPr>
-        <p:spPr>
-          <a:xfrm>
-            <a:off x="7955280" y="1371600"/>
-            <a:ext cx="3383280" cy="1005840"/>
+          <p:cNvPr id="15" name="Rounded Rectangle 14"/>
+          <p:cNvSpPr/>
+          <p:nvPr/>
+        </p:nvSpPr>
+        <p:spPr>
+          <a:xfrm>
+            <a:off x="7909560" y="1371600"/>
+            <a:ext cx="3383280" cy="960120"/>
           </a:xfrm>
           <a:prstGeom prst="roundRect">
             <a:avLst/>
           </a:prstGeom>
           <a:solidFill>
-            <a:srgbClr val="141E33"/>
-          </a:solidFill>
-          <a:ln w="19050">
+            <a:srgbClr val="161F35"/>
+          </a:solidFill>
+          <a:ln w="12700">
             <a:solidFill>
-              <a:srgbClr val="7C3AED"/>
+              <a:srgbClr val="253350"/>
             </a:solidFill>
           </a:ln>
         </p:spPr>
@@ -5756,20 +5885,20 @@
       </p:sp>
       <p:sp>
         <p:nvSpPr>
-          <p:cNvPr id="15" name="Oval 14"/>
-          <p:cNvSpPr/>
-          <p:nvPr/>
-        </p:nvSpPr>
-        <p:spPr>
-          <a:xfrm>
-            <a:off x="8092440" y="1600200"/>
-            <a:ext cx="457200" cy="457200"/>
+          <p:cNvPr id="16" name="Oval 15"/>
+          <p:cNvSpPr/>
+          <p:nvPr/>
+        </p:nvSpPr>
+        <p:spPr>
+          <a:xfrm>
+            <a:off x="8019288" y="1572768"/>
+            <a:ext cx="411480" cy="411480"/>
           </a:xfrm>
           <a:prstGeom prst="ellipse">
             <a:avLst/>
           </a:prstGeom>
           <a:solidFill>
-            <a:srgbClr val="7C3AED"/>
+            <a:srgbClr val="8B5CF6"/>
           </a:solidFill>
           <a:ln>
             <a:noFill/>
@@ -5799,14 +5928,14 @@
       </p:sp>
       <p:sp>
         <p:nvSpPr>
-          <p:cNvPr id="16" name="TextBox 15"/>
+          <p:cNvPr id="17" name="TextBox 16"/>
           <p:cNvSpPr txBox="1"/>
           <p:nvPr/>
         </p:nvSpPr>
         <p:spPr>
           <a:xfrm>
-            <a:off x="8092440" y="1600200"/>
-            <a:ext cx="457200" cy="457200"/>
+            <a:off x="8019288" y="1572768"/>
+            <a:ext cx="411480" cy="411480"/>
           </a:xfrm>
           <a:prstGeom prst="rect">
             <a:avLst/>
@@ -5820,9 +5949,9 @@
           <a:lstStyle/>
           <a:p>
             <a:pPr algn="ctr">
-              <a:defRPr sz="1400" b="1">
+              <a:defRPr sz="1200" b="1">
                 <a:solidFill>
-                  <a:srgbClr val="FFFFFF"/>
+                  <a:srgbClr val="F0F4FC"/>
                 </a:solidFill>
                 <a:latin typeface="Microsoft YaHei"/>
               </a:defRPr>
@@ -5835,14 +5964,14 @@
       </p:sp>
       <p:sp>
         <p:nvSpPr>
-          <p:cNvPr id="17" name="TextBox 16"/>
+          <p:cNvPr id="18" name="TextBox 17"/>
           <p:cNvSpPr txBox="1"/>
           <p:nvPr/>
         </p:nvSpPr>
         <p:spPr>
           <a:xfrm>
-            <a:off x="8686800" y="1554480"/>
-            <a:ext cx="2468880" cy="640080"/>
+            <a:off x="8549640" y="1536192"/>
+            <a:ext cx="2560320" cy="594360"/>
           </a:xfrm>
           <a:prstGeom prst="rect">
             <a:avLst/>
@@ -5856,9 +5985,9 @@
           <a:lstStyle/>
           <a:p>
             <a:pPr algn="l">
-              <a:defRPr sz="1300" b="0">
+              <a:defRPr sz="1200" b="0">
                 <a:solidFill>
-                  <a:srgbClr val="CBD5E8"/>
+                  <a:srgbClr val="A0AEC4"/>
                 </a:solidFill>
                 <a:latin typeface="Microsoft YaHei"/>
               </a:defRPr>
@@ -5871,24 +6000,24 @@
       </p:sp>
       <p:sp>
         <p:nvSpPr>
-          <p:cNvPr id="18" name="Rounded Rectangle 17"/>
-          <p:cNvSpPr/>
-          <p:nvPr/>
-        </p:nvSpPr>
-        <p:spPr>
-          <a:xfrm>
-            <a:off x="548640" y="2606040"/>
-            <a:ext cx="3383280" cy="1005840"/>
+          <p:cNvPr id="19" name="Rounded Rectangle 18"/>
+          <p:cNvSpPr/>
+          <p:nvPr/>
+        </p:nvSpPr>
+        <p:spPr>
+          <a:xfrm>
+            <a:off x="594360" y="2606040"/>
+            <a:ext cx="3383280" cy="960120"/>
           </a:xfrm>
           <a:prstGeom prst="roundRect">
             <a:avLst/>
           </a:prstGeom>
           <a:solidFill>
-            <a:srgbClr val="141E33"/>
-          </a:solidFill>
-          <a:ln w="19050">
+            <a:srgbClr val="161F35"/>
+          </a:solidFill>
+          <a:ln w="12700">
             <a:solidFill>
-              <a:srgbClr val="7C3AED"/>
+              <a:srgbClr val="253350"/>
             </a:solidFill>
           </a:ln>
         </p:spPr>
@@ -5916,20 +6045,20 @@
       </p:sp>
       <p:sp>
         <p:nvSpPr>
-          <p:cNvPr id="19" name="Oval 18"/>
-          <p:cNvSpPr/>
-          <p:nvPr/>
-        </p:nvSpPr>
-        <p:spPr>
-          <a:xfrm>
-            <a:off x="685800" y="2834640"/>
-            <a:ext cx="457200" cy="457200"/>
+          <p:cNvPr id="20" name="Oval 19"/>
+          <p:cNvSpPr/>
+          <p:nvPr/>
+        </p:nvSpPr>
+        <p:spPr>
+          <a:xfrm>
+            <a:off x="704088" y="2807208"/>
+            <a:ext cx="411480" cy="411480"/>
           </a:xfrm>
           <a:prstGeom prst="ellipse">
             <a:avLst/>
           </a:prstGeom>
           <a:solidFill>
-            <a:srgbClr val="7C3AED"/>
+            <a:srgbClr val="8B5CF6"/>
           </a:solidFill>
           <a:ln>
             <a:noFill/>
@@ -5959,14 +6088,14 @@
       </p:sp>
       <p:sp>
         <p:nvSpPr>
-          <p:cNvPr id="20" name="TextBox 19"/>
+          <p:cNvPr id="21" name="TextBox 20"/>
           <p:cNvSpPr txBox="1"/>
           <p:nvPr/>
         </p:nvSpPr>
         <p:spPr>
           <a:xfrm>
-            <a:off x="685800" y="2834640"/>
-            <a:ext cx="457200" cy="457200"/>
+            <a:off x="704088" y="2807208"/>
+            <a:ext cx="411480" cy="411480"/>
           </a:xfrm>
           <a:prstGeom prst="rect">
             <a:avLst/>
@@ -5980,9 +6109,9 @@
           <a:lstStyle/>
           <a:p>
             <a:pPr algn="ctr">
-              <a:defRPr sz="1400" b="1">
+              <a:defRPr sz="1200" b="1">
                 <a:solidFill>
-                  <a:srgbClr val="FFFFFF"/>
+                  <a:srgbClr val="F0F4FC"/>
                 </a:solidFill>
                 <a:latin typeface="Microsoft YaHei"/>
               </a:defRPr>
@@ -5995,14 +6124,14 @@
       </p:sp>
       <p:sp>
         <p:nvSpPr>
-          <p:cNvPr id="21" name="TextBox 20"/>
+          <p:cNvPr id="22" name="TextBox 21"/>
           <p:cNvSpPr txBox="1"/>
           <p:nvPr/>
         </p:nvSpPr>
         <p:spPr>
           <a:xfrm>
-            <a:off x="1280160" y="2788920"/>
-            <a:ext cx="2468880" cy="640080"/>
+            <a:off x="1234440" y="2770632"/>
+            <a:ext cx="2560320" cy="594360"/>
           </a:xfrm>
           <a:prstGeom prst="rect">
             <a:avLst/>
@@ -6016,9 +6145,9 @@
           <a:lstStyle/>
           <a:p>
             <a:pPr algn="l">
-              <a:defRPr sz="1300" b="0">
+              <a:defRPr sz="1200" b="0">
                 <a:solidFill>
-                  <a:srgbClr val="CBD5E8"/>
+                  <a:srgbClr val="A0AEC4"/>
                 </a:solidFill>
                 <a:latin typeface="Microsoft YaHei"/>
               </a:defRPr>
@@ -6031,24 +6160,24 @@
       </p:sp>
       <p:sp>
         <p:nvSpPr>
-          <p:cNvPr id="22" name="Rounded Rectangle 21"/>
+          <p:cNvPr id="23" name="Rounded Rectangle 22"/>
           <p:cNvSpPr/>
           <p:nvPr/>
         </p:nvSpPr>
         <p:spPr>
           <a:xfrm>
             <a:off x="4251960" y="2606040"/>
-            <a:ext cx="3383280" cy="1005840"/>
+            <a:ext cx="3383280" cy="960120"/>
           </a:xfrm>
           <a:prstGeom prst="roundRect">
             <a:avLst/>
           </a:prstGeom>
           <a:solidFill>
-            <a:srgbClr val="141E33"/>
-          </a:solidFill>
-          <a:ln w="19050">
+            <a:srgbClr val="161F35"/>
+          </a:solidFill>
+          <a:ln w="12700">
             <a:solidFill>
-              <a:srgbClr val="7C3AED"/>
+              <a:srgbClr val="253350"/>
             </a:solidFill>
           </a:ln>
         </p:spPr>
@@ -6076,20 +6205,20 @@
       </p:sp>
       <p:sp>
         <p:nvSpPr>
-          <p:cNvPr id="23" name="Oval 22"/>
-          <p:cNvSpPr/>
-          <p:nvPr/>
-        </p:nvSpPr>
-        <p:spPr>
-          <a:xfrm>
-            <a:off x="4389120" y="2834640"/>
-            <a:ext cx="457200" cy="457200"/>
+          <p:cNvPr id="24" name="Oval 23"/>
+          <p:cNvSpPr/>
+          <p:nvPr/>
+        </p:nvSpPr>
+        <p:spPr>
+          <a:xfrm>
+            <a:off x="4361688" y="2807208"/>
+            <a:ext cx="411480" cy="411480"/>
           </a:xfrm>
           <a:prstGeom prst="ellipse">
             <a:avLst/>
           </a:prstGeom>
           <a:solidFill>
-            <a:srgbClr val="7C3AED"/>
+            <a:srgbClr val="8B5CF6"/>
           </a:solidFill>
           <a:ln>
             <a:noFill/>
@@ -6119,14 +6248,14 @@
       </p:sp>
       <p:sp>
         <p:nvSpPr>
-          <p:cNvPr id="24" name="TextBox 23"/>
+          <p:cNvPr id="25" name="TextBox 24"/>
           <p:cNvSpPr txBox="1"/>
           <p:nvPr/>
         </p:nvSpPr>
         <p:spPr>
           <a:xfrm>
-            <a:off x="4389120" y="2834640"/>
-            <a:ext cx="457200" cy="457200"/>
+            <a:off x="4361688" y="2807208"/>
+            <a:ext cx="411480" cy="411480"/>
           </a:xfrm>
           <a:prstGeom prst="rect">
             <a:avLst/>
@@ -6140,9 +6269,9 @@
           <a:lstStyle/>
           <a:p>
             <a:pPr algn="ctr">
-              <a:defRPr sz="1400" b="1">
+              <a:defRPr sz="1200" b="1">
                 <a:solidFill>
-                  <a:srgbClr val="FFFFFF"/>
+                  <a:srgbClr val="F0F4FC"/>
                 </a:solidFill>
                 <a:latin typeface="Microsoft YaHei"/>
               </a:defRPr>
@@ -6155,14 +6284,14 @@
       </p:sp>
       <p:sp>
         <p:nvSpPr>
-          <p:cNvPr id="25" name="TextBox 24"/>
+          <p:cNvPr id="26" name="TextBox 25"/>
           <p:cNvSpPr txBox="1"/>
           <p:nvPr/>
         </p:nvSpPr>
         <p:spPr>
           <a:xfrm>
-            <a:off x="4983480" y="2788920"/>
-            <a:ext cx="2468880" cy="640080"/>
+            <a:off x="4892040" y="2770632"/>
+            <a:ext cx="2560320" cy="594360"/>
           </a:xfrm>
           <a:prstGeom prst="rect">
             <a:avLst/>
@@ -6176,9 +6305,9 @@
           <a:lstStyle/>
           <a:p>
             <a:pPr algn="l">
-              <a:defRPr sz="1300" b="0">
+              <a:defRPr sz="1200" b="0">
                 <a:solidFill>
-                  <a:srgbClr val="CBD5E8"/>
+                  <a:srgbClr val="A0AEC4"/>
                 </a:solidFill>
                 <a:latin typeface="Microsoft YaHei"/>
               </a:defRPr>
@@ -6191,24 +6320,24 @@
       </p:sp>
       <p:sp>
         <p:nvSpPr>
-          <p:cNvPr id="26" name="Rounded Rectangle 25"/>
-          <p:cNvSpPr/>
-          <p:nvPr/>
-        </p:nvSpPr>
-        <p:spPr>
-          <a:xfrm>
-            <a:off x="7955280" y="2606040"/>
-            <a:ext cx="3383280" cy="1005840"/>
+          <p:cNvPr id="27" name="Rounded Rectangle 26"/>
+          <p:cNvSpPr/>
+          <p:nvPr/>
+        </p:nvSpPr>
+        <p:spPr>
+          <a:xfrm>
+            <a:off x="7909560" y="2606040"/>
+            <a:ext cx="3383280" cy="960120"/>
           </a:xfrm>
           <a:prstGeom prst="roundRect">
             <a:avLst/>
           </a:prstGeom>
           <a:solidFill>
-            <a:srgbClr val="141E33"/>
-          </a:solidFill>
-          <a:ln w="19050">
+            <a:srgbClr val="161F35"/>
+          </a:solidFill>
+          <a:ln w="12700">
             <a:solidFill>
-              <a:srgbClr val="7C3AED"/>
+              <a:srgbClr val="253350"/>
             </a:solidFill>
           </a:ln>
         </p:spPr>
@@ -6236,20 +6365,20 @@
       </p:sp>
       <p:sp>
         <p:nvSpPr>
-          <p:cNvPr id="27" name="Oval 26"/>
-          <p:cNvSpPr/>
-          <p:nvPr/>
-        </p:nvSpPr>
-        <p:spPr>
-          <a:xfrm>
-            <a:off x="8092440" y="2834640"/>
-            <a:ext cx="457200" cy="457200"/>
+          <p:cNvPr id="28" name="Oval 27"/>
+          <p:cNvSpPr/>
+          <p:nvPr/>
+        </p:nvSpPr>
+        <p:spPr>
+          <a:xfrm>
+            <a:off x="8019288" y="2807208"/>
+            <a:ext cx="411480" cy="411480"/>
           </a:xfrm>
           <a:prstGeom prst="ellipse">
             <a:avLst/>
           </a:prstGeom>
           <a:solidFill>
-            <a:srgbClr val="7C3AED"/>
+            <a:srgbClr val="8B5CF6"/>
           </a:solidFill>
           <a:ln>
             <a:noFill/>
@@ -6279,14 +6408,14 @@
       </p:sp>
       <p:sp>
         <p:nvSpPr>
-          <p:cNvPr id="28" name="TextBox 27"/>
+          <p:cNvPr id="29" name="TextBox 28"/>
           <p:cNvSpPr txBox="1"/>
           <p:nvPr/>
         </p:nvSpPr>
         <p:spPr>
           <a:xfrm>
-            <a:off x="8092440" y="2834640"/>
-            <a:ext cx="457200" cy="457200"/>
+            <a:off x="8019288" y="2807208"/>
+            <a:ext cx="411480" cy="411480"/>
           </a:xfrm>
           <a:prstGeom prst="rect">
             <a:avLst/>
@@ -6300,9 +6429,9 @@
           <a:lstStyle/>
           <a:p>
             <a:pPr algn="ctr">
-              <a:defRPr sz="1400" b="1">
+              <a:defRPr sz="1200" b="1">
                 <a:solidFill>
-                  <a:srgbClr val="FFFFFF"/>
+                  <a:srgbClr val="F0F4FC"/>
                 </a:solidFill>
                 <a:latin typeface="Microsoft YaHei"/>
               </a:defRPr>
@@ -6315,14 +6444,14 @@
       </p:sp>
       <p:sp>
         <p:nvSpPr>
-          <p:cNvPr id="29" name="TextBox 28"/>
+          <p:cNvPr id="30" name="TextBox 29"/>
           <p:cNvSpPr txBox="1"/>
           <p:nvPr/>
         </p:nvSpPr>
         <p:spPr>
           <a:xfrm>
-            <a:off x="8686800" y="2788920"/>
-            <a:ext cx="2468880" cy="640080"/>
+            <a:off x="8549640" y="2770632"/>
+            <a:ext cx="2560320" cy="594360"/>
           </a:xfrm>
           <a:prstGeom prst="rect">
             <a:avLst/>
@@ -6336,9 +6465,9 @@
           <a:lstStyle/>
           <a:p>
             <a:pPr algn="l">
-              <a:defRPr sz="1300" b="0">
+              <a:defRPr sz="1200" b="0">
                 <a:solidFill>
-                  <a:srgbClr val="CBD5E8"/>
+                  <a:srgbClr val="A0AEC4"/>
                 </a:solidFill>
                 <a:latin typeface="Microsoft YaHei"/>
               </a:defRPr>
@@ -6351,24 +6480,24 @@
       </p:sp>
       <p:sp>
         <p:nvSpPr>
-          <p:cNvPr id="30" name="Rounded Rectangle 29"/>
-          <p:cNvSpPr/>
-          <p:nvPr/>
-        </p:nvSpPr>
-        <p:spPr>
-          <a:xfrm>
-            <a:off x="548640" y="3840480"/>
-            <a:ext cx="3383280" cy="1005840"/>
+          <p:cNvPr id="31" name="Rounded Rectangle 30"/>
+          <p:cNvSpPr/>
+          <p:nvPr/>
+        </p:nvSpPr>
+        <p:spPr>
+          <a:xfrm>
+            <a:off x="594360" y="3840480"/>
+            <a:ext cx="3383280" cy="960120"/>
           </a:xfrm>
           <a:prstGeom prst="roundRect">
             <a:avLst/>
           </a:prstGeom>
           <a:solidFill>
-            <a:srgbClr val="141E33"/>
-          </a:solidFill>
-          <a:ln w="19050">
+            <a:srgbClr val="161F35"/>
+          </a:solidFill>
+          <a:ln w="12700">
             <a:solidFill>
-              <a:srgbClr val="7C3AED"/>
+              <a:srgbClr val="253350"/>
             </a:solidFill>
           </a:ln>
         </p:spPr>
@@ -6396,20 +6525,20 @@
       </p:sp>
       <p:sp>
         <p:nvSpPr>
-          <p:cNvPr id="31" name="Oval 30"/>
-          <p:cNvSpPr/>
-          <p:nvPr/>
-        </p:nvSpPr>
-        <p:spPr>
-          <a:xfrm>
-            <a:off x="685800" y="4069080"/>
-            <a:ext cx="457200" cy="457200"/>
+          <p:cNvPr id="32" name="Oval 31"/>
+          <p:cNvSpPr/>
+          <p:nvPr/>
+        </p:nvSpPr>
+        <p:spPr>
+          <a:xfrm>
+            <a:off x="704088" y="4041648"/>
+            <a:ext cx="411480" cy="411480"/>
           </a:xfrm>
           <a:prstGeom prst="ellipse">
             <a:avLst/>
           </a:prstGeom>
           <a:solidFill>
-            <a:srgbClr val="7C3AED"/>
+            <a:srgbClr val="8B5CF6"/>
           </a:solidFill>
           <a:ln>
             <a:noFill/>
@@ -6439,14 +6568,14 @@
       </p:sp>
       <p:sp>
         <p:nvSpPr>
-          <p:cNvPr id="32" name="TextBox 31"/>
+          <p:cNvPr id="33" name="TextBox 32"/>
           <p:cNvSpPr txBox="1"/>
           <p:nvPr/>
         </p:nvSpPr>
         <p:spPr>
           <a:xfrm>
-            <a:off x="685800" y="4069080"/>
-            <a:ext cx="457200" cy="457200"/>
+            <a:off x="704088" y="4041648"/>
+            <a:ext cx="411480" cy="411480"/>
           </a:xfrm>
           <a:prstGeom prst="rect">
             <a:avLst/>
@@ -6460,9 +6589,9 @@
           <a:lstStyle/>
           <a:p>
             <a:pPr algn="ctr">
-              <a:defRPr sz="1400" b="1">
+              <a:defRPr sz="1200" b="1">
                 <a:solidFill>
-                  <a:srgbClr val="FFFFFF"/>
+                  <a:srgbClr val="F0F4FC"/>
                 </a:solidFill>
                 <a:latin typeface="Microsoft YaHei"/>
               </a:defRPr>
@@ -6475,14 +6604,14 @@
       </p:sp>
       <p:sp>
         <p:nvSpPr>
-          <p:cNvPr id="33" name="TextBox 32"/>
+          <p:cNvPr id="34" name="TextBox 33"/>
           <p:cNvSpPr txBox="1"/>
           <p:nvPr/>
         </p:nvSpPr>
         <p:spPr>
           <a:xfrm>
-            <a:off x="1280160" y="4023360"/>
-            <a:ext cx="2468880" cy="640080"/>
+            <a:off x="1234440" y="4005072"/>
+            <a:ext cx="2560320" cy="594360"/>
           </a:xfrm>
           <a:prstGeom prst="rect">
             <a:avLst/>
@@ -6496,9 +6625,9 @@
           <a:lstStyle/>
           <a:p>
             <a:pPr algn="l">
-              <a:defRPr sz="1300" b="0">
+              <a:defRPr sz="1200" b="0">
                 <a:solidFill>
-                  <a:srgbClr val="CBD5E8"/>
+                  <a:srgbClr val="A0AEC4"/>
                 </a:solidFill>
                 <a:latin typeface="Microsoft YaHei"/>
               </a:defRPr>
@@ -6511,24 +6640,24 @@
       </p:sp>
       <p:sp>
         <p:nvSpPr>
-          <p:cNvPr id="34" name="Rounded Rectangle 33"/>
+          <p:cNvPr id="35" name="Rounded Rectangle 34"/>
           <p:cNvSpPr/>
           <p:nvPr/>
         </p:nvSpPr>
         <p:spPr>
           <a:xfrm>
             <a:off x="4251960" y="3840480"/>
-            <a:ext cx="3383280" cy="1005840"/>
+            <a:ext cx="3383280" cy="960120"/>
           </a:xfrm>
           <a:prstGeom prst="roundRect">
             <a:avLst/>
           </a:prstGeom>
           <a:solidFill>
-            <a:srgbClr val="141E33"/>
-          </a:solidFill>
-          <a:ln w="19050">
+            <a:srgbClr val="161F35"/>
+          </a:solidFill>
+          <a:ln w="12700">
             <a:solidFill>
-              <a:srgbClr val="7C3AED"/>
+              <a:srgbClr val="253350"/>
             </a:solidFill>
           </a:ln>
         </p:spPr>
@@ -6556,20 +6685,20 @@
       </p:sp>
       <p:sp>
         <p:nvSpPr>
-          <p:cNvPr id="35" name="Oval 34"/>
-          <p:cNvSpPr/>
-          <p:nvPr/>
-        </p:nvSpPr>
-        <p:spPr>
-          <a:xfrm>
-            <a:off x="4389120" y="4069080"/>
-            <a:ext cx="457200" cy="457200"/>
+          <p:cNvPr id="36" name="Oval 35"/>
+          <p:cNvSpPr/>
+          <p:nvPr/>
+        </p:nvSpPr>
+        <p:spPr>
+          <a:xfrm>
+            <a:off x="4361688" y="4041648"/>
+            <a:ext cx="411480" cy="411480"/>
           </a:xfrm>
           <a:prstGeom prst="ellipse">
             <a:avLst/>
           </a:prstGeom>
           <a:solidFill>
-            <a:srgbClr val="7C3AED"/>
+            <a:srgbClr val="8B5CF6"/>
           </a:solidFill>
           <a:ln>
             <a:noFill/>
@@ -6599,14 +6728,14 @@
       </p:sp>
       <p:sp>
         <p:nvSpPr>
-          <p:cNvPr id="36" name="TextBox 35"/>
+          <p:cNvPr id="37" name="TextBox 36"/>
           <p:cNvSpPr txBox="1"/>
           <p:nvPr/>
         </p:nvSpPr>
         <p:spPr>
           <a:xfrm>
-            <a:off x="4389120" y="4069080"/>
-            <a:ext cx="457200" cy="457200"/>
+            <a:off x="4361688" y="4041648"/>
+            <a:ext cx="411480" cy="411480"/>
           </a:xfrm>
           <a:prstGeom prst="rect">
             <a:avLst/>
@@ -6620,9 +6749,9 @@
           <a:lstStyle/>
           <a:p>
             <a:pPr algn="ctr">
-              <a:defRPr sz="1400" b="1">
+              <a:defRPr sz="1200" b="1">
                 <a:solidFill>
-                  <a:srgbClr val="FFFFFF"/>
+                  <a:srgbClr val="F0F4FC"/>
                 </a:solidFill>
                 <a:latin typeface="Microsoft YaHei"/>
               </a:defRPr>
@@ -6635,14 +6764,14 @@
       </p:sp>
       <p:sp>
         <p:nvSpPr>
-          <p:cNvPr id="37" name="TextBox 36"/>
+          <p:cNvPr id="38" name="TextBox 37"/>
           <p:cNvSpPr txBox="1"/>
           <p:nvPr/>
         </p:nvSpPr>
         <p:spPr>
           <a:xfrm>
-            <a:off x="4983480" y="4023360"/>
-            <a:ext cx="2468880" cy="640080"/>
+            <a:off x="4892040" y="4005072"/>
+            <a:ext cx="2560320" cy="594360"/>
           </a:xfrm>
           <a:prstGeom prst="rect">
             <a:avLst/>
@@ -6656,9 +6785,9 @@
           <a:lstStyle/>
           <a:p>
             <a:pPr algn="l">
-              <a:defRPr sz="1300" b="0">
+              <a:defRPr sz="1200" b="0">
                 <a:solidFill>
-                  <a:srgbClr val="CBD5E8"/>
+                  <a:srgbClr val="A0AEC4"/>
                 </a:solidFill>
                 <a:latin typeface="Microsoft YaHei"/>
               </a:defRPr>
@@ -6671,20 +6800,20 @@
       </p:sp>
       <p:sp>
         <p:nvSpPr>
-          <p:cNvPr id="38" name="Rectangle 37"/>
+          <p:cNvPr id="39" name="Rectangle 38"/>
           <p:cNvSpPr/>
           <p:nvPr/>
         </p:nvSpPr>
         <p:spPr>
           <a:xfrm>
             <a:off x="0" y="6446520"/>
-            <a:ext cx="12191695" cy="19050"/>
-          </a:xfrm>
-          <a:prstGeom prst="rect">
-            <a:avLst/>
-          </a:prstGeom>
-          <a:solidFill>
-            <a:srgbClr val="2D3B55"/>
+            <a:ext cx="12191695" cy="12700"/>
+          </a:xfrm>
+          <a:prstGeom prst="rect">
+            <a:avLst/>
+          </a:prstGeom>
+          <a:solidFill>
+            <a:srgbClr val="253350"/>
           </a:solidFill>
           <a:ln>
             <a:noFill/>
@@ -6714,14 +6843,14 @@
       </p:sp>
       <p:sp>
         <p:nvSpPr>
-          <p:cNvPr id="39" name="TextBox 38"/>
+          <p:cNvPr id="40" name="TextBox 39"/>
           <p:cNvSpPr txBox="1"/>
           <p:nvPr/>
         </p:nvSpPr>
         <p:spPr>
           <a:xfrm>
-            <a:off x="457200" y="6492240"/>
-            <a:ext cx="5486400" cy="274320"/>
+            <a:off x="731520" y="6492240"/>
+            <a:ext cx="4572000" cy="274320"/>
           </a:xfrm>
           <a:prstGeom prst="rect">
             <a:avLst/>
@@ -6737,20 +6866,20 @@
             <a:pPr algn="l">
               <a:defRPr sz="900" b="0">
                 <a:solidFill>
-                  <a:srgbClr val="6B7B9E"/>
+                  <a:srgbClr val="607090"/>
                 </a:solidFill>
                 <a:latin typeface="Microsoft YaHei"/>
               </a:defRPr>
             </a:pPr>
             <a:r>
-              <a:t>模块07：Seedance 2.0深度精通</a:t>
-            </a:r>
-          </a:p>
-        </p:txBody>
-      </p:sp>
-      <p:sp>
-        <p:nvSpPr>
-          <p:cNvPr id="40" name="TextBox 39"/>
+              <a:t>模块07 · Seedance 2.0深度精通</a:t>
+            </a:r>
+          </a:p>
+        </p:txBody>
+      </p:sp>
+      <p:sp>
+        <p:nvSpPr>
+          <p:cNvPr id="41" name="TextBox 40"/>
           <p:cNvSpPr txBox="1"/>
           <p:nvPr/>
         </p:nvSpPr>
@@ -6773,7 +6902,7 @@
             <a:pPr algn="r">
               <a:defRPr sz="900" b="0">
                 <a:solidFill>
-                  <a:srgbClr val="6B7B9E"/>
+                  <a:srgbClr val="607090"/>
                 </a:solidFill>
                 <a:latin typeface="Microsoft YaHei"/>
               </a:defRPr>
@@ -6798,7 +6927,7 @@
     <p:bg>
       <p:bgPr>
         <a:solidFill>
-          <a:srgbClr val="0B1120"/>
+          <a:srgbClr val="0A0E1A"/>
         </a:solidFill>
         <a:effectLst/>
       </p:bgPr>
@@ -6819,13 +6948,13 @@
         <p:spPr>
           <a:xfrm>
             <a:off x="0" y="0"/>
-            <a:ext cx="12191695" cy="1051560"/>
-          </a:xfrm>
-          <a:prstGeom prst="rect">
-            <a:avLst/>
-          </a:prstGeom>
-          <a:solidFill>
-            <a:srgbClr val="141E33"/>
+            <a:ext cx="12191695" cy="38100"/>
+          </a:xfrm>
+          <a:prstGeom prst="rect">
+            <a:avLst/>
+          </a:prstGeom>
+          <a:solidFill>
+            <a:srgbClr val="8B5CF6"/>
           </a:solidFill>
           <a:ln>
             <a:noFill/>
@@ -6861,14 +6990,14 @@
         </p:nvSpPr>
         <p:spPr>
           <a:xfrm>
-            <a:off x="0" y="0"/>
-            <a:ext cx="109728" cy="1051560"/>
-          </a:xfrm>
-          <a:prstGeom prst="rect">
-            <a:avLst/>
-          </a:prstGeom>
-          <a:solidFill>
-            <a:srgbClr val="7C3AED"/>
+            <a:off x="0" y="38100"/>
+            <a:ext cx="12191695" cy="914400"/>
+          </a:xfrm>
+          <a:prstGeom prst="rect">
+            <a:avLst/>
+          </a:prstGeom>
+          <a:solidFill>
+            <a:srgbClr val="161F35"/>
           </a:solidFill>
           <a:ln>
             <a:noFill/>
@@ -6898,14 +7027,57 @@
       </p:sp>
       <p:sp>
         <p:nvSpPr>
-          <p:cNvPr id="4" name="TextBox 3"/>
+          <p:cNvPr id="4" name="Rectangle 3"/>
+          <p:cNvSpPr/>
+          <p:nvPr/>
+        </p:nvSpPr>
+        <p:spPr>
+          <a:xfrm>
+            <a:off x="0" y="38100"/>
+            <a:ext cx="91440" cy="914400"/>
+          </a:xfrm>
+          <a:prstGeom prst="rect">
+            <a:avLst/>
+          </a:prstGeom>
+          <a:solidFill>
+            <a:srgbClr val="8B5CF6"/>
+          </a:solidFill>
+          <a:ln>
+            <a:noFill/>
+          </a:ln>
+        </p:spPr>
+        <p:style>
+          <a:lnRef idx="1">
+            <a:schemeClr val="accent1"/>
+          </a:lnRef>
+          <a:fillRef idx="3">
+            <a:schemeClr val="accent1"/>
+          </a:fillRef>
+          <a:effectRef idx="2">
+            <a:schemeClr val="accent1"/>
+          </a:effectRef>
+          <a:fontRef idx="minor">
+            <a:schemeClr val="lt1"/>
+          </a:fontRef>
+        </p:style>
+        <p:txBody>
+          <a:bodyPr rtlCol="0" anchor="ctr"/>
+          <a:lstStyle/>
+          <a:p>
+            <a:pPr algn="ctr"/>
+          </a:p>
+        </p:txBody>
+      </p:sp>
+      <p:sp>
+        <p:nvSpPr>
+          <p:cNvPr id="5" name="TextBox 4"/>
           <p:cNvSpPr txBox="1"/>
           <p:nvPr/>
         </p:nvSpPr>
         <p:spPr>
           <a:xfrm>
-            <a:off x="548640" y="182880"/>
-            <a:ext cx="10058400" cy="640080"/>
+            <a:off x="731520" y="137160"/>
+            <a:ext cx="10728655" cy="640080"/>
           </a:xfrm>
           <a:prstGeom prst="rect">
             <a:avLst/>
@@ -6919,9 +7091,9 @@
           <a:lstStyle/>
           <a:p>
             <a:pPr algn="l">
-              <a:defRPr sz="2600" b="1">
+              <a:defRPr sz="2400" b="1">
                 <a:solidFill>
-                  <a:srgbClr val="FFFFFF"/>
+                  <a:srgbClr val="F0F4FC"/>
                 </a:solidFill>
                 <a:latin typeface="Microsoft YaHei"/>
               </a:defRPr>
@@ -6934,20 +7106,20 @@
       </p:sp>
       <p:sp>
         <p:nvSpPr>
-          <p:cNvPr id="5" name="Rectangle 4"/>
-          <p:cNvSpPr/>
-          <p:nvPr/>
-        </p:nvSpPr>
-        <p:spPr>
-          <a:xfrm>
-            <a:off x="0" y="1051560"/>
-            <a:ext cx="12191695" cy="25400"/>
-          </a:xfrm>
-          <a:prstGeom prst="rect">
-            <a:avLst/>
-          </a:prstGeom>
-          <a:solidFill>
-            <a:srgbClr val="7C3AED"/>
+          <p:cNvPr id="6" name="Rectangle 5"/>
+          <p:cNvSpPr/>
+          <p:nvPr/>
+        </p:nvSpPr>
+        <p:spPr>
+          <a:xfrm>
+            <a:off x="0" y="1078992"/>
+            <a:ext cx="12191695" cy="12700"/>
+          </a:xfrm>
+          <a:prstGeom prst="rect">
+            <a:avLst/>
+          </a:prstGeom>
+          <a:solidFill>
+            <a:srgbClr val="253350"/>
           </a:solidFill>
           <a:ln>
             <a:noFill/>
@@ -6977,20 +7149,20 @@
       </p:sp>
       <p:sp>
         <p:nvSpPr>
-          <p:cNvPr id="6" name="Rounded Rectangle 5"/>
-          <p:cNvSpPr/>
-          <p:nvPr/>
-        </p:nvSpPr>
-        <p:spPr>
-          <a:xfrm>
-            <a:off x="365760" y="1371600"/>
-            <a:ext cx="5486400" cy="4846320"/>
+          <p:cNvPr id="7" name="Rounded Rectangle 6"/>
+          <p:cNvSpPr/>
+          <p:nvPr/>
+        </p:nvSpPr>
+        <p:spPr>
+          <a:xfrm>
+            <a:off x="457200" y="1371600"/>
+            <a:ext cx="5349240" cy="4754880"/>
           </a:xfrm>
           <a:prstGeom prst="roundRect">
             <a:avLst/>
           </a:prstGeom>
           <a:solidFill>
-            <a:srgbClr val="141E33"/>
+            <a:srgbClr val="161F35"/>
           </a:solidFill>
           <a:ln>
             <a:noFill/>
@@ -7020,20 +7192,20 @@
       </p:sp>
       <p:sp>
         <p:nvSpPr>
-          <p:cNvPr id="7" name="Rectangle 6"/>
-          <p:cNvSpPr/>
-          <p:nvPr/>
-        </p:nvSpPr>
-        <p:spPr>
-          <a:xfrm>
-            <a:off x="365760" y="1371600"/>
-            <a:ext cx="5486400" cy="73152"/>
-          </a:xfrm>
-          <a:prstGeom prst="rect">
-            <a:avLst/>
-          </a:prstGeom>
-          <a:solidFill>
-            <a:srgbClr val="7C3AED"/>
+          <p:cNvPr id="8" name="Rectangle 7"/>
+          <p:cNvSpPr/>
+          <p:nvPr/>
+        </p:nvSpPr>
+        <p:spPr>
+          <a:xfrm>
+            <a:off x="457200" y="1371600"/>
+            <a:ext cx="5349240" cy="38100"/>
+          </a:xfrm>
+          <a:prstGeom prst="rect">
+            <a:avLst/>
+          </a:prstGeom>
+          <a:solidFill>
+            <a:srgbClr val="8B5CF6"/>
           </a:solidFill>
           <a:ln>
             <a:noFill/>
@@ -7063,14 +7235,14 @@
       </p:sp>
       <p:sp>
         <p:nvSpPr>
-          <p:cNvPr id="8" name="TextBox 7"/>
+          <p:cNvPr id="9" name="TextBox 8"/>
           <p:cNvSpPr txBox="1"/>
           <p:nvPr/>
         </p:nvSpPr>
         <p:spPr>
           <a:xfrm>
-            <a:off x="640080" y="1645920"/>
-            <a:ext cx="4937760" cy="457200"/>
+            <a:off x="731520" y="1600200"/>
+            <a:ext cx="4754880" cy="411480"/>
           </a:xfrm>
           <a:prstGeom prst="rect">
             <a:avLst/>
@@ -7084,9 +7256,9 @@
           <a:lstStyle/>
           <a:p>
             <a:pPr algn="l">
-              <a:defRPr sz="2000" b="1">
+              <a:defRPr sz="1800" b="1">
                 <a:solidFill>
-                  <a:srgbClr val="7C3AED"/>
+                  <a:srgbClr val="8B5CF6"/>
                 </a:solidFill>
                 <a:latin typeface="Microsoft YaHei"/>
               </a:defRPr>
@@ -7099,20 +7271,20 @@
       </p:sp>
       <p:sp>
         <p:nvSpPr>
-          <p:cNvPr id="9" name="Rectangle 8"/>
-          <p:cNvSpPr/>
-          <p:nvPr/>
-        </p:nvSpPr>
-        <p:spPr>
-          <a:xfrm>
-            <a:off x="640080" y="2194560"/>
-            <a:ext cx="1371600" cy="38100"/>
-          </a:xfrm>
-          <a:prstGeom prst="rect">
-            <a:avLst/>
-          </a:prstGeom>
-          <a:solidFill>
-            <a:srgbClr val="7C3AED"/>
+          <p:cNvPr id="10" name="Rectangle 9"/>
+          <p:cNvSpPr/>
+          <p:nvPr/>
+        </p:nvSpPr>
+        <p:spPr>
+          <a:xfrm>
+            <a:off x="731520" y="2103120"/>
+            <a:ext cx="1097280" cy="25400"/>
+          </a:xfrm>
+          <a:prstGeom prst="rect">
+            <a:avLst/>
+          </a:prstGeom>
+          <a:solidFill>
+            <a:srgbClr val="8B5CF6"/>
           </a:solidFill>
           <a:ln>
             <a:noFill/>
@@ -7142,20 +7314,20 @@
       </p:sp>
       <p:sp>
         <p:nvSpPr>
-          <p:cNvPr id="10" name="Oval 9"/>
-          <p:cNvSpPr/>
-          <p:nvPr/>
-        </p:nvSpPr>
-        <p:spPr>
-          <a:xfrm>
-            <a:off x="731520" y="2542032"/>
-            <a:ext cx="182880" cy="182880"/>
+          <p:cNvPr id="11" name="Oval 10"/>
+          <p:cNvSpPr/>
+          <p:nvPr/>
+        </p:nvSpPr>
+        <p:spPr>
+          <a:xfrm>
+            <a:off x="731520" y="2432304"/>
+            <a:ext cx="164592" cy="164592"/>
           </a:xfrm>
           <a:prstGeom prst="ellipse">
             <a:avLst/>
           </a:prstGeom>
           <a:solidFill>
-            <a:srgbClr val="7C3AED"/>
+            <a:srgbClr val="8B5CF6"/>
           </a:solidFill>
           <a:ln>
             <a:noFill/>
@@ -7185,14 +7357,14 @@
       </p:sp>
       <p:sp>
         <p:nvSpPr>
-          <p:cNvPr id="11" name="TextBox 10"/>
+          <p:cNvPr id="12" name="TextBox 11"/>
           <p:cNvSpPr txBox="1"/>
           <p:nvPr/>
         </p:nvSpPr>
         <p:spPr>
           <a:xfrm>
-            <a:off x="1051560" y="2468880"/>
-            <a:ext cx="4572000" cy="502920"/>
+            <a:off x="1051560" y="2377440"/>
+            <a:ext cx="4572000" cy="411480"/>
           </a:xfrm>
           <a:prstGeom prst="rect">
             <a:avLst/>
@@ -7208,7 +7380,7 @@
             <a:pPr algn="l">
               <a:defRPr sz="1400" b="0">
                 <a:solidFill>
-                  <a:srgbClr val="CBD5E8"/>
+                  <a:srgbClr val="A0AEC4"/>
                 </a:solidFill>
                 <a:latin typeface="Microsoft YaHei"/>
               </a:defRPr>
@@ -7221,20 +7393,20 @@
       </p:sp>
       <p:sp>
         <p:nvSpPr>
-          <p:cNvPr id="12" name="Oval 11"/>
-          <p:cNvSpPr/>
-          <p:nvPr/>
-        </p:nvSpPr>
-        <p:spPr>
-          <a:xfrm>
-            <a:off x="731520" y="3136392"/>
-            <a:ext cx="182880" cy="182880"/>
+          <p:cNvPr id="13" name="Oval 12"/>
+          <p:cNvSpPr/>
+          <p:nvPr/>
+        </p:nvSpPr>
+        <p:spPr>
+          <a:xfrm>
+            <a:off x="731520" y="2935224"/>
+            <a:ext cx="164592" cy="164592"/>
           </a:xfrm>
           <a:prstGeom prst="ellipse">
             <a:avLst/>
           </a:prstGeom>
           <a:solidFill>
-            <a:srgbClr val="7C3AED"/>
+            <a:srgbClr val="8B5CF6"/>
           </a:solidFill>
           <a:ln>
             <a:noFill/>
@@ -7264,14 +7436,14 @@
       </p:sp>
       <p:sp>
         <p:nvSpPr>
-          <p:cNvPr id="13" name="TextBox 12"/>
+          <p:cNvPr id="14" name="TextBox 13"/>
           <p:cNvSpPr txBox="1"/>
           <p:nvPr/>
         </p:nvSpPr>
         <p:spPr>
           <a:xfrm>
-            <a:off x="1051560" y="3063240"/>
-            <a:ext cx="4572000" cy="502920"/>
+            <a:off x="1051560" y="2880360"/>
+            <a:ext cx="4572000" cy="411480"/>
           </a:xfrm>
           <a:prstGeom prst="rect">
             <a:avLst/>
@@ -7287,7 +7459,7 @@
             <a:pPr algn="l">
               <a:defRPr sz="1400" b="0">
                 <a:solidFill>
-                  <a:srgbClr val="CBD5E8"/>
+                  <a:srgbClr val="A0AEC4"/>
                 </a:solidFill>
                 <a:latin typeface="Microsoft YaHei"/>
               </a:defRPr>
@@ -7300,20 +7472,20 @@
       </p:sp>
       <p:sp>
         <p:nvSpPr>
-          <p:cNvPr id="14" name="Oval 13"/>
-          <p:cNvSpPr/>
-          <p:nvPr/>
-        </p:nvSpPr>
-        <p:spPr>
-          <a:xfrm>
-            <a:off x="731520" y="3730752"/>
-            <a:ext cx="182880" cy="182880"/>
+          <p:cNvPr id="15" name="Oval 14"/>
+          <p:cNvSpPr/>
+          <p:nvPr/>
+        </p:nvSpPr>
+        <p:spPr>
+          <a:xfrm>
+            <a:off x="731520" y="3438144"/>
+            <a:ext cx="164592" cy="164592"/>
           </a:xfrm>
           <a:prstGeom prst="ellipse">
             <a:avLst/>
           </a:prstGeom>
           <a:solidFill>
-            <a:srgbClr val="7C3AED"/>
+            <a:srgbClr val="8B5CF6"/>
           </a:solidFill>
           <a:ln>
             <a:noFill/>
@@ -7343,14 +7515,14 @@
       </p:sp>
       <p:sp>
         <p:nvSpPr>
-          <p:cNvPr id="15" name="TextBox 14"/>
+          <p:cNvPr id="16" name="TextBox 15"/>
           <p:cNvSpPr txBox="1"/>
           <p:nvPr/>
         </p:nvSpPr>
         <p:spPr>
           <a:xfrm>
-            <a:off x="1051560" y="3657600"/>
-            <a:ext cx="4572000" cy="502920"/>
+            <a:off x="1051560" y="3383280"/>
+            <a:ext cx="4572000" cy="411480"/>
           </a:xfrm>
           <a:prstGeom prst="rect">
             <a:avLst/>
@@ -7366,7 +7538,7 @@
             <a:pPr algn="l">
               <a:defRPr sz="1400" b="0">
                 <a:solidFill>
-                  <a:srgbClr val="CBD5E8"/>
+                  <a:srgbClr val="A0AEC4"/>
                 </a:solidFill>
                 <a:latin typeface="Microsoft YaHei"/>
               </a:defRPr>
@@ -7379,20 +7551,20 @@
       </p:sp>
       <p:sp>
         <p:nvSpPr>
-          <p:cNvPr id="16" name="Oval 15"/>
-          <p:cNvSpPr/>
-          <p:nvPr/>
-        </p:nvSpPr>
-        <p:spPr>
-          <a:xfrm>
-            <a:off x="731520" y="4325112"/>
-            <a:ext cx="182880" cy="182880"/>
+          <p:cNvPr id="17" name="Oval 16"/>
+          <p:cNvSpPr/>
+          <p:nvPr/>
+        </p:nvSpPr>
+        <p:spPr>
+          <a:xfrm>
+            <a:off x="731520" y="3941064"/>
+            <a:ext cx="164592" cy="164592"/>
           </a:xfrm>
           <a:prstGeom prst="ellipse">
             <a:avLst/>
           </a:prstGeom>
           <a:solidFill>
-            <a:srgbClr val="7C3AED"/>
+            <a:srgbClr val="8B5CF6"/>
           </a:solidFill>
           <a:ln>
             <a:noFill/>
@@ -7422,14 +7594,14 @@
       </p:sp>
       <p:sp>
         <p:nvSpPr>
-          <p:cNvPr id="17" name="TextBox 16"/>
+          <p:cNvPr id="18" name="TextBox 17"/>
           <p:cNvSpPr txBox="1"/>
           <p:nvPr/>
         </p:nvSpPr>
         <p:spPr>
           <a:xfrm>
-            <a:off x="1051560" y="4251960"/>
-            <a:ext cx="4572000" cy="502920"/>
+            <a:off x="1051560" y="3886200"/>
+            <a:ext cx="4572000" cy="411480"/>
           </a:xfrm>
           <a:prstGeom prst="rect">
             <a:avLst/>
@@ -7445,7 +7617,7 @@
             <a:pPr algn="l">
               <a:defRPr sz="1400" b="0">
                 <a:solidFill>
-                  <a:srgbClr val="CBD5E8"/>
+                  <a:srgbClr val="A0AEC4"/>
                 </a:solidFill>
                 <a:latin typeface="Microsoft YaHei"/>
               </a:defRPr>
@@ -7458,20 +7630,20 @@
       </p:sp>
       <p:sp>
         <p:nvSpPr>
-          <p:cNvPr id="18" name="Oval 17"/>
-          <p:cNvSpPr/>
-          <p:nvPr/>
-        </p:nvSpPr>
-        <p:spPr>
-          <a:xfrm>
-            <a:off x="731520" y="4919472"/>
-            <a:ext cx="182880" cy="182880"/>
+          <p:cNvPr id="19" name="Oval 18"/>
+          <p:cNvSpPr/>
+          <p:nvPr/>
+        </p:nvSpPr>
+        <p:spPr>
+          <a:xfrm>
+            <a:off x="731520" y="4443984"/>
+            <a:ext cx="164592" cy="164592"/>
           </a:xfrm>
           <a:prstGeom prst="ellipse">
             <a:avLst/>
           </a:prstGeom>
           <a:solidFill>
-            <a:srgbClr val="7C3AED"/>
+            <a:srgbClr val="8B5CF6"/>
           </a:solidFill>
           <a:ln>
             <a:noFill/>
@@ -7501,14 +7673,14 @@
       </p:sp>
       <p:sp>
         <p:nvSpPr>
-          <p:cNvPr id="19" name="TextBox 18"/>
+          <p:cNvPr id="20" name="TextBox 19"/>
           <p:cNvSpPr txBox="1"/>
           <p:nvPr/>
         </p:nvSpPr>
         <p:spPr>
           <a:xfrm>
-            <a:off x="1051560" y="4846320"/>
-            <a:ext cx="4572000" cy="502920"/>
+            <a:off x="1051560" y="4389120"/>
+            <a:ext cx="4572000" cy="411480"/>
           </a:xfrm>
           <a:prstGeom prst="rect">
             <a:avLst/>
@@ -7524,7 +7696,7 @@
             <a:pPr algn="l">
               <a:defRPr sz="1400" b="0">
                 <a:solidFill>
-                  <a:srgbClr val="CBD5E8"/>
+                  <a:srgbClr val="A0AEC4"/>
                 </a:solidFill>
                 <a:latin typeface="Microsoft YaHei"/>
               </a:defRPr>
@@ -7537,20 +7709,20 @@
       </p:sp>
       <p:sp>
         <p:nvSpPr>
-          <p:cNvPr id="20" name="Rounded Rectangle 19"/>
-          <p:cNvSpPr/>
-          <p:nvPr/>
-        </p:nvSpPr>
-        <p:spPr>
-          <a:xfrm>
-            <a:off x="6217920" y="1371600"/>
-            <a:ext cx="5486400" cy="4846320"/>
+          <p:cNvPr id="21" name="Rounded Rectangle 20"/>
+          <p:cNvSpPr/>
+          <p:nvPr/>
+        </p:nvSpPr>
+        <p:spPr>
+          <a:xfrm>
+            <a:off x="6263640" y="1371600"/>
+            <a:ext cx="5349240" cy="4754880"/>
           </a:xfrm>
           <a:prstGeom prst="roundRect">
             <a:avLst/>
           </a:prstGeom>
           <a:solidFill>
-            <a:srgbClr val="141E33"/>
+            <a:srgbClr val="161F35"/>
           </a:solidFill>
           <a:ln>
             <a:noFill/>
@@ -7580,20 +7752,20 @@
       </p:sp>
       <p:sp>
         <p:nvSpPr>
-          <p:cNvPr id="21" name="Rectangle 20"/>
-          <p:cNvSpPr/>
-          <p:nvPr/>
-        </p:nvSpPr>
-        <p:spPr>
-          <a:xfrm>
-            <a:off x="6217920" y="1371600"/>
-            <a:ext cx="5486400" cy="73152"/>
-          </a:xfrm>
-          <a:prstGeom prst="rect">
-            <a:avLst/>
-          </a:prstGeom>
-          <a:solidFill>
-            <a:srgbClr val="7C3AED"/>
+          <p:cNvPr id="22" name="Rectangle 21"/>
+          <p:cNvSpPr/>
+          <p:nvPr/>
+        </p:nvSpPr>
+        <p:spPr>
+          <a:xfrm>
+            <a:off x="6263640" y="1371600"/>
+            <a:ext cx="5349240" cy="38100"/>
+          </a:xfrm>
+          <a:prstGeom prst="rect">
+            <a:avLst/>
+          </a:prstGeom>
+          <a:solidFill>
+            <a:srgbClr val="8B5CF6"/>
           </a:solidFill>
           <a:ln>
             <a:noFill/>
@@ -7623,14 +7795,14 @@
       </p:sp>
       <p:sp>
         <p:nvSpPr>
-          <p:cNvPr id="22" name="TextBox 21"/>
+          <p:cNvPr id="23" name="TextBox 22"/>
           <p:cNvSpPr txBox="1"/>
           <p:nvPr/>
         </p:nvSpPr>
         <p:spPr>
           <a:xfrm>
-            <a:off x="6492240" y="1645920"/>
-            <a:ext cx="4937760" cy="457200"/>
+            <a:off x="6537960" y="1600200"/>
+            <a:ext cx="4754880" cy="411480"/>
           </a:xfrm>
           <a:prstGeom prst="rect">
             <a:avLst/>
@@ -7644,9 +7816,9 @@
           <a:lstStyle/>
           <a:p>
             <a:pPr algn="l">
-              <a:defRPr sz="2000" b="1">
+              <a:defRPr sz="1800" b="1">
                 <a:solidFill>
-                  <a:srgbClr val="7C3AED"/>
+                  <a:srgbClr val="8B5CF6"/>
                 </a:solidFill>
                 <a:latin typeface="Microsoft YaHei"/>
               </a:defRPr>
@@ -7659,20 +7831,20 @@
       </p:sp>
       <p:sp>
         <p:nvSpPr>
-          <p:cNvPr id="23" name="Rectangle 22"/>
-          <p:cNvSpPr/>
-          <p:nvPr/>
-        </p:nvSpPr>
-        <p:spPr>
-          <a:xfrm>
-            <a:off x="6492240" y="2194560"/>
-            <a:ext cx="1371600" cy="38100"/>
-          </a:xfrm>
-          <a:prstGeom prst="rect">
-            <a:avLst/>
-          </a:prstGeom>
-          <a:solidFill>
-            <a:srgbClr val="7C3AED"/>
+          <p:cNvPr id="24" name="Rectangle 23"/>
+          <p:cNvSpPr/>
+          <p:nvPr/>
+        </p:nvSpPr>
+        <p:spPr>
+          <a:xfrm>
+            <a:off x="6537960" y="2103120"/>
+            <a:ext cx="1097280" cy="25400"/>
+          </a:xfrm>
+          <a:prstGeom prst="rect">
+            <a:avLst/>
+          </a:prstGeom>
+          <a:solidFill>
+            <a:srgbClr val="8B5CF6"/>
           </a:solidFill>
           <a:ln>
             <a:noFill/>
@@ -7702,20 +7874,20 @@
       </p:sp>
       <p:sp>
         <p:nvSpPr>
-          <p:cNvPr id="24" name="Oval 23"/>
-          <p:cNvSpPr/>
-          <p:nvPr/>
-        </p:nvSpPr>
-        <p:spPr>
-          <a:xfrm>
-            <a:off x="6583680" y="2542032"/>
-            <a:ext cx="182880" cy="182880"/>
+          <p:cNvPr id="25" name="Oval 24"/>
+          <p:cNvSpPr/>
+          <p:nvPr/>
+        </p:nvSpPr>
+        <p:spPr>
+          <a:xfrm>
+            <a:off x="6537960" y="2432304"/>
+            <a:ext cx="164592" cy="164592"/>
           </a:xfrm>
           <a:prstGeom prst="ellipse">
             <a:avLst/>
           </a:prstGeom>
           <a:solidFill>
-            <a:srgbClr val="7C3AED"/>
+            <a:srgbClr val="8B5CF6"/>
           </a:solidFill>
           <a:ln>
             <a:noFill/>
@@ -7745,14 +7917,14 @@
       </p:sp>
       <p:sp>
         <p:nvSpPr>
-          <p:cNvPr id="25" name="TextBox 24"/>
+          <p:cNvPr id="26" name="TextBox 25"/>
           <p:cNvSpPr txBox="1"/>
           <p:nvPr/>
         </p:nvSpPr>
         <p:spPr>
           <a:xfrm>
-            <a:off x="6903720" y="2468880"/>
-            <a:ext cx="4572000" cy="502920"/>
+            <a:off x="6858000" y="2377440"/>
+            <a:ext cx="4572000" cy="411480"/>
           </a:xfrm>
           <a:prstGeom prst="rect">
             <a:avLst/>
@@ -7768,7 +7940,7 @@
             <a:pPr algn="l">
               <a:defRPr sz="1400" b="0">
                 <a:solidFill>
-                  <a:srgbClr val="CBD5E8"/>
+                  <a:srgbClr val="A0AEC4"/>
                 </a:solidFill>
                 <a:latin typeface="Microsoft YaHei"/>
               </a:defRPr>
@@ -7781,20 +7953,20 @@
       </p:sp>
       <p:sp>
         <p:nvSpPr>
-          <p:cNvPr id="26" name="Oval 25"/>
-          <p:cNvSpPr/>
-          <p:nvPr/>
-        </p:nvSpPr>
-        <p:spPr>
-          <a:xfrm>
-            <a:off x="6583680" y="3136392"/>
-            <a:ext cx="182880" cy="182880"/>
+          <p:cNvPr id="27" name="Oval 26"/>
+          <p:cNvSpPr/>
+          <p:nvPr/>
+        </p:nvSpPr>
+        <p:spPr>
+          <a:xfrm>
+            <a:off x="6537960" y="2935224"/>
+            <a:ext cx="164592" cy="164592"/>
           </a:xfrm>
           <a:prstGeom prst="ellipse">
             <a:avLst/>
           </a:prstGeom>
           <a:solidFill>
-            <a:srgbClr val="7C3AED"/>
+            <a:srgbClr val="8B5CF6"/>
           </a:solidFill>
           <a:ln>
             <a:noFill/>
@@ -7824,14 +7996,14 @@
       </p:sp>
       <p:sp>
         <p:nvSpPr>
-          <p:cNvPr id="27" name="TextBox 26"/>
+          <p:cNvPr id="28" name="TextBox 27"/>
           <p:cNvSpPr txBox="1"/>
           <p:nvPr/>
         </p:nvSpPr>
         <p:spPr>
           <a:xfrm>
-            <a:off x="6903720" y="3063240"/>
-            <a:ext cx="4572000" cy="502920"/>
+            <a:off x="6858000" y="2880360"/>
+            <a:ext cx="4572000" cy="411480"/>
           </a:xfrm>
           <a:prstGeom prst="rect">
             <a:avLst/>
@@ -7847,7 +8019,7 @@
             <a:pPr algn="l">
               <a:defRPr sz="1400" b="0">
                 <a:solidFill>
-                  <a:srgbClr val="CBD5E8"/>
+                  <a:srgbClr val="A0AEC4"/>
                 </a:solidFill>
                 <a:latin typeface="Microsoft YaHei"/>
               </a:defRPr>
@@ -7860,20 +8032,20 @@
       </p:sp>
       <p:sp>
         <p:nvSpPr>
-          <p:cNvPr id="28" name="Oval 27"/>
-          <p:cNvSpPr/>
-          <p:nvPr/>
-        </p:nvSpPr>
-        <p:spPr>
-          <a:xfrm>
-            <a:off x="6583680" y="3730752"/>
-            <a:ext cx="182880" cy="182880"/>
+          <p:cNvPr id="29" name="Oval 28"/>
+          <p:cNvSpPr/>
+          <p:nvPr/>
+        </p:nvSpPr>
+        <p:spPr>
+          <a:xfrm>
+            <a:off x="6537960" y="3438144"/>
+            <a:ext cx="164592" cy="164592"/>
           </a:xfrm>
           <a:prstGeom prst="ellipse">
             <a:avLst/>
           </a:prstGeom>
           <a:solidFill>
-            <a:srgbClr val="7C3AED"/>
+            <a:srgbClr val="8B5CF6"/>
           </a:solidFill>
           <a:ln>
             <a:noFill/>
@@ -7903,14 +8075,14 @@
       </p:sp>
       <p:sp>
         <p:nvSpPr>
-          <p:cNvPr id="29" name="TextBox 28"/>
+          <p:cNvPr id="30" name="TextBox 29"/>
           <p:cNvSpPr txBox="1"/>
           <p:nvPr/>
         </p:nvSpPr>
         <p:spPr>
           <a:xfrm>
-            <a:off x="6903720" y="3657600"/>
-            <a:ext cx="4572000" cy="502920"/>
+            <a:off x="6858000" y="3383280"/>
+            <a:ext cx="4572000" cy="411480"/>
           </a:xfrm>
           <a:prstGeom prst="rect">
             <a:avLst/>
@@ -7926,7 +8098,7 @@
             <a:pPr algn="l">
               <a:defRPr sz="1400" b="0">
                 <a:solidFill>
-                  <a:srgbClr val="CBD5E8"/>
+                  <a:srgbClr val="A0AEC4"/>
                 </a:solidFill>
                 <a:latin typeface="Microsoft YaHei"/>
               </a:defRPr>
@@ -7939,20 +8111,20 @@
       </p:sp>
       <p:sp>
         <p:nvSpPr>
-          <p:cNvPr id="30" name="Oval 29"/>
-          <p:cNvSpPr/>
-          <p:nvPr/>
-        </p:nvSpPr>
-        <p:spPr>
-          <a:xfrm>
-            <a:off x="6583680" y="4325112"/>
-            <a:ext cx="182880" cy="182880"/>
+          <p:cNvPr id="31" name="Oval 30"/>
+          <p:cNvSpPr/>
+          <p:nvPr/>
+        </p:nvSpPr>
+        <p:spPr>
+          <a:xfrm>
+            <a:off x="6537960" y="3941064"/>
+            <a:ext cx="164592" cy="164592"/>
           </a:xfrm>
           <a:prstGeom prst="ellipse">
             <a:avLst/>
           </a:prstGeom>
           <a:solidFill>
-            <a:srgbClr val="7C3AED"/>
+            <a:srgbClr val="8B5CF6"/>
           </a:solidFill>
           <a:ln>
             <a:noFill/>
@@ -7982,14 +8154,14 @@
       </p:sp>
       <p:sp>
         <p:nvSpPr>
-          <p:cNvPr id="31" name="TextBox 30"/>
+          <p:cNvPr id="32" name="TextBox 31"/>
           <p:cNvSpPr txBox="1"/>
           <p:nvPr/>
         </p:nvSpPr>
         <p:spPr>
           <a:xfrm>
-            <a:off x="6903720" y="4251960"/>
-            <a:ext cx="4572000" cy="502920"/>
+            <a:off x="6858000" y="3886200"/>
+            <a:ext cx="4572000" cy="411480"/>
           </a:xfrm>
           <a:prstGeom prst="rect">
             <a:avLst/>
@@ -8005,7 +8177,7 @@
             <a:pPr algn="l">
               <a:defRPr sz="1400" b="0">
                 <a:solidFill>
-                  <a:srgbClr val="CBD5E8"/>
+                  <a:srgbClr val="A0AEC4"/>
                 </a:solidFill>
                 <a:latin typeface="Microsoft YaHei"/>
               </a:defRPr>
@@ -8018,20 +8190,20 @@
       </p:sp>
       <p:sp>
         <p:nvSpPr>
-          <p:cNvPr id="32" name="Oval 31"/>
-          <p:cNvSpPr/>
-          <p:nvPr/>
-        </p:nvSpPr>
-        <p:spPr>
-          <a:xfrm>
-            <a:off x="6583680" y="4919472"/>
-            <a:ext cx="182880" cy="182880"/>
+          <p:cNvPr id="33" name="Oval 32"/>
+          <p:cNvSpPr/>
+          <p:nvPr/>
+        </p:nvSpPr>
+        <p:spPr>
+          <a:xfrm>
+            <a:off x="6537960" y="4443984"/>
+            <a:ext cx="164592" cy="164592"/>
           </a:xfrm>
           <a:prstGeom prst="ellipse">
             <a:avLst/>
           </a:prstGeom>
           <a:solidFill>
-            <a:srgbClr val="7C3AED"/>
+            <a:srgbClr val="8B5CF6"/>
           </a:solidFill>
           <a:ln>
             <a:noFill/>
@@ -8061,14 +8233,14 @@
       </p:sp>
       <p:sp>
         <p:nvSpPr>
-          <p:cNvPr id="33" name="TextBox 32"/>
+          <p:cNvPr id="34" name="TextBox 33"/>
           <p:cNvSpPr txBox="1"/>
           <p:nvPr/>
         </p:nvSpPr>
         <p:spPr>
           <a:xfrm>
-            <a:off x="6903720" y="4846320"/>
-            <a:ext cx="4572000" cy="502920"/>
+            <a:off x="6858000" y="4389120"/>
+            <a:ext cx="4572000" cy="411480"/>
           </a:xfrm>
           <a:prstGeom prst="rect">
             <a:avLst/>
@@ -8084,7 +8256,7 @@
             <a:pPr algn="l">
               <a:defRPr sz="1400" b="0">
                 <a:solidFill>
-                  <a:srgbClr val="CBD5E8"/>
+                  <a:srgbClr val="A0AEC4"/>
                 </a:solidFill>
                 <a:latin typeface="Microsoft YaHei"/>
               </a:defRPr>
@@ -8097,20 +8269,20 @@
       </p:sp>
       <p:sp>
         <p:nvSpPr>
-          <p:cNvPr id="34" name="Rectangle 33"/>
+          <p:cNvPr id="35" name="Rectangle 34"/>
           <p:cNvSpPr/>
           <p:nvPr/>
         </p:nvSpPr>
         <p:spPr>
           <a:xfrm>
             <a:off x="0" y="6446520"/>
-            <a:ext cx="12191695" cy="19050"/>
-          </a:xfrm>
-          <a:prstGeom prst="rect">
-            <a:avLst/>
-          </a:prstGeom>
-          <a:solidFill>
-            <a:srgbClr val="2D3B55"/>
+            <a:ext cx="12191695" cy="12700"/>
+          </a:xfrm>
+          <a:prstGeom prst="rect">
+            <a:avLst/>
+          </a:prstGeom>
+          <a:solidFill>
+            <a:srgbClr val="253350"/>
           </a:solidFill>
           <a:ln>
             <a:noFill/>
@@ -8140,14 +8312,14 @@
       </p:sp>
       <p:sp>
         <p:nvSpPr>
-          <p:cNvPr id="35" name="TextBox 34"/>
+          <p:cNvPr id="36" name="TextBox 35"/>
           <p:cNvSpPr txBox="1"/>
           <p:nvPr/>
         </p:nvSpPr>
         <p:spPr>
           <a:xfrm>
-            <a:off x="457200" y="6492240"/>
-            <a:ext cx="5486400" cy="274320"/>
+            <a:off x="731520" y="6492240"/>
+            <a:ext cx="4572000" cy="274320"/>
           </a:xfrm>
           <a:prstGeom prst="rect">
             <a:avLst/>
@@ -8163,20 +8335,20 @@
             <a:pPr algn="l">
               <a:defRPr sz="900" b="0">
                 <a:solidFill>
-                  <a:srgbClr val="6B7B9E"/>
+                  <a:srgbClr val="607090"/>
                 </a:solidFill>
                 <a:latin typeface="Microsoft YaHei"/>
               </a:defRPr>
             </a:pPr>
             <a:r>
-              <a:t>模块07：Seedance 2.0深度精通</a:t>
-            </a:r>
-          </a:p>
-        </p:txBody>
-      </p:sp>
-      <p:sp>
-        <p:nvSpPr>
-          <p:cNvPr id="36" name="TextBox 35"/>
+              <a:t>模块07 · Seedance 2.0深度精通</a:t>
+            </a:r>
+          </a:p>
+        </p:txBody>
+      </p:sp>
+      <p:sp>
+        <p:nvSpPr>
+          <p:cNvPr id="37" name="TextBox 36"/>
           <p:cNvSpPr txBox="1"/>
           <p:nvPr/>
         </p:nvSpPr>
@@ -8199,7 +8371,7 @@
             <a:pPr algn="r">
               <a:defRPr sz="900" b="0">
                 <a:solidFill>
-                  <a:srgbClr val="6B7B9E"/>
+                  <a:srgbClr val="607090"/>
                 </a:solidFill>
                 <a:latin typeface="Microsoft YaHei"/>
               </a:defRPr>
@@ -8224,7 +8396,7 @@
     <p:bg>
       <p:bgPr>
         <a:solidFill>
-          <a:srgbClr val="0B1120"/>
+          <a:srgbClr val="0A0E1A"/>
         </a:solidFill>
         <a:effectLst/>
       </p:bgPr>
@@ -8245,13 +8417,13 @@
         <p:spPr>
           <a:xfrm>
             <a:off x="0" y="0"/>
-            <a:ext cx="12191695" cy="1051560"/>
-          </a:xfrm>
-          <a:prstGeom prst="rect">
-            <a:avLst/>
-          </a:prstGeom>
-          <a:solidFill>
-            <a:srgbClr val="141E33"/>
+            <a:ext cx="12191695" cy="38100"/>
+          </a:xfrm>
+          <a:prstGeom prst="rect">
+            <a:avLst/>
+          </a:prstGeom>
+          <a:solidFill>
+            <a:srgbClr val="8B5CF6"/>
           </a:solidFill>
           <a:ln>
             <a:noFill/>
@@ -8287,14 +8459,14 @@
         </p:nvSpPr>
         <p:spPr>
           <a:xfrm>
-            <a:off x="0" y="0"/>
-            <a:ext cx="109728" cy="1051560"/>
-          </a:xfrm>
-          <a:prstGeom prst="rect">
-            <a:avLst/>
-          </a:prstGeom>
-          <a:solidFill>
-            <a:srgbClr val="7C3AED"/>
+            <a:off x="0" y="38100"/>
+            <a:ext cx="12191695" cy="914400"/>
+          </a:xfrm>
+          <a:prstGeom prst="rect">
+            <a:avLst/>
+          </a:prstGeom>
+          <a:solidFill>
+            <a:srgbClr val="161F35"/>
           </a:solidFill>
           <a:ln>
             <a:noFill/>
@@ -8324,14 +8496,57 @@
       </p:sp>
       <p:sp>
         <p:nvSpPr>
-          <p:cNvPr id="4" name="TextBox 3"/>
+          <p:cNvPr id="4" name="Rectangle 3"/>
+          <p:cNvSpPr/>
+          <p:nvPr/>
+        </p:nvSpPr>
+        <p:spPr>
+          <a:xfrm>
+            <a:off x="0" y="38100"/>
+            <a:ext cx="91440" cy="914400"/>
+          </a:xfrm>
+          <a:prstGeom prst="rect">
+            <a:avLst/>
+          </a:prstGeom>
+          <a:solidFill>
+            <a:srgbClr val="8B5CF6"/>
+          </a:solidFill>
+          <a:ln>
+            <a:noFill/>
+          </a:ln>
+        </p:spPr>
+        <p:style>
+          <a:lnRef idx="1">
+            <a:schemeClr val="accent1"/>
+          </a:lnRef>
+          <a:fillRef idx="3">
+            <a:schemeClr val="accent1"/>
+          </a:fillRef>
+          <a:effectRef idx="2">
+            <a:schemeClr val="accent1"/>
+          </a:effectRef>
+          <a:fontRef idx="minor">
+            <a:schemeClr val="lt1"/>
+          </a:fontRef>
+        </p:style>
+        <p:txBody>
+          <a:bodyPr rtlCol="0" anchor="ctr"/>
+          <a:lstStyle/>
+          <a:p>
+            <a:pPr algn="ctr"/>
+          </a:p>
+        </p:txBody>
+      </p:sp>
+      <p:sp>
+        <p:nvSpPr>
+          <p:cNvPr id="5" name="TextBox 4"/>
           <p:cNvSpPr txBox="1"/>
           <p:nvPr/>
         </p:nvSpPr>
         <p:spPr>
           <a:xfrm>
-            <a:off x="548640" y="182880"/>
-            <a:ext cx="10058400" cy="640080"/>
+            <a:off x="731520" y="137160"/>
+            <a:ext cx="10728655" cy="640080"/>
           </a:xfrm>
           <a:prstGeom prst="rect">
             <a:avLst/>
@@ -8345,35 +8560,35 @@
           <a:lstStyle/>
           <a:p>
             <a:pPr algn="l">
-              <a:defRPr sz="2600" b="1">
+              <a:defRPr sz="2400" b="1">
                 <a:solidFill>
-                  <a:srgbClr val="FFFFFF"/>
+                  <a:srgbClr val="F0F4FC"/>
                 </a:solidFill>
                 <a:latin typeface="Microsoft YaHei"/>
               </a:defRPr>
             </a:pPr>
             <a:r>
-              <a:t>多模态参考系统核心原理</a:t>
-            </a:r>
-          </a:p>
-        </p:txBody>
-      </p:sp>
-      <p:sp>
-        <p:nvSpPr>
-          <p:cNvPr id="5" name="Rectangle 4"/>
-          <p:cNvSpPr/>
-          <p:nvPr/>
-        </p:nvSpPr>
-        <p:spPr>
-          <a:xfrm>
-            <a:off x="0" y="1051560"/>
-            <a:ext cx="12191695" cy="25400"/>
-          </a:xfrm>
-          <a:prstGeom prst="rect">
-            <a:avLst/>
-          </a:prstGeom>
-          <a:solidFill>
-            <a:srgbClr val="7C3AED"/>
+              <a:t>💡 多模态参考系统核心原理</a:t>
+            </a:r>
+          </a:p>
+        </p:txBody>
+      </p:sp>
+      <p:sp>
+        <p:nvSpPr>
+          <p:cNvPr id="6" name="Rectangle 5"/>
+          <p:cNvSpPr/>
+          <p:nvPr/>
+        </p:nvSpPr>
+        <p:spPr>
+          <a:xfrm>
+            <a:off x="0" y="1078992"/>
+            <a:ext cx="12191695" cy="12700"/>
+          </a:xfrm>
+          <a:prstGeom prst="rect">
+            <a:avLst/>
+          </a:prstGeom>
+          <a:solidFill>
+            <a:srgbClr val="253350"/>
           </a:solidFill>
           <a:ln>
             <a:noFill/>
@@ -8403,20 +8618,20 @@
       </p:sp>
       <p:sp>
         <p:nvSpPr>
-          <p:cNvPr id="6" name="Rounded Rectangle 5"/>
-          <p:cNvSpPr/>
-          <p:nvPr/>
-        </p:nvSpPr>
-        <p:spPr>
-          <a:xfrm>
-            <a:off x="731520" y="1645920"/>
-            <a:ext cx="10698480" cy="2743200"/>
+          <p:cNvPr id="7" name="Rounded Rectangle 6"/>
+          <p:cNvSpPr/>
+          <p:nvPr/>
+        </p:nvSpPr>
+        <p:spPr>
+          <a:xfrm>
+            <a:off x="731520" y="1463040"/>
+            <a:ext cx="10698480" cy="2926080"/>
           </a:xfrm>
           <a:prstGeom prst="roundRect">
             <a:avLst/>
           </a:prstGeom>
           <a:solidFill>
-            <a:srgbClr val="141E33"/>
+            <a:srgbClr val="161F35"/>
           </a:solidFill>
           <a:ln>
             <a:noFill/>
@@ -8446,20 +8661,20 @@
       </p:sp>
       <p:sp>
         <p:nvSpPr>
-          <p:cNvPr id="7" name="Rectangle 6"/>
-          <p:cNvSpPr/>
-          <p:nvPr/>
-        </p:nvSpPr>
-        <p:spPr>
-          <a:xfrm>
-            <a:off x="731520" y="1645920"/>
-            <a:ext cx="10698480" cy="91440"/>
-          </a:xfrm>
-          <a:prstGeom prst="rect">
-            <a:avLst/>
-          </a:prstGeom>
-          <a:solidFill>
-            <a:srgbClr val="7C3AED"/>
+          <p:cNvPr id="8" name="Rectangle 7"/>
+          <p:cNvSpPr/>
+          <p:nvPr/>
+        </p:nvSpPr>
+        <p:spPr>
+          <a:xfrm>
+            <a:off x="731520" y="1463040"/>
+            <a:ext cx="10698480" cy="50800"/>
+          </a:xfrm>
+          <a:prstGeom prst="rect">
+            <a:avLst/>
+          </a:prstGeom>
+          <a:solidFill>
+            <a:srgbClr val="8B5CF6"/>
           </a:solidFill>
           <a:ln>
             <a:noFill/>
@@ -8489,20 +8704,20 @@
       </p:sp>
       <p:sp>
         <p:nvSpPr>
-          <p:cNvPr id="8" name="Rectangle 7"/>
-          <p:cNvSpPr/>
-          <p:nvPr/>
-        </p:nvSpPr>
-        <p:spPr>
-          <a:xfrm>
-            <a:off x="731520" y="1645920"/>
-            <a:ext cx="109728" cy="2743200"/>
-          </a:xfrm>
-          <a:prstGeom prst="rect">
-            <a:avLst/>
-          </a:prstGeom>
-          <a:solidFill>
-            <a:srgbClr val="7C3AED"/>
+          <p:cNvPr id="9" name="Rectangle 8"/>
+          <p:cNvSpPr/>
+          <p:nvPr/>
+        </p:nvSpPr>
+        <p:spPr>
+          <a:xfrm>
+            <a:off x="731520" y="1463040"/>
+            <a:ext cx="63500" cy="2926080"/>
+          </a:xfrm>
+          <a:prstGeom prst="rect">
+            <a:avLst/>
+          </a:prstGeom>
+          <a:solidFill>
+            <a:srgbClr val="8B5CF6"/>
           </a:solidFill>
           <a:ln>
             <a:noFill/>
@@ -8532,14 +8747,14 @@
       </p:sp>
       <p:sp>
         <p:nvSpPr>
-          <p:cNvPr id="9" name="TextBox 8"/>
+          <p:cNvPr id="10" name="TextBox 9"/>
           <p:cNvSpPr txBox="1"/>
           <p:nvPr/>
         </p:nvSpPr>
         <p:spPr>
           <a:xfrm>
-            <a:off x="1097280" y="1920240"/>
-            <a:ext cx="914400" cy="548640"/>
+            <a:off x="1188720" y="1920240"/>
+            <a:ext cx="9784080" cy="2011680"/>
           </a:xfrm>
           <a:prstGeom prst="rect">
             <a:avLst/>
@@ -8553,29 +8768,115 @@
           <a:lstStyle/>
           <a:p>
             <a:pPr algn="l">
-              <a:defRPr sz="3200" b="0">
+              <a:defRPr sz="3200" b="1">
                 <a:solidFill>
-                  <a:srgbClr val="7C3AED"/>
+                  <a:srgbClr val="F0F4FC"/>
                 </a:solidFill>
                 <a:latin typeface="Microsoft YaHei"/>
               </a:defRPr>
             </a:pPr>
             <a:r>
-              <a:t>💡</a:t>
-            </a:r>
-          </a:p>
-        </p:txBody>
-      </p:sp>
-      <p:sp>
-        <p:nvSpPr>
-          <p:cNvPr id="10" name="TextBox 9"/>
+              <a:t>参考视频（真人/动画）+ 角色关键帧 + 提示词 → AI视频输出</a:t>
+            </a:r>
+          </a:p>
+        </p:txBody>
+      </p:sp>
+      <p:sp>
+        <p:nvSpPr>
+          <p:cNvPr id="11" name="Rounded Rectangle 10"/>
+          <p:cNvSpPr/>
+          <p:nvPr/>
+        </p:nvSpPr>
+        <p:spPr>
+          <a:xfrm>
+            <a:off x="731520" y="4663440"/>
+            <a:ext cx="10698480" cy="1463040"/>
+          </a:xfrm>
+          <a:prstGeom prst="roundRect">
+            <a:avLst/>
+          </a:prstGeom>
+          <a:solidFill>
+            <a:srgbClr val="1C2842"/>
+          </a:solidFill>
+          <a:ln>
+            <a:noFill/>
+          </a:ln>
+        </p:spPr>
+        <p:style>
+          <a:lnRef idx="1">
+            <a:schemeClr val="accent1"/>
+          </a:lnRef>
+          <a:fillRef idx="3">
+            <a:schemeClr val="accent1"/>
+          </a:fillRef>
+          <a:effectRef idx="2">
+            <a:schemeClr val="accent1"/>
+          </a:effectRef>
+          <a:fontRef idx="minor">
+            <a:schemeClr val="lt1"/>
+          </a:fontRef>
+        </p:style>
+        <p:txBody>
+          <a:bodyPr rtlCol="0" anchor="ctr"/>
+          <a:lstStyle/>
+          <a:p>
+            <a:pPr algn="ctr"/>
+          </a:p>
+        </p:txBody>
+      </p:sp>
+      <p:sp>
+        <p:nvSpPr>
+          <p:cNvPr id="12" name="Rectangle 11"/>
+          <p:cNvSpPr/>
+          <p:nvPr/>
+        </p:nvSpPr>
+        <p:spPr>
+          <a:xfrm>
+            <a:off x="731520" y="4663440"/>
+            <a:ext cx="50800" cy="1463040"/>
+          </a:xfrm>
+          <a:prstGeom prst="rect">
+            <a:avLst/>
+          </a:prstGeom>
+          <a:solidFill>
+            <a:srgbClr val="607090"/>
+          </a:solidFill>
+          <a:ln>
+            <a:noFill/>
+          </a:ln>
+        </p:spPr>
+        <p:style>
+          <a:lnRef idx="1">
+            <a:schemeClr val="accent1"/>
+          </a:lnRef>
+          <a:fillRef idx="3">
+            <a:schemeClr val="accent1"/>
+          </a:fillRef>
+          <a:effectRef idx="2">
+            <a:schemeClr val="accent1"/>
+          </a:effectRef>
+          <a:fontRef idx="minor">
+            <a:schemeClr val="lt1"/>
+          </a:fontRef>
+        </p:style>
+        <p:txBody>
+          <a:bodyPr rtlCol="0" anchor="ctr"/>
+          <a:lstStyle/>
+          <a:p>
+            <a:pPr algn="ctr"/>
+          </a:p>
+        </p:txBody>
+      </p:sp>
+      <p:sp>
+        <p:nvSpPr>
+          <p:cNvPr id="13" name="TextBox 12"/>
           <p:cNvSpPr txBox="1"/>
           <p:nvPr/>
         </p:nvSpPr>
         <p:spPr>
           <a:xfrm>
-            <a:off x="1645920" y="1965960"/>
-            <a:ext cx="2743200" cy="457200"/>
+            <a:off x="1188720" y="4800600"/>
+            <a:ext cx="9875520" cy="1188720"/>
           </a:xfrm>
           <a:prstGeom prst="rect">
             <a:avLst/>
@@ -8589,29 +8890,72 @@
           <a:lstStyle/>
           <a:p>
             <a:pPr algn="l">
-              <a:defRPr sz="1600" b="1">
+              <a:defRPr sz="1400" b="0">
                 <a:solidFill>
-                  <a:srgbClr val="7C3AED"/>
+                  <a:srgbClr val="A0AEC4"/>
                 </a:solidFill>
                 <a:latin typeface="Microsoft YaHei"/>
               </a:defRPr>
             </a:pPr>
             <a:r>
-              <a:t>核心要点</a:t>
-            </a:r>
-          </a:p>
-        </p:txBody>
-      </p:sp>
-      <p:sp>
-        <p:nvSpPr>
-          <p:cNvPr id="11" name="TextBox 10"/>
+              <a:t>核心思想是给AI一段"示范视频"，让AI角色模仿视频中的动作。参考视频提供动作模板，角色关键帧提供角色形象，提示词补充场景/光线/氛围等静态元素。动作描述交给参考视频，提示词不需要详细描述动作。参考强度建议60-80%，过高会丢失角色特征。</a:t>
+            </a:r>
+          </a:p>
+        </p:txBody>
+      </p:sp>
+      <p:sp>
+        <p:nvSpPr>
+          <p:cNvPr id="14" name="Rectangle 13"/>
+          <p:cNvSpPr/>
+          <p:nvPr/>
+        </p:nvSpPr>
+        <p:spPr>
+          <a:xfrm>
+            <a:off x="0" y="6446520"/>
+            <a:ext cx="12191695" cy="12700"/>
+          </a:xfrm>
+          <a:prstGeom prst="rect">
+            <a:avLst/>
+          </a:prstGeom>
+          <a:solidFill>
+            <a:srgbClr val="253350"/>
+          </a:solidFill>
+          <a:ln>
+            <a:noFill/>
+          </a:ln>
+        </p:spPr>
+        <p:style>
+          <a:lnRef idx="1">
+            <a:schemeClr val="accent1"/>
+          </a:lnRef>
+          <a:fillRef idx="3">
+            <a:schemeClr val="accent1"/>
+          </a:fillRef>
+          <a:effectRef idx="2">
+            <a:schemeClr val="accent1"/>
+          </a:effectRef>
+          <a:fontRef idx="minor">
+            <a:schemeClr val="lt1"/>
+          </a:fontRef>
+        </p:style>
+        <p:txBody>
+          <a:bodyPr rtlCol="0" anchor="ctr"/>
+          <a:lstStyle/>
+          <a:p>
+            <a:pPr algn="ctr"/>
+          </a:p>
+        </p:txBody>
+      </p:sp>
+      <p:sp>
+        <p:nvSpPr>
+          <p:cNvPr id="15" name="TextBox 14"/>
           <p:cNvSpPr txBox="1"/>
           <p:nvPr/>
         </p:nvSpPr>
         <p:spPr>
           <a:xfrm>
-            <a:off x="1188720" y="2560320"/>
-            <a:ext cx="9784080" cy="1371600"/>
+            <a:off x="731520" y="6492240"/>
+            <a:ext cx="4572000" cy="274320"/>
           </a:xfrm>
           <a:prstGeom prst="rect">
             <a:avLst/>
@@ -8625,115 +8969,29 @@
           <a:lstStyle/>
           <a:p>
             <a:pPr algn="l">
-              <a:defRPr sz="2400" b="1">
+              <a:defRPr sz="900" b="0">
                 <a:solidFill>
-                  <a:srgbClr val="FFFFFF"/>
+                  <a:srgbClr val="607090"/>
                 </a:solidFill>
                 <a:latin typeface="Microsoft YaHei"/>
               </a:defRPr>
             </a:pPr>
             <a:r>
-              <a:t>参考视频（真人/动画）+ 角色关键帧 + 提示词 → AI视频输出</a:t>
-            </a:r>
-          </a:p>
-        </p:txBody>
-      </p:sp>
-      <p:sp>
-        <p:nvSpPr>
-          <p:cNvPr id="12" name="Rounded Rectangle 11"/>
-          <p:cNvSpPr/>
-          <p:nvPr/>
-        </p:nvSpPr>
-        <p:spPr>
-          <a:xfrm>
-            <a:off x="731520" y="4754880"/>
-            <a:ext cx="10698480" cy="1371600"/>
-          </a:xfrm>
-          <a:prstGeom prst="roundRect">
-            <a:avLst/>
-          </a:prstGeom>
-          <a:solidFill>
-            <a:srgbClr val="1A2842"/>
-          </a:solidFill>
-          <a:ln>
-            <a:noFill/>
-          </a:ln>
-        </p:spPr>
-        <p:style>
-          <a:lnRef idx="1">
-            <a:schemeClr val="accent1"/>
-          </a:lnRef>
-          <a:fillRef idx="3">
-            <a:schemeClr val="accent1"/>
-          </a:fillRef>
-          <a:effectRef idx="2">
-            <a:schemeClr val="accent1"/>
-          </a:effectRef>
-          <a:fontRef idx="minor">
-            <a:schemeClr val="lt1"/>
-          </a:fontRef>
-        </p:style>
-        <p:txBody>
-          <a:bodyPr rtlCol="0" anchor="ctr"/>
-          <a:lstStyle/>
-          <a:p>
-            <a:pPr algn="ctr"/>
-          </a:p>
-        </p:txBody>
-      </p:sp>
-      <p:sp>
-        <p:nvSpPr>
-          <p:cNvPr id="13" name="Rectangle 12"/>
-          <p:cNvSpPr/>
-          <p:nvPr/>
-        </p:nvSpPr>
-        <p:spPr>
-          <a:xfrm>
-            <a:off x="731520" y="4754880"/>
-            <a:ext cx="73152" cy="1371600"/>
-          </a:xfrm>
-          <a:prstGeom prst="rect">
-            <a:avLst/>
-          </a:prstGeom>
-          <a:solidFill>
-            <a:srgbClr val="6B7B9E"/>
-          </a:solidFill>
-          <a:ln>
-            <a:noFill/>
-          </a:ln>
-        </p:spPr>
-        <p:style>
-          <a:lnRef idx="1">
-            <a:schemeClr val="accent1"/>
-          </a:lnRef>
-          <a:fillRef idx="3">
-            <a:schemeClr val="accent1"/>
-          </a:fillRef>
-          <a:effectRef idx="2">
-            <a:schemeClr val="accent1"/>
-          </a:effectRef>
-          <a:fontRef idx="minor">
-            <a:schemeClr val="lt1"/>
-          </a:fontRef>
-        </p:style>
-        <p:txBody>
-          <a:bodyPr rtlCol="0" anchor="ctr"/>
-          <a:lstStyle/>
-          <a:p>
-            <a:pPr algn="ctr"/>
-          </a:p>
-        </p:txBody>
-      </p:sp>
-      <p:sp>
-        <p:nvSpPr>
-          <p:cNvPr id="14" name="TextBox 13"/>
+              <a:t>模块07 · Seedance 2.0深度精通</a:t>
+            </a:r>
+          </a:p>
+        </p:txBody>
+      </p:sp>
+      <p:sp>
+        <p:nvSpPr>
+          <p:cNvPr id="16" name="TextBox 15"/>
           <p:cNvSpPr txBox="1"/>
           <p:nvPr/>
         </p:nvSpPr>
         <p:spPr>
           <a:xfrm>
-            <a:off x="1097280" y="4892040"/>
-            <a:ext cx="10058400" cy="1097280"/>
+            <a:off x="10515600" y="6492240"/>
+            <a:ext cx="1371600" cy="274320"/>
           </a:xfrm>
           <a:prstGeom prst="rect">
             <a:avLst/>
@@ -8746,125 +9004,10 @@
           </a:bodyPr>
           <a:lstStyle/>
           <a:p>
-            <a:pPr algn="l">
-              <a:defRPr sz="1400" b="0">
-                <a:solidFill>
-                  <a:srgbClr val="CBD5E8"/>
-                </a:solidFill>
-                <a:latin typeface="Microsoft YaHei"/>
-              </a:defRPr>
-            </a:pPr>
-            <a:r>
-              <a:t>核心思想是给AI一段"示范视频"，让AI角色模仿视频中的动作。参考视频提供动作模板，角色关键帧提供角色形象，提示词补充场景/光线/氛围等静态元素。动作描述交给参考视频，提示词不需要详细描述动作。参考强度建议60-80%，过高会丢失角色特征。</a:t>
-            </a:r>
-          </a:p>
-        </p:txBody>
-      </p:sp>
-      <p:sp>
-        <p:nvSpPr>
-          <p:cNvPr id="15" name="Rectangle 14"/>
-          <p:cNvSpPr/>
-          <p:nvPr/>
-        </p:nvSpPr>
-        <p:spPr>
-          <a:xfrm>
-            <a:off x="0" y="6446520"/>
-            <a:ext cx="12191695" cy="19050"/>
-          </a:xfrm>
-          <a:prstGeom prst="rect">
-            <a:avLst/>
-          </a:prstGeom>
-          <a:solidFill>
-            <a:srgbClr val="2D3B55"/>
-          </a:solidFill>
-          <a:ln>
-            <a:noFill/>
-          </a:ln>
-        </p:spPr>
-        <p:style>
-          <a:lnRef idx="1">
-            <a:schemeClr val="accent1"/>
-          </a:lnRef>
-          <a:fillRef idx="3">
-            <a:schemeClr val="accent1"/>
-          </a:fillRef>
-          <a:effectRef idx="2">
-            <a:schemeClr val="accent1"/>
-          </a:effectRef>
-          <a:fontRef idx="minor">
-            <a:schemeClr val="lt1"/>
-          </a:fontRef>
-        </p:style>
-        <p:txBody>
-          <a:bodyPr rtlCol="0" anchor="ctr"/>
-          <a:lstStyle/>
-          <a:p>
-            <a:pPr algn="ctr"/>
-          </a:p>
-        </p:txBody>
-      </p:sp>
-      <p:sp>
-        <p:nvSpPr>
-          <p:cNvPr id="16" name="TextBox 15"/>
-          <p:cNvSpPr txBox="1"/>
-          <p:nvPr/>
-        </p:nvSpPr>
-        <p:spPr>
-          <a:xfrm>
-            <a:off x="457200" y="6492240"/>
-            <a:ext cx="5486400" cy="274320"/>
-          </a:xfrm>
-          <a:prstGeom prst="rect">
-            <a:avLst/>
-          </a:prstGeom>
-          <a:noFill/>
-        </p:spPr>
-        <p:txBody>
-          <a:bodyPr wrap="square">
-            <a:spAutoFit/>
-          </a:bodyPr>
-          <a:lstStyle/>
-          <a:p>
-            <a:pPr algn="l">
-              <a:defRPr sz="900" b="0">
-                <a:solidFill>
-                  <a:srgbClr val="6B7B9E"/>
-                </a:solidFill>
-                <a:latin typeface="Microsoft YaHei"/>
-              </a:defRPr>
-            </a:pPr>
-            <a:r>
-              <a:t>模块07：Seedance 2.0深度精通</a:t>
-            </a:r>
-          </a:p>
-        </p:txBody>
-      </p:sp>
-      <p:sp>
-        <p:nvSpPr>
-          <p:cNvPr id="17" name="TextBox 16"/>
-          <p:cNvSpPr txBox="1"/>
-          <p:nvPr/>
-        </p:nvSpPr>
-        <p:spPr>
-          <a:xfrm>
-            <a:off x="10515600" y="6492240"/>
-            <a:ext cx="1371600" cy="274320"/>
-          </a:xfrm>
-          <a:prstGeom prst="rect">
-            <a:avLst/>
-          </a:prstGeom>
-          <a:noFill/>
-        </p:spPr>
-        <p:txBody>
-          <a:bodyPr wrap="square">
-            <a:spAutoFit/>
-          </a:bodyPr>
-          <a:lstStyle/>
-          <a:p>
             <a:pPr algn="r">
               <a:defRPr sz="900" b="0">
                 <a:solidFill>
-                  <a:srgbClr val="6B7B9E"/>
+                  <a:srgbClr val="607090"/>
                 </a:solidFill>
                 <a:latin typeface="Microsoft YaHei"/>
               </a:defRPr>
@@ -8889,7 +9032,7 @@
     <p:bg>
       <p:bgPr>
         <a:solidFill>
-          <a:srgbClr val="0B1120"/>
+          <a:srgbClr val="0A0E1A"/>
         </a:solidFill>
         <a:effectLst/>
       </p:bgPr>
@@ -8910,13 +9053,13 @@
         <p:spPr>
           <a:xfrm>
             <a:off x="0" y="0"/>
-            <a:ext cx="12191695" cy="1051560"/>
-          </a:xfrm>
-          <a:prstGeom prst="rect">
-            <a:avLst/>
-          </a:prstGeom>
-          <a:solidFill>
-            <a:srgbClr val="141E33"/>
+            <a:ext cx="12191695" cy="38100"/>
+          </a:xfrm>
+          <a:prstGeom prst="rect">
+            <a:avLst/>
+          </a:prstGeom>
+          <a:solidFill>
+            <a:srgbClr val="8B5CF6"/>
           </a:solidFill>
           <a:ln>
             <a:noFill/>
@@ -8952,14 +9095,14 @@
         </p:nvSpPr>
         <p:spPr>
           <a:xfrm>
-            <a:off x="0" y="0"/>
-            <a:ext cx="109728" cy="1051560"/>
-          </a:xfrm>
-          <a:prstGeom prst="rect">
-            <a:avLst/>
-          </a:prstGeom>
-          <a:solidFill>
-            <a:srgbClr val="7C3AED"/>
+            <a:off x="0" y="38100"/>
+            <a:ext cx="12191695" cy="914400"/>
+          </a:xfrm>
+          <a:prstGeom prst="rect">
+            <a:avLst/>
+          </a:prstGeom>
+          <a:solidFill>
+            <a:srgbClr val="161F35"/>
           </a:solidFill>
           <a:ln>
             <a:noFill/>
@@ -8989,14 +9132,57 @@
       </p:sp>
       <p:sp>
         <p:nvSpPr>
-          <p:cNvPr id="4" name="TextBox 3"/>
+          <p:cNvPr id="4" name="Rectangle 3"/>
+          <p:cNvSpPr/>
+          <p:nvPr/>
+        </p:nvSpPr>
+        <p:spPr>
+          <a:xfrm>
+            <a:off x="0" y="38100"/>
+            <a:ext cx="91440" cy="914400"/>
+          </a:xfrm>
+          <a:prstGeom prst="rect">
+            <a:avLst/>
+          </a:prstGeom>
+          <a:solidFill>
+            <a:srgbClr val="8B5CF6"/>
+          </a:solidFill>
+          <a:ln>
+            <a:noFill/>
+          </a:ln>
+        </p:spPr>
+        <p:style>
+          <a:lnRef idx="1">
+            <a:schemeClr val="accent1"/>
+          </a:lnRef>
+          <a:fillRef idx="3">
+            <a:schemeClr val="accent1"/>
+          </a:fillRef>
+          <a:effectRef idx="2">
+            <a:schemeClr val="accent1"/>
+          </a:effectRef>
+          <a:fontRef idx="minor">
+            <a:schemeClr val="lt1"/>
+          </a:fontRef>
+        </p:style>
+        <p:txBody>
+          <a:bodyPr rtlCol="0" anchor="ctr"/>
+          <a:lstStyle/>
+          <a:p>
+            <a:pPr algn="ctr"/>
+          </a:p>
+        </p:txBody>
+      </p:sp>
+      <p:sp>
+        <p:nvSpPr>
+          <p:cNvPr id="5" name="TextBox 4"/>
           <p:cNvSpPr txBox="1"/>
           <p:nvPr/>
         </p:nvSpPr>
         <p:spPr>
           <a:xfrm>
-            <a:off x="548640" y="182880"/>
-            <a:ext cx="10058400" cy="640080"/>
+            <a:off x="731520" y="137160"/>
+            <a:ext cx="10728655" cy="640080"/>
           </a:xfrm>
           <a:prstGeom prst="rect">
             <a:avLst/>
@@ -9010,9 +9196,9 @@
           <a:lstStyle/>
           <a:p>
             <a:pPr algn="l">
-              <a:defRPr sz="2600" b="1">
+              <a:defRPr sz="2400" b="1">
                 <a:solidFill>
-                  <a:srgbClr val="FFFFFF"/>
+                  <a:srgbClr val="F0F4FC"/>
                 </a:solidFill>
                 <a:latin typeface="Microsoft YaHei"/>
               </a:defRPr>
@@ -9025,20 +9211,20 @@
       </p:sp>
       <p:sp>
         <p:nvSpPr>
-          <p:cNvPr id="5" name="Rectangle 4"/>
-          <p:cNvSpPr/>
-          <p:nvPr/>
-        </p:nvSpPr>
-        <p:spPr>
-          <a:xfrm>
-            <a:off x="0" y="1051560"/>
-            <a:ext cx="12191695" cy="25400"/>
-          </a:xfrm>
-          <a:prstGeom prst="rect">
-            <a:avLst/>
-          </a:prstGeom>
-          <a:solidFill>
-            <a:srgbClr val="7C3AED"/>
+          <p:cNvPr id="6" name="Rectangle 5"/>
+          <p:cNvSpPr/>
+          <p:nvPr/>
+        </p:nvSpPr>
+        <p:spPr>
+          <a:xfrm>
+            <a:off x="0" y="1078992"/>
+            <a:ext cx="12191695" cy="12700"/>
+          </a:xfrm>
+          <a:prstGeom prst="rect">
+            <a:avLst/>
+          </a:prstGeom>
+          <a:solidFill>
+            <a:srgbClr val="253350"/>
           </a:solidFill>
           <a:ln>
             <a:noFill/>
@@ -9068,20 +9254,20 @@
       </p:sp>
       <p:sp>
         <p:nvSpPr>
-          <p:cNvPr id="6" name="Rounded Rectangle 5"/>
-          <p:cNvSpPr/>
-          <p:nvPr/>
-        </p:nvSpPr>
-        <p:spPr>
-          <a:xfrm>
-            <a:off x="457200" y="1325880"/>
-            <a:ext cx="11247120" cy="731520"/>
+          <p:cNvPr id="7" name="Rounded Rectangle 6"/>
+          <p:cNvSpPr/>
+          <p:nvPr/>
+        </p:nvSpPr>
+        <p:spPr>
+          <a:xfrm>
+            <a:off x="457200" y="1280160"/>
+            <a:ext cx="11247120" cy="685800"/>
           </a:xfrm>
           <a:prstGeom prst="roundRect">
             <a:avLst/>
           </a:prstGeom>
           <a:solidFill>
-            <a:srgbClr val="141E33"/>
+            <a:srgbClr val="161F35"/>
           </a:solidFill>
           <a:ln>
             <a:noFill/>
@@ -9111,20 +9297,20 @@
       </p:sp>
       <p:sp>
         <p:nvSpPr>
-          <p:cNvPr id="7" name="Rectangle 6"/>
-          <p:cNvSpPr/>
-          <p:nvPr/>
-        </p:nvSpPr>
-        <p:spPr>
-          <a:xfrm>
-            <a:off x="457200" y="1325880"/>
-            <a:ext cx="73152" cy="731520"/>
-          </a:xfrm>
-          <a:prstGeom prst="rect">
-            <a:avLst/>
-          </a:prstGeom>
-          <a:solidFill>
-            <a:srgbClr val="7C3AED"/>
+          <p:cNvPr id="8" name="Rectangle 7"/>
+          <p:cNvSpPr/>
+          <p:nvPr/>
+        </p:nvSpPr>
+        <p:spPr>
+          <a:xfrm>
+            <a:off x="457200" y="1280160"/>
+            <a:ext cx="54864" cy="685800"/>
+          </a:xfrm>
+          <a:prstGeom prst="rect">
+            <a:avLst/>
+          </a:prstGeom>
+          <a:solidFill>
+            <a:srgbClr val="8B5CF6"/>
           </a:solidFill>
           <a:ln>
             <a:noFill/>
@@ -9154,20 +9340,20 @@
       </p:sp>
       <p:sp>
         <p:nvSpPr>
-          <p:cNvPr id="8" name="Oval 7"/>
-          <p:cNvSpPr/>
-          <p:nvPr/>
-        </p:nvSpPr>
-        <p:spPr>
-          <a:xfrm>
-            <a:off x="731520" y="1490472"/>
-            <a:ext cx="365760" cy="365760"/>
+          <p:cNvPr id="9" name="Oval 8"/>
+          <p:cNvSpPr/>
+          <p:nvPr/>
+        </p:nvSpPr>
+        <p:spPr>
+          <a:xfrm>
+            <a:off x="685800" y="1463040"/>
+            <a:ext cx="320040" cy="320040"/>
           </a:xfrm>
           <a:prstGeom prst="ellipse">
             <a:avLst/>
           </a:prstGeom>
           <a:solidFill>
-            <a:srgbClr val="7C3AED"/>
+            <a:srgbClr val="8B5CF6"/>
           </a:solidFill>
           <a:ln>
             <a:noFill/>
@@ -9197,14 +9383,14 @@
       </p:sp>
       <p:sp>
         <p:nvSpPr>
-          <p:cNvPr id="9" name="TextBox 8"/>
+          <p:cNvPr id="10" name="TextBox 9"/>
           <p:cNvSpPr txBox="1"/>
           <p:nvPr/>
         </p:nvSpPr>
         <p:spPr>
           <a:xfrm>
-            <a:off x="731520" y="1490472"/>
-            <a:ext cx="365760" cy="365760"/>
+            <a:off x="685800" y="1463040"/>
+            <a:ext cx="320040" cy="320040"/>
           </a:xfrm>
           <a:prstGeom prst="rect">
             <a:avLst/>
@@ -9218,9 +9404,9 @@
           <a:lstStyle/>
           <a:p>
             <a:pPr algn="ctr">
-              <a:defRPr sz="1100" b="1">
+              <a:defRPr sz="1000" b="1">
                 <a:solidFill>
-                  <a:srgbClr val="FFFFFF"/>
+                  <a:srgbClr val="F0F4FC"/>
                 </a:solidFill>
                 <a:latin typeface="Microsoft YaHei"/>
               </a:defRPr>
@@ -9233,14 +9419,14 @@
       </p:sp>
       <p:sp>
         <p:nvSpPr>
-          <p:cNvPr id="10" name="TextBox 9"/>
+          <p:cNvPr id="11" name="TextBox 10"/>
           <p:cNvSpPr txBox="1"/>
           <p:nvPr/>
         </p:nvSpPr>
         <p:spPr>
           <a:xfrm>
-            <a:off x="1280160" y="1417320"/>
-            <a:ext cx="10058400" cy="548640"/>
+            <a:off x="1188720" y="1440180"/>
+            <a:ext cx="10058400" cy="365760"/>
           </a:xfrm>
           <a:prstGeom prst="rect">
             <a:avLst/>
@@ -9254,9 +9440,9 @@
           <a:lstStyle/>
           <a:p>
             <a:pPr algn="l">
-              <a:defRPr sz="1500" b="0">
+              <a:defRPr sz="1400" b="0">
                 <a:solidFill>
-                  <a:srgbClr val="CBD5E8"/>
+                  <a:srgbClr val="A0AEC4"/>
                 </a:solidFill>
                 <a:latin typeface="Microsoft YaHei"/>
               </a:defRPr>
@@ -9269,20 +9455,20 @@
       </p:sp>
       <p:sp>
         <p:nvSpPr>
-          <p:cNvPr id="11" name="Rounded Rectangle 10"/>
-          <p:cNvSpPr/>
-          <p:nvPr/>
-        </p:nvSpPr>
-        <p:spPr>
-          <a:xfrm>
-            <a:off x="457200" y="2194560"/>
-            <a:ext cx="11247120" cy="731520"/>
+          <p:cNvPr id="12" name="Rounded Rectangle 11"/>
+          <p:cNvSpPr/>
+          <p:nvPr/>
+        </p:nvSpPr>
+        <p:spPr>
+          <a:xfrm>
+            <a:off x="457200" y="2297430"/>
+            <a:ext cx="11247120" cy="685800"/>
           </a:xfrm>
           <a:prstGeom prst="roundRect">
             <a:avLst/>
           </a:prstGeom>
           <a:solidFill>
-            <a:srgbClr val="141E33"/>
+            <a:srgbClr val="161F35"/>
           </a:solidFill>
           <a:ln>
             <a:noFill/>
@@ -9312,20 +9498,20 @@
       </p:sp>
       <p:sp>
         <p:nvSpPr>
-          <p:cNvPr id="12" name="Rectangle 11"/>
-          <p:cNvSpPr/>
-          <p:nvPr/>
-        </p:nvSpPr>
-        <p:spPr>
-          <a:xfrm>
-            <a:off x="457200" y="2194560"/>
-            <a:ext cx="73152" cy="731520"/>
-          </a:xfrm>
-          <a:prstGeom prst="rect">
-            <a:avLst/>
-          </a:prstGeom>
-          <a:solidFill>
-            <a:srgbClr val="7C3AED"/>
+          <p:cNvPr id="13" name="Rectangle 12"/>
+          <p:cNvSpPr/>
+          <p:nvPr/>
+        </p:nvSpPr>
+        <p:spPr>
+          <a:xfrm>
+            <a:off x="457200" y="2297430"/>
+            <a:ext cx="54864" cy="685800"/>
+          </a:xfrm>
+          <a:prstGeom prst="rect">
+            <a:avLst/>
+          </a:prstGeom>
+          <a:solidFill>
+            <a:srgbClr val="8B5CF6"/>
           </a:solidFill>
           <a:ln>
             <a:noFill/>
@@ -9355,20 +9541,20 @@
       </p:sp>
       <p:sp>
         <p:nvSpPr>
-          <p:cNvPr id="13" name="Oval 12"/>
-          <p:cNvSpPr/>
-          <p:nvPr/>
-        </p:nvSpPr>
-        <p:spPr>
-          <a:xfrm>
-            <a:off x="731520" y="2359152"/>
-            <a:ext cx="365760" cy="365760"/>
+          <p:cNvPr id="14" name="Oval 13"/>
+          <p:cNvSpPr/>
+          <p:nvPr/>
+        </p:nvSpPr>
+        <p:spPr>
+          <a:xfrm>
+            <a:off x="685800" y="2480310"/>
+            <a:ext cx="320040" cy="320040"/>
           </a:xfrm>
           <a:prstGeom prst="ellipse">
             <a:avLst/>
           </a:prstGeom>
           <a:solidFill>
-            <a:srgbClr val="7C3AED"/>
+            <a:srgbClr val="8B5CF6"/>
           </a:solidFill>
           <a:ln>
             <a:noFill/>
@@ -9398,14 +9584,14 @@
       </p:sp>
       <p:sp>
         <p:nvSpPr>
-          <p:cNvPr id="14" name="TextBox 13"/>
+          <p:cNvPr id="15" name="TextBox 14"/>
           <p:cNvSpPr txBox="1"/>
           <p:nvPr/>
         </p:nvSpPr>
         <p:spPr>
           <a:xfrm>
-            <a:off x="731520" y="2359152"/>
-            <a:ext cx="365760" cy="365760"/>
+            <a:off x="685800" y="2480310"/>
+            <a:ext cx="320040" cy="320040"/>
           </a:xfrm>
           <a:prstGeom prst="rect">
             <a:avLst/>
@@ -9419,9 +9605,9 @@
           <a:lstStyle/>
           <a:p>
             <a:pPr algn="ctr">
-              <a:defRPr sz="1100" b="1">
+              <a:defRPr sz="1000" b="1">
                 <a:solidFill>
-                  <a:srgbClr val="FFFFFF"/>
+                  <a:srgbClr val="F0F4FC"/>
                 </a:solidFill>
                 <a:latin typeface="Microsoft YaHei"/>
               </a:defRPr>
@@ -9434,14 +9620,14 @@
       </p:sp>
       <p:sp>
         <p:nvSpPr>
-          <p:cNvPr id="15" name="TextBox 14"/>
+          <p:cNvPr id="16" name="TextBox 15"/>
           <p:cNvSpPr txBox="1"/>
           <p:nvPr/>
         </p:nvSpPr>
         <p:spPr>
           <a:xfrm>
-            <a:off x="1280160" y="2286000"/>
-            <a:ext cx="10058400" cy="548640"/>
+            <a:off x="1188720" y="2457450"/>
+            <a:ext cx="10058400" cy="365760"/>
           </a:xfrm>
           <a:prstGeom prst="rect">
             <a:avLst/>
@@ -9455,9 +9641,9 @@
           <a:lstStyle/>
           <a:p>
             <a:pPr algn="l">
-              <a:defRPr sz="1500" b="0">
+              <a:defRPr sz="1400" b="0">
                 <a:solidFill>
-                  <a:srgbClr val="CBD5E8"/>
+                  <a:srgbClr val="A0AEC4"/>
                 </a:solidFill>
                 <a:latin typeface="Microsoft YaHei"/>
               </a:defRPr>
@@ -9470,20 +9656,20 @@
       </p:sp>
       <p:sp>
         <p:nvSpPr>
-          <p:cNvPr id="16" name="Rounded Rectangle 15"/>
-          <p:cNvSpPr/>
-          <p:nvPr/>
-        </p:nvSpPr>
-        <p:spPr>
-          <a:xfrm>
-            <a:off x="457200" y="3063240"/>
-            <a:ext cx="11247120" cy="731520"/>
+          <p:cNvPr id="17" name="Rounded Rectangle 16"/>
+          <p:cNvSpPr/>
+          <p:nvPr/>
+        </p:nvSpPr>
+        <p:spPr>
+          <a:xfrm>
+            <a:off x="457200" y="3314700"/>
+            <a:ext cx="11247120" cy="685800"/>
           </a:xfrm>
           <a:prstGeom prst="roundRect">
             <a:avLst/>
           </a:prstGeom>
           <a:solidFill>
-            <a:srgbClr val="141E33"/>
+            <a:srgbClr val="161F35"/>
           </a:solidFill>
           <a:ln>
             <a:noFill/>
@@ -9513,20 +9699,20 @@
       </p:sp>
       <p:sp>
         <p:nvSpPr>
-          <p:cNvPr id="17" name="Rectangle 16"/>
-          <p:cNvSpPr/>
-          <p:nvPr/>
-        </p:nvSpPr>
-        <p:spPr>
-          <a:xfrm>
-            <a:off x="457200" y="3063240"/>
-            <a:ext cx="73152" cy="731520"/>
-          </a:xfrm>
-          <a:prstGeom prst="rect">
-            <a:avLst/>
-          </a:prstGeom>
-          <a:solidFill>
-            <a:srgbClr val="7C3AED"/>
+          <p:cNvPr id="18" name="Rectangle 17"/>
+          <p:cNvSpPr/>
+          <p:nvPr/>
+        </p:nvSpPr>
+        <p:spPr>
+          <a:xfrm>
+            <a:off x="457200" y="3314700"/>
+            <a:ext cx="54864" cy="685800"/>
+          </a:xfrm>
+          <a:prstGeom prst="rect">
+            <a:avLst/>
+          </a:prstGeom>
+          <a:solidFill>
+            <a:srgbClr val="8B5CF6"/>
           </a:solidFill>
           <a:ln>
             <a:noFill/>
@@ -9556,20 +9742,20 @@
       </p:sp>
       <p:sp>
         <p:nvSpPr>
-          <p:cNvPr id="18" name="Oval 17"/>
-          <p:cNvSpPr/>
-          <p:nvPr/>
-        </p:nvSpPr>
-        <p:spPr>
-          <a:xfrm>
-            <a:off x="731520" y="3227832"/>
-            <a:ext cx="365760" cy="365760"/>
+          <p:cNvPr id="19" name="Oval 18"/>
+          <p:cNvSpPr/>
+          <p:nvPr/>
+        </p:nvSpPr>
+        <p:spPr>
+          <a:xfrm>
+            <a:off x="685800" y="3497580"/>
+            <a:ext cx="320040" cy="320040"/>
           </a:xfrm>
           <a:prstGeom prst="ellipse">
             <a:avLst/>
           </a:prstGeom>
           <a:solidFill>
-            <a:srgbClr val="7C3AED"/>
+            <a:srgbClr val="8B5CF6"/>
           </a:solidFill>
           <a:ln>
             <a:noFill/>
@@ -9599,14 +9785,14 @@
       </p:sp>
       <p:sp>
         <p:nvSpPr>
-          <p:cNvPr id="19" name="TextBox 18"/>
+          <p:cNvPr id="20" name="TextBox 19"/>
           <p:cNvSpPr txBox="1"/>
           <p:nvPr/>
         </p:nvSpPr>
         <p:spPr>
           <a:xfrm>
-            <a:off x="731520" y="3227832"/>
-            <a:ext cx="365760" cy="365760"/>
+            <a:off x="685800" y="3497580"/>
+            <a:ext cx="320040" cy="320040"/>
           </a:xfrm>
           <a:prstGeom prst="rect">
             <a:avLst/>
@@ -9620,9 +9806,9 @@
           <a:lstStyle/>
           <a:p>
             <a:pPr algn="ctr">
-              <a:defRPr sz="1100" b="1">
+              <a:defRPr sz="1000" b="1">
                 <a:solidFill>
-                  <a:srgbClr val="FFFFFF"/>
+                  <a:srgbClr val="F0F4FC"/>
                 </a:solidFill>
                 <a:latin typeface="Microsoft YaHei"/>
               </a:defRPr>
@@ -9635,14 +9821,14 @@
       </p:sp>
       <p:sp>
         <p:nvSpPr>
-          <p:cNvPr id="20" name="TextBox 19"/>
+          <p:cNvPr id="21" name="TextBox 20"/>
           <p:cNvSpPr txBox="1"/>
           <p:nvPr/>
         </p:nvSpPr>
         <p:spPr>
           <a:xfrm>
-            <a:off x="1280160" y="3154680"/>
-            <a:ext cx="10058400" cy="548640"/>
+            <a:off x="1188720" y="3474720"/>
+            <a:ext cx="10058400" cy="365760"/>
           </a:xfrm>
           <a:prstGeom prst="rect">
             <a:avLst/>
@@ -9656,9 +9842,9 @@
           <a:lstStyle/>
           <a:p>
             <a:pPr algn="l">
-              <a:defRPr sz="1500" b="0">
+              <a:defRPr sz="1400" b="0">
                 <a:solidFill>
-                  <a:srgbClr val="CBD5E8"/>
+                  <a:srgbClr val="A0AEC4"/>
                 </a:solidFill>
                 <a:latin typeface="Microsoft YaHei"/>
               </a:defRPr>
@@ -9671,20 +9857,20 @@
       </p:sp>
       <p:sp>
         <p:nvSpPr>
-          <p:cNvPr id="21" name="Rounded Rectangle 20"/>
-          <p:cNvSpPr/>
-          <p:nvPr/>
-        </p:nvSpPr>
-        <p:spPr>
-          <a:xfrm>
-            <a:off x="457200" y="3931919"/>
-            <a:ext cx="11247120" cy="731520"/>
+          <p:cNvPr id="22" name="Rounded Rectangle 21"/>
+          <p:cNvSpPr/>
+          <p:nvPr/>
+        </p:nvSpPr>
+        <p:spPr>
+          <a:xfrm>
+            <a:off x="457200" y="4331970"/>
+            <a:ext cx="11247120" cy="685800"/>
           </a:xfrm>
           <a:prstGeom prst="roundRect">
             <a:avLst/>
           </a:prstGeom>
           <a:solidFill>
-            <a:srgbClr val="141E33"/>
+            <a:srgbClr val="161F35"/>
           </a:solidFill>
           <a:ln>
             <a:noFill/>
@@ -9714,20 +9900,20 @@
       </p:sp>
       <p:sp>
         <p:nvSpPr>
-          <p:cNvPr id="22" name="Rectangle 21"/>
-          <p:cNvSpPr/>
-          <p:nvPr/>
-        </p:nvSpPr>
-        <p:spPr>
-          <a:xfrm>
-            <a:off x="457200" y="3931919"/>
-            <a:ext cx="73152" cy="731520"/>
-          </a:xfrm>
-          <a:prstGeom prst="rect">
-            <a:avLst/>
-          </a:prstGeom>
-          <a:solidFill>
-            <a:srgbClr val="7C3AED"/>
+          <p:cNvPr id="23" name="Rectangle 22"/>
+          <p:cNvSpPr/>
+          <p:nvPr/>
+        </p:nvSpPr>
+        <p:spPr>
+          <a:xfrm>
+            <a:off x="457200" y="4331970"/>
+            <a:ext cx="54864" cy="685800"/>
+          </a:xfrm>
+          <a:prstGeom prst="rect">
+            <a:avLst/>
+          </a:prstGeom>
+          <a:solidFill>
+            <a:srgbClr val="8B5CF6"/>
           </a:solidFill>
           <a:ln>
             <a:noFill/>
@@ -9757,20 +9943,20 @@
       </p:sp>
       <p:sp>
         <p:nvSpPr>
-          <p:cNvPr id="23" name="Oval 22"/>
-          <p:cNvSpPr/>
-          <p:nvPr/>
-        </p:nvSpPr>
-        <p:spPr>
-          <a:xfrm>
-            <a:off x="731520" y="4096511"/>
-            <a:ext cx="365760" cy="365760"/>
+          <p:cNvPr id="24" name="Oval 23"/>
+          <p:cNvSpPr/>
+          <p:nvPr/>
+        </p:nvSpPr>
+        <p:spPr>
+          <a:xfrm>
+            <a:off x="685800" y="4514850"/>
+            <a:ext cx="320040" cy="320040"/>
           </a:xfrm>
           <a:prstGeom prst="ellipse">
             <a:avLst/>
           </a:prstGeom>
           <a:solidFill>
-            <a:srgbClr val="7C3AED"/>
+            <a:srgbClr val="8B5CF6"/>
           </a:solidFill>
           <a:ln>
             <a:noFill/>
@@ -9800,14 +9986,14 @@
       </p:sp>
       <p:sp>
         <p:nvSpPr>
-          <p:cNvPr id="24" name="TextBox 23"/>
+          <p:cNvPr id="25" name="TextBox 24"/>
           <p:cNvSpPr txBox="1"/>
           <p:nvPr/>
         </p:nvSpPr>
         <p:spPr>
           <a:xfrm>
-            <a:off x="731520" y="4096511"/>
-            <a:ext cx="365760" cy="365760"/>
+            <a:off x="685800" y="4514850"/>
+            <a:ext cx="320040" cy="320040"/>
           </a:xfrm>
           <a:prstGeom prst="rect">
             <a:avLst/>
@@ -9821,9 +10007,9 @@
           <a:lstStyle/>
           <a:p>
             <a:pPr algn="ctr">
-              <a:defRPr sz="1100" b="1">
+              <a:defRPr sz="1000" b="1">
                 <a:solidFill>
-                  <a:srgbClr val="FFFFFF"/>
+                  <a:srgbClr val="F0F4FC"/>
                 </a:solidFill>
                 <a:latin typeface="Microsoft YaHei"/>
               </a:defRPr>
@@ -9836,14 +10022,14 @@
       </p:sp>
       <p:sp>
         <p:nvSpPr>
-          <p:cNvPr id="25" name="TextBox 24"/>
+          <p:cNvPr id="26" name="TextBox 25"/>
           <p:cNvSpPr txBox="1"/>
           <p:nvPr/>
         </p:nvSpPr>
         <p:spPr>
           <a:xfrm>
-            <a:off x="1280160" y="4023359"/>
-            <a:ext cx="10058400" cy="548640"/>
+            <a:off x="1188720" y="4491990"/>
+            <a:ext cx="10058400" cy="365760"/>
           </a:xfrm>
           <a:prstGeom prst="rect">
             <a:avLst/>
@@ -9857,9 +10043,9 @@
           <a:lstStyle/>
           <a:p>
             <a:pPr algn="l">
-              <a:defRPr sz="1500" b="0">
+              <a:defRPr sz="1400" b="0">
                 <a:solidFill>
-                  <a:srgbClr val="CBD5E8"/>
+                  <a:srgbClr val="A0AEC4"/>
                 </a:solidFill>
                 <a:latin typeface="Microsoft YaHei"/>
               </a:defRPr>
@@ -9872,20 +10058,20 @@
       </p:sp>
       <p:sp>
         <p:nvSpPr>
-          <p:cNvPr id="26" name="Rounded Rectangle 25"/>
-          <p:cNvSpPr/>
-          <p:nvPr/>
-        </p:nvSpPr>
-        <p:spPr>
-          <a:xfrm>
-            <a:off x="457200" y="4800600"/>
-            <a:ext cx="11247120" cy="731520"/>
+          <p:cNvPr id="27" name="Rounded Rectangle 26"/>
+          <p:cNvSpPr/>
+          <p:nvPr/>
+        </p:nvSpPr>
+        <p:spPr>
+          <a:xfrm>
+            <a:off x="457200" y="5349240"/>
+            <a:ext cx="11247120" cy="685800"/>
           </a:xfrm>
           <a:prstGeom prst="roundRect">
             <a:avLst/>
           </a:prstGeom>
           <a:solidFill>
-            <a:srgbClr val="141E33"/>
+            <a:srgbClr val="161F35"/>
           </a:solidFill>
           <a:ln>
             <a:noFill/>
@@ -9915,20 +10101,20 @@
       </p:sp>
       <p:sp>
         <p:nvSpPr>
-          <p:cNvPr id="27" name="Rectangle 26"/>
-          <p:cNvSpPr/>
-          <p:nvPr/>
-        </p:nvSpPr>
-        <p:spPr>
-          <a:xfrm>
-            <a:off x="457200" y="4800600"/>
-            <a:ext cx="73152" cy="731520"/>
-          </a:xfrm>
-          <a:prstGeom prst="rect">
-            <a:avLst/>
-          </a:prstGeom>
-          <a:solidFill>
-            <a:srgbClr val="7C3AED"/>
+          <p:cNvPr id="28" name="Rectangle 27"/>
+          <p:cNvSpPr/>
+          <p:nvPr/>
+        </p:nvSpPr>
+        <p:spPr>
+          <a:xfrm>
+            <a:off x="457200" y="5349240"/>
+            <a:ext cx="54864" cy="685800"/>
+          </a:xfrm>
+          <a:prstGeom prst="rect">
+            <a:avLst/>
+          </a:prstGeom>
+          <a:solidFill>
+            <a:srgbClr val="8B5CF6"/>
           </a:solidFill>
           <a:ln>
             <a:noFill/>
@@ -9958,20 +10144,20 @@
       </p:sp>
       <p:sp>
         <p:nvSpPr>
-          <p:cNvPr id="28" name="Oval 27"/>
-          <p:cNvSpPr/>
-          <p:nvPr/>
-        </p:nvSpPr>
-        <p:spPr>
-          <a:xfrm>
-            <a:off x="731520" y="4965192"/>
-            <a:ext cx="365760" cy="365760"/>
+          <p:cNvPr id="29" name="Oval 28"/>
+          <p:cNvSpPr/>
+          <p:nvPr/>
+        </p:nvSpPr>
+        <p:spPr>
+          <a:xfrm>
+            <a:off x="685800" y="5532120"/>
+            <a:ext cx="320040" cy="320040"/>
           </a:xfrm>
           <a:prstGeom prst="ellipse">
             <a:avLst/>
           </a:prstGeom>
           <a:solidFill>
-            <a:srgbClr val="7C3AED"/>
+            <a:srgbClr val="8B5CF6"/>
           </a:solidFill>
           <a:ln>
             <a:noFill/>
@@ -10001,14 +10187,14 @@
       </p:sp>
       <p:sp>
         <p:nvSpPr>
-          <p:cNvPr id="29" name="TextBox 28"/>
+          <p:cNvPr id="30" name="TextBox 29"/>
           <p:cNvSpPr txBox="1"/>
           <p:nvPr/>
         </p:nvSpPr>
         <p:spPr>
           <a:xfrm>
-            <a:off x="731520" y="4965192"/>
-            <a:ext cx="365760" cy="365760"/>
+            <a:off x="685800" y="5532120"/>
+            <a:ext cx="320040" cy="320040"/>
           </a:xfrm>
           <a:prstGeom prst="rect">
             <a:avLst/>
@@ -10022,9 +10208,9 @@
           <a:lstStyle/>
           <a:p>
             <a:pPr algn="ctr">
-              <a:defRPr sz="1100" b="1">
+              <a:defRPr sz="1000" b="1">
                 <a:solidFill>
-                  <a:srgbClr val="FFFFFF"/>
+                  <a:srgbClr val="F0F4FC"/>
                 </a:solidFill>
                 <a:latin typeface="Microsoft YaHei"/>
               </a:defRPr>
@@ -10037,14 +10223,14 @@
       </p:sp>
       <p:sp>
         <p:nvSpPr>
-          <p:cNvPr id="30" name="TextBox 29"/>
+          <p:cNvPr id="31" name="TextBox 30"/>
           <p:cNvSpPr txBox="1"/>
           <p:nvPr/>
         </p:nvSpPr>
         <p:spPr>
           <a:xfrm>
-            <a:off x="1280160" y="4892040"/>
-            <a:ext cx="10058400" cy="548640"/>
+            <a:off x="1188720" y="5509260"/>
+            <a:ext cx="10058400" cy="365760"/>
           </a:xfrm>
           <a:prstGeom prst="rect">
             <a:avLst/>
@@ -10058,9 +10244,9 @@
           <a:lstStyle/>
           <a:p>
             <a:pPr algn="l">
-              <a:defRPr sz="1500" b="0">
+              <a:defRPr sz="1400" b="0">
                 <a:solidFill>
-                  <a:srgbClr val="CBD5E8"/>
+                  <a:srgbClr val="A0AEC4"/>
                 </a:solidFill>
                 <a:latin typeface="Microsoft YaHei"/>
               </a:defRPr>
@@ -10073,20 +10259,20 @@
       </p:sp>
       <p:sp>
         <p:nvSpPr>
-          <p:cNvPr id="31" name="Rectangle 30"/>
+          <p:cNvPr id="32" name="Rectangle 31"/>
           <p:cNvSpPr/>
           <p:nvPr/>
         </p:nvSpPr>
         <p:spPr>
           <a:xfrm>
             <a:off x="0" y="6446520"/>
-            <a:ext cx="12191695" cy="19050"/>
-          </a:xfrm>
-          <a:prstGeom prst="rect">
-            <a:avLst/>
-          </a:prstGeom>
-          <a:solidFill>
-            <a:srgbClr val="2D3B55"/>
+            <a:ext cx="12191695" cy="12700"/>
+          </a:xfrm>
+          <a:prstGeom prst="rect">
+            <a:avLst/>
+          </a:prstGeom>
+          <a:solidFill>
+            <a:srgbClr val="253350"/>
           </a:solidFill>
           <a:ln>
             <a:noFill/>
@@ -10116,14 +10302,14 @@
       </p:sp>
       <p:sp>
         <p:nvSpPr>
-          <p:cNvPr id="32" name="TextBox 31"/>
+          <p:cNvPr id="33" name="TextBox 32"/>
           <p:cNvSpPr txBox="1"/>
           <p:nvPr/>
         </p:nvSpPr>
         <p:spPr>
           <a:xfrm>
-            <a:off x="457200" y="6492240"/>
-            <a:ext cx="5486400" cy="274320"/>
+            <a:off x="731520" y="6492240"/>
+            <a:ext cx="4572000" cy="274320"/>
           </a:xfrm>
           <a:prstGeom prst="rect">
             <a:avLst/>
@@ -10139,20 +10325,20 @@
             <a:pPr algn="l">
               <a:defRPr sz="900" b="0">
                 <a:solidFill>
-                  <a:srgbClr val="6B7B9E"/>
+                  <a:srgbClr val="607090"/>
                 </a:solidFill>
                 <a:latin typeface="Microsoft YaHei"/>
               </a:defRPr>
             </a:pPr>
             <a:r>
-              <a:t>模块07：Seedance 2.0深度精通</a:t>
-            </a:r>
-          </a:p>
-        </p:txBody>
-      </p:sp>
-      <p:sp>
-        <p:nvSpPr>
-          <p:cNvPr id="33" name="TextBox 32"/>
+              <a:t>模块07 · Seedance 2.0深度精通</a:t>
+            </a:r>
+          </a:p>
+        </p:txBody>
+      </p:sp>
+      <p:sp>
+        <p:nvSpPr>
+          <p:cNvPr id="34" name="TextBox 33"/>
           <p:cNvSpPr txBox="1"/>
           <p:nvPr/>
         </p:nvSpPr>
@@ -10175,7 +10361,7 @@
             <a:pPr algn="r">
               <a:defRPr sz="900" b="0">
                 <a:solidFill>
-                  <a:srgbClr val="6B7B9E"/>
+                  <a:srgbClr val="607090"/>
                 </a:solidFill>
                 <a:latin typeface="Microsoft YaHei"/>
               </a:defRPr>
@@ -10200,7 +10386,7 @@
     <p:bg>
       <p:bgPr>
         <a:solidFill>
-          <a:srgbClr val="0B1120"/>
+          <a:srgbClr val="0A0E1A"/>
         </a:solidFill>
         <a:effectLst/>
       </p:bgPr>
@@ -10221,13 +10407,13 @@
         <p:spPr>
           <a:xfrm>
             <a:off x="0" y="0"/>
-            <a:ext cx="12191695" cy="1051560"/>
-          </a:xfrm>
-          <a:prstGeom prst="rect">
-            <a:avLst/>
-          </a:prstGeom>
-          <a:solidFill>
-            <a:srgbClr val="141E33"/>
+            <a:ext cx="12191695" cy="38100"/>
+          </a:xfrm>
+          <a:prstGeom prst="rect">
+            <a:avLst/>
+          </a:prstGeom>
+          <a:solidFill>
+            <a:srgbClr val="8B5CF6"/>
           </a:solidFill>
           <a:ln>
             <a:noFill/>
@@ -10263,14 +10449,14 @@
         </p:nvSpPr>
         <p:spPr>
           <a:xfrm>
-            <a:off x="0" y="0"/>
-            <a:ext cx="109728" cy="1051560"/>
-          </a:xfrm>
-          <a:prstGeom prst="rect">
-            <a:avLst/>
-          </a:prstGeom>
-          <a:solidFill>
-            <a:srgbClr val="7C3AED"/>
+            <a:off x="0" y="38100"/>
+            <a:ext cx="12191695" cy="914400"/>
+          </a:xfrm>
+          <a:prstGeom prst="rect">
+            <a:avLst/>
+          </a:prstGeom>
+          <a:solidFill>
+            <a:srgbClr val="161F35"/>
           </a:solidFill>
           <a:ln>
             <a:noFill/>
@@ -10300,14 +10486,57 @@
       </p:sp>
       <p:sp>
         <p:nvSpPr>
-          <p:cNvPr id="4" name="TextBox 3"/>
+          <p:cNvPr id="4" name="Rectangle 3"/>
+          <p:cNvSpPr/>
+          <p:nvPr/>
+        </p:nvSpPr>
+        <p:spPr>
+          <a:xfrm>
+            <a:off x="0" y="38100"/>
+            <a:ext cx="91440" cy="914400"/>
+          </a:xfrm>
+          <a:prstGeom prst="rect">
+            <a:avLst/>
+          </a:prstGeom>
+          <a:solidFill>
+            <a:srgbClr val="8B5CF6"/>
+          </a:solidFill>
+          <a:ln>
+            <a:noFill/>
+          </a:ln>
+        </p:spPr>
+        <p:style>
+          <a:lnRef idx="1">
+            <a:schemeClr val="accent1"/>
+          </a:lnRef>
+          <a:fillRef idx="3">
+            <a:schemeClr val="accent1"/>
+          </a:fillRef>
+          <a:effectRef idx="2">
+            <a:schemeClr val="accent1"/>
+          </a:effectRef>
+          <a:fontRef idx="minor">
+            <a:schemeClr val="lt1"/>
+          </a:fontRef>
+        </p:style>
+        <p:txBody>
+          <a:bodyPr rtlCol="0" anchor="ctr"/>
+          <a:lstStyle/>
+          <a:p>
+            <a:pPr algn="ctr"/>
+          </a:p>
+        </p:txBody>
+      </p:sp>
+      <p:sp>
+        <p:nvSpPr>
+          <p:cNvPr id="5" name="TextBox 4"/>
           <p:cNvSpPr txBox="1"/>
           <p:nvPr/>
         </p:nvSpPr>
         <p:spPr>
           <a:xfrm>
-            <a:off x="548640" y="182880"/>
-            <a:ext cx="10058400" cy="640080"/>
+            <a:off x="731520" y="137160"/>
+            <a:ext cx="10728655" cy="640080"/>
           </a:xfrm>
           <a:prstGeom prst="rect">
             <a:avLst/>
@@ -10321,9 +10550,9 @@
           <a:lstStyle/>
           <a:p>
             <a:pPr algn="l">
-              <a:defRPr sz="2600" b="1">
+              <a:defRPr sz="2400" b="1">
                 <a:solidFill>
-                  <a:srgbClr val="FFFFFF"/>
+                  <a:srgbClr val="F0F4FC"/>
                 </a:solidFill>
                 <a:latin typeface="Microsoft YaHei"/>
               </a:defRPr>
@@ -10336,20 +10565,20 @@
       </p:sp>
       <p:sp>
         <p:nvSpPr>
-          <p:cNvPr id="5" name="Rectangle 4"/>
-          <p:cNvSpPr/>
-          <p:nvPr/>
-        </p:nvSpPr>
-        <p:spPr>
-          <a:xfrm>
-            <a:off x="0" y="1051560"/>
-            <a:ext cx="12191695" cy="25400"/>
-          </a:xfrm>
-          <a:prstGeom prst="rect">
-            <a:avLst/>
-          </a:prstGeom>
-          <a:solidFill>
-            <a:srgbClr val="7C3AED"/>
+          <p:cNvPr id="6" name="Rectangle 5"/>
+          <p:cNvSpPr/>
+          <p:nvPr/>
+        </p:nvSpPr>
+        <p:spPr>
+          <a:xfrm>
+            <a:off x="0" y="1078992"/>
+            <a:ext cx="12191695" cy="12700"/>
+          </a:xfrm>
+          <a:prstGeom prst="rect">
+            <a:avLst/>
+          </a:prstGeom>
+          <a:solidFill>
+            <a:srgbClr val="253350"/>
           </a:solidFill>
           <a:ln>
             <a:noFill/>
@@ -10379,15 +10608,15 @@
       </p:sp>
       <p:graphicFrame>
         <p:nvGraphicFramePr>
-          <p:cNvPr id="6" name="Table 5"/>
+          <p:cNvPr id="7" name="Table 6"/>
           <p:cNvGraphicFramePr>
             <a:graphicFrameLocks noGrp="1"/>
           </p:cNvGraphicFramePr>
           <p:nvPr/>
         </p:nvGraphicFramePr>
         <p:xfrm>
-          <a:off x="548640" y="1463040"/>
-          <a:ext cx="11064240" cy="2377440"/>
+          <a:off x="548640" y="1371600"/>
+          <a:ext cx="11064240" cy="2194560"/>
         </p:xfrm>
         <a:graphic>
           <a:graphicData uri="http://schemas.openxmlformats.org/drawingml/2006/table">
@@ -10401,16 +10630,16 @@
                 <a:gridCol w="2766060"/>
                 <a:gridCol w="2766060"/>
               </a:tblGrid>
-              <a:tr h="594360">
+              <a:tr h="548640">
                 <a:tc>
                   <a:txBody>
                     <a:bodyPr/>
                     <a:lstStyle/>
                     <a:p>
                       <a:pPr algn="ctr">
-                        <a:defRPr sz="1400" b="1">
+                        <a:defRPr sz="1300" b="1">
                           <a:solidFill>
-                            <a:srgbClr val="FFFFFF"/>
+                            <a:srgbClr val="F0F4FC"/>
                           </a:solidFill>
                           <a:latin typeface="Microsoft YaHei"/>
                         </a:defRPr>
@@ -10422,7 +10651,7 @@
                   </a:txBody>
                   <a:tcPr anchor="ctr">
                     <a:solidFill>
-                      <a:srgbClr val="7C3AED"/>
+                      <a:srgbClr val="8B5CF6"/>
                     </a:solidFill>
                   </a:tcPr>
                 </a:tc>
@@ -10432,9 +10661,9 @@
                     <a:lstStyle/>
                     <a:p>
                       <a:pPr algn="ctr">
-                        <a:defRPr sz="1400" b="1">
+                        <a:defRPr sz="1300" b="1">
                           <a:solidFill>
-                            <a:srgbClr val="FFFFFF"/>
+                            <a:srgbClr val="F0F4FC"/>
                           </a:solidFill>
                           <a:latin typeface="Microsoft YaHei"/>
                         </a:defRPr>
@@ -10446,7 +10675,7 @@
                   </a:txBody>
                   <a:tcPr anchor="ctr">
                     <a:solidFill>
-                      <a:srgbClr val="7C3AED"/>
+                      <a:srgbClr val="8B5CF6"/>
                     </a:solidFill>
                   </a:tcPr>
                 </a:tc>
@@ -10456,9 +10685,9 @@
                     <a:lstStyle/>
                     <a:p>
                       <a:pPr algn="ctr">
-                        <a:defRPr sz="1400" b="1">
+                        <a:defRPr sz="1300" b="1">
                           <a:solidFill>
-                            <a:srgbClr val="FFFFFF"/>
+                            <a:srgbClr val="F0F4FC"/>
                           </a:solidFill>
                           <a:latin typeface="Microsoft YaHei"/>
                         </a:defRPr>
@@ -10470,7 +10699,7 @@
                   </a:txBody>
                   <a:tcPr anchor="ctr">
                     <a:solidFill>
-                      <a:srgbClr val="7C3AED"/>
+                      <a:srgbClr val="8B5CF6"/>
                     </a:solidFill>
                   </a:tcPr>
                 </a:tc>
@@ -10480,9 +10709,9 @@
                     <a:lstStyle/>
                     <a:p>
                       <a:pPr algn="ctr">
-                        <a:defRPr sz="1400" b="1">
+                        <a:defRPr sz="1300" b="1">
                           <a:solidFill>
-                            <a:srgbClr val="FFFFFF"/>
+                            <a:srgbClr val="F0F4FC"/>
                           </a:solidFill>
                           <a:latin typeface="Microsoft YaHei"/>
                         </a:defRPr>
@@ -10494,21 +10723,21 @@
                   </a:txBody>
                   <a:tcPr anchor="ctr">
                     <a:solidFill>
-                      <a:srgbClr val="7C3AED"/>
+                      <a:srgbClr val="8B5CF6"/>
                     </a:solidFill>
                   </a:tcPr>
                 </a:tc>
               </a:tr>
-              <a:tr h="594360">
+              <a:tr h="548640">
                 <a:tc>
                   <a:txBody>
                     <a:bodyPr/>
                     <a:lstStyle/>
                     <a:p>
                       <a:pPr algn="ctr">
-                        <a:defRPr sz="1300">
+                        <a:defRPr sz="1200">
                           <a:solidFill>
-                            <a:srgbClr val="CBD5E8"/>
+                            <a:srgbClr val="A0AEC4"/>
                           </a:solidFill>
                           <a:latin typeface="Microsoft YaHei"/>
                         </a:defRPr>
@@ -10520,7 +10749,7 @@
                   </a:txBody>
                   <a:tcPr anchor="ctr">
                     <a:solidFill>
-                      <a:srgbClr val="141E33"/>
+                      <a:srgbClr val="161F35"/>
                     </a:solidFill>
                   </a:tcPr>
                 </a:tc>
@@ -10530,9 +10759,9 @@
                     <a:lstStyle/>
                     <a:p>
                       <a:pPr algn="ctr">
-                        <a:defRPr sz="1300">
+                        <a:defRPr sz="1200">
                           <a:solidFill>
-                            <a:srgbClr val="CBD5E8"/>
+                            <a:srgbClr val="A0AEC4"/>
                           </a:solidFill>
                           <a:latin typeface="Microsoft YaHei"/>
                         </a:defRPr>
@@ -10544,7 +10773,7 @@
                   </a:txBody>
                   <a:tcPr anchor="ctr">
                     <a:solidFill>
-                      <a:srgbClr val="141E33"/>
+                      <a:srgbClr val="161F35"/>
                     </a:solidFill>
                   </a:tcPr>
                 </a:tc>
@@ -10554,9 +10783,9 @@
                     <a:lstStyle/>
                     <a:p>
                       <a:pPr algn="ctr">
-                        <a:defRPr sz="1300">
+                        <a:defRPr sz="1200">
                           <a:solidFill>
-                            <a:srgbClr val="CBD5E8"/>
+                            <a:srgbClr val="A0AEC4"/>
                           </a:solidFill>
                           <a:latin typeface="Microsoft YaHei"/>
                         </a:defRPr>
@@ -10568,7 +10797,7 @@
                   </a:txBody>
                   <a:tcPr anchor="ctr">
                     <a:solidFill>
-                      <a:srgbClr val="141E33"/>
+                      <a:srgbClr val="161F35"/>
                     </a:solidFill>
                   </a:tcPr>
                 </a:tc>
@@ -10578,9 +10807,9 @@
                     <a:lstStyle/>
                     <a:p>
                       <a:pPr algn="ctr">
-                        <a:defRPr sz="1300">
+                        <a:defRPr sz="1200">
                           <a:solidFill>
-                            <a:srgbClr val="CBD5E8"/>
+                            <a:srgbClr val="A0AEC4"/>
                           </a:solidFill>
                           <a:latin typeface="Microsoft YaHei"/>
                         </a:defRPr>
@@ -10592,21 +10821,21 @@
                   </a:txBody>
                   <a:tcPr anchor="ctr">
                     <a:solidFill>
-                      <a:srgbClr val="141E33"/>
+                      <a:srgbClr val="161F35"/>
                     </a:solidFill>
                   </a:tcPr>
                 </a:tc>
               </a:tr>
-              <a:tr h="594360">
+              <a:tr h="548640">
                 <a:tc>
                   <a:txBody>
                     <a:bodyPr/>
                     <a:lstStyle/>
                     <a:p>
                       <a:pPr algn="ctr">
-                        <a:defRPr sz="1300">
+                        <a:defRPr sz="1200">
                           <a:solidFill>
-                            <a:srgbClr val="CBD5E8"/>
+                            <a:srgbClr val="A0AEC4"/>
                           </a:solidFill>
                           <a:latin typeface="Microsoft YaHei"/>
                         </a:defRPr>
@@ -10618,7 +10847,7 @@
                   </a:txBody>
                   <a:tcPr anchor="ctr">
                     <a:solidFill>
-                      <a:srgbClr val="1A2842"/>
+                      <a:srgbClr val="1C2842"/>
                     </a:solidFill>
                   </a:tcPr>
                 </a:tc>
@@ -10628,9 +10857,9 @@
                     <a:lstStyle/>
                     <a:p>
                       <a:pPr algn="ctr">
-                        <a:defRPr sz="1300">
+                        <a:defRPr sz="1200">
                           <a:solidFill>
-                            <a:srgbClr val="CBD5E8"/>
+                            <a:srgbClr val="A0AEC4"/>
                           </a:solidFill>
                           <a:latin typeface="Microsoft YaHei"/>
                         </a:defRPr>
@@ -10642,7 +10871,7 @@
                   </a:txBody>
                   <a:tcPr anchor="ctr">
                     <a:solidFill>
-                      <a:srgbClr val="1A2842"/>
+                      <a:srgbClr val="1C2842"/>
                     </a:solidFill>
                   </a:tcPr>
                 </a:tc>
@@ -10652,9 +10881,9 @@
                     <a:lstStyle/>
                     <a:p>
                       <a:pPr algn="ctr">
-                        <a:defRPr sz="1300">
+                        <a:defRPr sz="1200">
                           <a:solidFill>
-                            <a:srgbClr val="CBD5E8"/>
+                            <a:srgbClr val="A0AEC4"/>
                           </a:solidFill>
                           <a:latin typeface="Microsoft YaHei"/>
                         </a:defRPr>
@@ -10666,7 +10895,7 @@
                   </a:txBody>
                   <a:tcPr anchor="ctr">
                     <a:solidFill>
-                      <a:srgbClr val="1A2842"/>
+                      <a:srgbClr val="1C2842"/>
                     </a:solidFill>
                   </a:tcPr>
                 </a:tc>
@@ -10676,9 +10905,9 @@
                     <a:lstStyle/>
                     <a:p>
                       <a:pPr algn="ctr">
-                        <a:defRPr sz="1300">
+                        <a:defRPr sz="1200">
                           <a:solidFill>
-                            <a:srgbClr val="CBD5E8"/>
+                            <a:srgbClr val="A0AEC4"/>
                           </a:solidFill>
                           <a:latin typeface="Microsoft YaHei"/>
                         </a:defRPr>
@@ -10690,21 +10919,21 @@
                   </a:txBody>
                   <a:tcPr anchor="ctr">
                     <a:solidFill>
-                      <a:srgbClr val="1A2842"/>
+                      <a:srgbClr val="1C2842"/>
                     </a:solidFill>
                   </a:tcPr>
                 </a:tc>
               </a:tr>
-              <a:tr h="594360">
+              <a:tr h="548640">
                 <a:tc>
                   <a:txBody>
                     <a:bodyPr/>
                     <a:lstStyle/>
                     <a:p>
                       <a:pPr algn="ctr">
-                        <a:defRPr sz="1300">
+                        <a:defRPr sz="1200">
                           <a:solidFill>
-                            <a:srgbClr val="CBD5E8"/>
+                            <a:srgbClr val="A0AEC4"/>
                           </a:solidFill>
                           <a:latin typeface="Microsoft YaHei"/>
                         </a:defRPr>
@@ -10716,7 +10945,7 @@
                   </a:txBody>
                   <a:tcPr anchor="ctr">
                     <a:solidFill>
-                      <a:srgbClr val="141E33"/>
+                      <a:srgbClr val="161F35"/>
                     </a:solidFill>
                   </a:tcPr>
                 </a:tc>
@@ -10726,9 +10955,9 @@
                     <a:lstStyle/>
                     <a:p>
                       <a:pPr algn="ctr">
-                        <a:defRPr sz="1300">
+                        <a:defRPr sz="1200">
                           <a:solidFill>
-                            <a:srgbClr val="CBD5E8"/>
+                            <a:srgbClr val="A0AEC4"/>
                           </a:solidFill>
                           <a:latin typeface="Microsoft YaHei"/>
                         </a:defRPr>
@@ -10737,7 +10966,7 @@
                   </a:txBody>
                   <a:tcPr anchor="ctr">
                     <a:solidFill>
-                      <a:srgbClr val="141E33"/>
+                      <a:srgbClr val="161F35"/>
                     </a:solidFill>
                   </a:tcPr>
                 </a:tc>
@@ -10747,9 +10976,9 @@
                     <a:lstStyle/>
                     <a:p>
                       <a:pPr algn="ctr">
-                        <a:defRPr sz="1300">
+                        <a:defRPr sz="1200">
                           <a:solidFill>
-                            <a:srgbClr val="CBD5E8"/>
+                            <a:srgbClr val="A0AEC4"/>
                           </a:solidFill>
                           <a:latin typeface="Microsoft YaHei"/>
                         </a:defRPr>
@@ -10758,7 +10987,7 @@
                   </a:txBody>
                   <a:tcPr anchor="ctr">
                     <a:solidFill>
-                      <a:srgbClr val="141E33"/>
+                      <a:srgbClr val="161F35"/>
                     </a:solidFill>
                   </a:tcPr>
                 </a:tc>
@@ -10768,9 +10997,9 @@
                     <a:lstStyle/>
                     <a:p>
                       <a:pPr algn="ctr">
-                        <a:defRPr sz="1300">
+                        <a:defRPr sz="1200">
                           <a:solidFill>
-                            <a:srgbClr val="CBD5E8"/>
+                            <a:srgbClr val="A0AEC4"/>
                           </a:solidFill>
                           <a:latin typeface="Microsoft YaHei"/>
                         </a:defRPr>
@@ -10782,7 +11011,7 @@
                   </a:txBody>
                   <a:tcPr anchor="ctr">
                     <a:solidFill>
-                      <a:srgbClr val="141E33"/>
+                      <a:srgbClr val="161F35"/>
                     </a:solidFill>
                   </a:tcPr>
                 </a:tc>
@@ -10793,20 +11022,20 @@
       </p:graphicFrame>
       <p:sp>
         <p:nvSpPr>
-          <p:cNvPr id="7" name="Rectangle 6"/>
+          <p:cNvPr id="8" name="Rectangle 7"/>
           <p:cNvSpPr/>
           <p:nvPr/>
         </p:nvSpPr>
         <p:spPr>
           <a:xfrm>
             <a:off x="0" y="6446520"/>
-            <a:ext cx="12191695" cy="19050"/>
-          </a:xfrm>
-          <a:prstGeom prst="rect">
-            <a:avLst/>
-          </a:prstGeom>
-          <a:solidFill>
-            <a:srgbClr val="2D3B55"/>
+            <a:ext cx="12191695" cy="12700"/>
+          </a:xfrm>
+          <a:prstGeom prst="rect">
+            <a:avLst/>
+          </a:prstGeom>
+          <a:solidFill>
+            <a:srgbClr val="253350"/>
           </a:solidFill>
           <a:ln>
             <a:noFill/>
@@ -10836,14 +11065,14 @@
       </p:sp>
       <p:sp>
         <p:nvSpPr>
-          <p:cNvPr id="8" name="TextBox 7"/>
+          <p:cNvPr id="9" name="TextBox 8"/>
           <p:cNvSpPr txBox="1"/>
           <p:nvPr/>
         </p:nvSpPr>
         <p:spPr>
           <a:xfrm>
-            <a:off x="457200" y="6492240"/>
-            <a:ext cx="5486400" cy="274320"/>
+            <a:off x="731520" y="6492240"/>
+            <a:ext cx="4572000" cy="274320"/>
           </a:xfrm>
           <a:prstGeom prst="rect">
             <a:avLst/>
@@ -10859,20 +11088,20 @@
             <a:pPr algn="l">
               <a:defRPr sz="900" b="0">
                 <a:solidFill>
-                  <a:srgbClr val="6B7B9E"/>
+                  <a:srgbClr val="607090"/>
                 </a:solidFill>
                 <a:latin typeface="Microsoft YaHei"/>
               </a:defRPr>
             </a:pPr>
             <a:r>
-              <a:t>模块07：Seedance 2.0深度精通</a:t>
-            </a:r>
-          </a:p>
-        </p:txBody>
-      </p:sp>
-      <p:sp>
-        <p:nvSpPr>
-          <p:cNvPr id="9" name="TextBox 8"/>
+              <a:t>模块07 · Seedance 2.0深度精通</a:t>
+            </a:r>
+          </a:p>
+        </p:txBody>
+      </p:sp>
+      <p:sp>
+        <p:nvSpPr>
+          <p:cNvPr id="10" name="TextBox 9"/>
           <p:cNvSpPr txBox="1"/>
           <p:nvPr/>
         </p:nvSpPr>
@@ -10895,7 +11124,7 @@
             <a:pPr algn="r">
               <a:defRPr sz="900" b="0">
                 <a:solidFill>
-                  <a:srgbClr val="6B7B9E"/>
+                  <a:srgbClr val="607090"/>
                 </a:solidFill>
                 <a:latin typeface="Microsoft YaHei"/>
               </a:defRPr>
@@ -10920,7 +11149,7 @@
     <p:bg>
       <p:bgPr>
         <a:solidFill>
-          <a:srgbClr val="0B1120"/>
+          <a:srgbClr val="0A0E1A"/>
         </a:solidFill>
         <a:effectLst/>
       </p:bgPr>
@@ -10941,13 +11170,13 @@
         <p:spPr>
           <a:xfrm>
             <a:off x="0" y="0"/>
-            <a:ext cx="12191695" cy="1051560"/>
-          </a:xfrm>
-          <a:prstGeom prst="rect">
-            <a:avLst/>
-          </a:prstGeom>
-          <a:solidFill>
-            <a:srgbClr val="141E33"/>
+            <a:ext cx="12191695" cy="38100"/>
+          </a:xfrm>
+          <a:prstGeom prst="rect">
+            <a:avLst/>
+          </a:prstGeom>
+          <a:solidFill>
+            <a:srgbClr val="8B5CF6"/>
           </a:solidFill>
           <a:ln>
             <a:noFill/>
@@ -10983,14 +11212,14 @@
         </p:nvSpPr>
         <p:spPr>
           <a:xfrm>
-            <a:off x="0" y="0"/>
-            <a:ext cx="109728" cy="1051560"/>
-          </a:xfrm>
-          <a:prstGeom prst="rect">
-            <a:avLst/>
-          </a:prstGeom>
-          <a:solidFill>
-            <a:srgbClr val="7C3AED"/>
+            <a:off x="0" y="38100"/>
+            <a:ext cx="12191695" cy="914400"/>
+          </a:xfrm>
+          <a:prstGeom prst="rect">
+            <a:avLst/>
+          </a:prstGeom>
+          <a:solidFill>
+            <a:srgbClr val="161F35"/>
           </a:solidFill>
           <a:ln>
             <a:noFill/>
@@ -11020,14 +11249,57 @@
       </p:sp>
       <p:sp>
         <p:nvSpPr>
-          <p:cNvPr id="4" name="TextBox 3"/>
+          <p:cNvPr id="4" name="Rectangle 3"/>
+          <p:cNvSpPr/>
+          <p:nvPr/>
+        </p:nvSpPr>
+        <p:spPr>
+          <a:xfrm>
+            <a:off x="0" y="38100"/>
+            <a:ext cx="91440" cy="914400"/>
+          </a:xfrm>
+          <a:prstGeom prst="rect">
+            <a:avLst/>
+          </a:prstGeom>
+          <a:solidFill>
+            <a:srgbClr val="8B5CF6"/>
+          </a:solidFill>
+          <a:ln>
+            <a:noFill/>
+          </a:ln>
+        </p:spPr>
+        <p:style>
+          <a:lnRef idx="1">
+            <a:schemeClr val="accent1"/>
+          </a:lnRef>
+          <a:fillRef idx="3">
+            <a:schemeClr val="accent1"/>
+          </a:fillRef>
+          <a:effectRef idx="2">
+            <a:schemeClr val="accent1"/>
+          </a:effectRef>
+          <a:fontRef idx="minor">
+            <a:schemeClr val="lt1"/>
+          </a:fontRef>
+        </p:style>
+        <p:txBody>
+          <a:bodyPr rtlCol="0" anchor="ctr"/>
+          <a:lstStyle/>
+          <a:p>
+            <a:pPr algn="ctr"/>
+          </a:p>
+        </p:txBody>
+      </p:sp>
+      <p:sp>
+        <p:nvSpPr>
+          <p:cNvPr id="5" name="TextBox 4"/>
           <p:cNvSpPr txBox="1"/>
           <p:nvPr/>
         </p:nvSpPr>
         <p:spPr>
           <a:xfrm>
-            <a:off x="548640" y="182880"/>
-            <a:ext cx="10058400" cy="640080"/>
+            <a:off x="731520" y="137160"/>
+            <a:ext cx="10728655" cy="640080"/>
           </a:xfrm>
           <a:prstGeom prst="rect">
             <a:avLst/>
@@ -11041,9 +11313,9 @@
           <a:lstStyle/>
           <a:p>
             <a:pPr algn="l">
-              <a:defRPr sz="2600" b="1">
+              <a:defRPr sz="2400" b="1">
                 <a:solidFill>
-                  <a:srgbClr val="FFFFFF"/>
+                  <a:srgbClr val="F0F4FC"/>
                 </a:solidFill>
                 <a:latin typeface="Microsoft YaHei"/>
               </a:defRPr>
@@ -11056,20 +11328,20 @@
       </p:sp>
       <p:sp>
         <p:nvSpPr>
-          <p:cNvPr id="5" name="Rectangle 4"/>
-          <p:cNvSpPr/>
-          <p:nvPr/>
-        </p:nvSpPr>
-        <p:spPr>
-          <a:xfrm>
-            <a:off x="0" y="1051560"/>
-            <a:ext cx="12191695" cy="25400"/>
-          </a:xfrm>
-          <a:prstGeom prst="rect">
-            <a:avLst/>
-          </a:prstGeom>
-          <a:solidFill>
-            <a:srgbClr val="7C3AED"/>
+          <p:cNvPr id="6" name="Rectangle 5"/>
+          <p:cNvSpPr/>
+          <p:nvPr/>
+        </p:nvSpPr>
+        <p:spPr>
+          <a:xfrm>
+            <a:off x="0" y="1078992"/>
+            <a:ext cx="12191695" cy="12700"/>
+          </a:xfrm>
+          <a:prstGeom prst="rect">
+            <a:avLst/>
+          </a:prstGeom>
+          <a:solidFill>
+            <a:srgbClr val="253350"/>
           </a:solidFill>
           <a:ln>
             <a:noFill/>
@@ -11099,20 +11371,20 @@
       </p:sp>
       <p:sp>
         <p:nvSpPr>
-          <p:cNvPr id="6" name="Rounded Rectangle 5"/>
-          <p:cNvSpPr/>
-          <p:nvPr/>
-        </p:nvSpPr>
-        <p:spPr>
-          <a:xfrm>
-            <a:off x="457200" y="1325880"/>
-            <a:ext cx="11247120" cy="731520"/>
+          <p:cNvPr id="7" name="Rounded Rectangle 6"/>
+          <p:cNvSpPr/>
+          <p:nvPr/>
+        </p:nvSpPr>
+        <p:spPr>
+          <a:xfrm>
+            <a:off x="457200" y="1280160"/>
+            <a:ext cx="11247120" cy="685800"/>
           </a:xfrm>
           <a:prstGeom prst="roundRect">
             <a:avLst/>
           </a:prstGeom>
           <a:solidFill>
-            <a:srgbClr val="141E33"/>
+            <a:srgbClr val="161F35"/>
           </a:solidFill>
           <a:ln>
             <a:noFill/>
@@ -11142,20 +11414,20 @@
       </p:sp>
       <p:sp>
         <p:nvSpPr>
-          <p:cNvPr id="7" name="Rectangle 6"/>
-          <p:cNvSpPr/>
-          <p:nvPr/>
-        </p:nvSpPr>
-        <p:spPr>
-          <a:xfrm>
-            <a:off x="457200" y="1325880"/>
-            <a:ext cx="73152" cy="731520"/>
-          </a:xfrm>
-          <a:prstGeom prst="rect">
-            <a:avLst/>
-          </a:prstGeom>
-          <a:solidFill>
-            <a:srgbClr val="7C3AED"/>
+          <p:cNvPr id="8" name="Rectangle 7"/>
+          <p:cNvSpPr/>
+          <p:nvPr/>
+        </p:nvSpPr>
+        <p:spPr>
+          <a:xfrm>
+            <a:off x="457200" y="1280160"/>
+            <a:ext cx="54864" cy="685800"/>
+          </a:xfrm>
+          <a:prstGeom prst="rect">
+            <a:avLst/>
+          </a:prstGeom>
+          <a:solidFill>
+            <a:srgbClr val="8B5CF6"/>
           </a:solidFill>
           <a:ln>
             <a:noFill/>
@@ -11185,20 +11457,20 @@
       </p:sp>
       <p:sp>
         <p:nvSpPr>
-          <p:cNvPr id="8" name="Oval 7"/>
-          <p:cNvSpPr/>
-          <p:nvPr/>
-        </p:nvSpPr>
-        <p:spPr>
-          <a:xfrm>
-            <a:off x="731520" y="1490472"/>
-            <a:ext cx="365760" cy="365760"/>
+          <p:cNvPr id="9" name="Oval 8"/>
+          <p:cNvSpPr/>
+          <p:nvPr/>
+        </p:nvSpPr>
+        <p:spPr>
+          <a:xfrm>
+            <a:off x="685800" y="1463040"/>
+            <a:ext cx="320040" cy="320040"/>
           </a:xfrm>
           <a:prstGeom prst="ellipse">
             <a:avLst/>
           </a:prstGeom>
           <a:solidFill>
-            <a:srgbClr val="7C3AED"/>
+            <a:srgbClr val="8B5CF6"/>
           </a:solidFill>
           <a:ln>
             <a:noFill/>
@@ -11228,14 +11500,14 @@
       </p:sp>
       <p:sp>
         <p:nvSpPr>
-          <p:cNvPr id="9" name="TextBox 8"/>
+          <p:cNvPr id="10" name="TextBox 9"/>
           <p:cNvSpPr txBox="1"/>
           <p:nvPr/>
         </p:nvSpPr>
         <p:spPr>
           <a:xfrm>
-            <a:off x="731520" y="1490472"/>
-            <a:ext cx="365760" cy="365760"/>
+            <a:off x="685800" y="1463040"/>
+            <a:ext cx="320040" cy="320040"/>
           </a:xfrm>
           <a:prstGeom prst="rect">
             <a:avLst/>
@@ -11249,9 +11521,9 @@
           <a:lstStyle/>
           <a:p>
             <a:pPr algn="ctr">
-              <a:defRPr sz="1100" b="1">
+              <a:defRPr sz="1000" b="1">
                 <a:solidFill>
-                  <a:srgbClr val="FFFFFF"/>
+                  <a:srgbClr val="F0F4FC"/>
                 </a:solidFill>
                 <a:latin typeface="Microsoft YaHei"/>
               </a:defRPr>
@@ -11264,14 +11536,14 @@
       </p:sp>
       <p:sp>
         <p:nvSpPr>
-          <p:cNvPr id="10" name="TextBox 9"/>
+          <p:cNvPr id="11" name="TextBox 10"/>
           <p:cNvSpPr txBox="1"/>
           <p:nvPr/>
         </p:nvSpPr>
         <p:spPr>
           <a:xfrm>
-            <a:off x="1280160" y="1417320"/>
-            <a:ext cx="10058400" cy="548640"/>
+            <a:off x="1188720" y="1440180"/>
+            <a:ext cx="10058400" cy="365760"/>
           </a:xfrm>
           <a:prstGeom prst="rect">
             <a:avLst/>
@@ -11285,9 +11557,9 @@
           <a:lstStyle/>
           <a:p>
             <a:pPr algn="l">
-              <a:defRPr sz="1500" b="0">
+              <a:defRPr sz="1400" b="0">
                 <a:solidFill>
-                  <a:srgbClr val="CBD5E8"/>
+                  <a:srgbClr val="A0AEC4"/>
                 </a:solidFill>
                 <a:latin typeface="Microsoft YaHei"/>
               </a:defRPr>
@@ -11300,20 +11572,20 @@
       </p:sp>
       <p:sp>
         <p:nvSpPr>
-          <p:cNvPr id="11" name="Rounded Rectangle 10"/>
-          <p:cNvSpPr/>
-          <p:nvPr/>
-        </p:nvSpPr>
-        <p:spPr>
-          <a:xfrm>
-            <a:off x="457200" y="2194560"/>
-            <a:ext cx="11247120" cy="731520"/>
+          <p:cNvPr id="12" name="Rounded Rectangle 11"/>
+          <p:cNvSpPr/>
+          <p:nvPr/>
+        </p:nvSpPr>
+        <p:spPr>
+          <a:xfrm>
+            <a:off x="457200" y="2297430"/>
+            <a:ext cx="11247120" cy="685800"/>
           </a:xfrm>
           <a:prstGeom prst="roundRect">
             <a:avLst/>
           </a:prstGeom>
           <a:solidFill>
-            <a:srgbClr val="141E33"/>
+            <a:srgbClr val="161F35"/>
           </a:solidFill>
           <a:ln>
             <a:noFill/>
@@ -11343,20 +11615,20 @@
       </p:sp>
       <p:sp>
         <p:nvSpPr>
-          <p:cNvPr id="12" name="Rectangle 11"/>
-          <p:cNvSpPr/>
-          <p:nvPr/>
-        </p:nvSpPr>
-        <p:spPr>
-          <a:xfrm>
-            <a:off x="457200" y="2194560"/>
-            <a:ext cx="73152" cy="731520"/>
-          </a:xfrm>
-          <a:prstGeom prst="rect">
-            <a:avLst/>
-          </a:prstGeom>
-          <a:solidFill>
-            <a:srgbClr val="7C3AED"/>
+          <p:cNvPr id="13" name="Rectangle 12"/>
+          <p:cNvSpPr/>
+          <p:nvPr/>
+        </p:nvSpPr>
+        <p:spPr>
+          <a:xfrm>
+            <a:off x="457200" y="2297430"/>
+            <a:ext cx="54864" cy="685800"/>
+          </a:xfrm>
+          <a:prstGeom prst="rect">
+            <a:avLst/>
+          </a:prstGeom>
+          <a:solidFill>
+            <a:srgbClr val="8B5CF6"/>
           </a:solidFill>
           <a:ln>
             <a:noFill/>
@@ -11386,20 +11658,20 @@
       </p:sp>
       <p:sp>
         <p:nvSpPr>
-          <p:cNvPr id="13" name="Oval 12"/>
-          <p:cNvSpPr/>
-          <p:nvPr/>
-        </p:nvSpPr>
-        <p:spPr>
-          <a:xfrm>
-            <a:off x="731520" y="2359152"/>
-            <a:ext cx="365760" cy="365760"/>
+          <p:cNvPr id="14" name="Oval 13"/>
+          <p:cNvSpPr/>
+          <p:nvPr/>
+        </p:nvSpPr>
+        <p:spPr>
+          <a:xfrm>
+            <a:off x="685800" y="2480310"/>
+            <a:ext cx="320040" cy="320040"/>
           </a:xfrm>
           <a:prstGeom prst="ellipse">
             <a:avLst/>
           </a:prstGeom>
           <a:solidFill>
-            <a:srgbClr val="7C3AED"/>
+            <a:srgbClr val="8B5CF6"/>
           </a:solidFill>
           <a:ln>
             <a:noFill/>
@@ -11429,14 +11701,14 @@
       </p:sp>
       <p:sp>
         <p:nvSpPr>
-          <p:cNvPr id="14" name="TextBox 13"/>
+          <p:cNvPr id="15" name="TextBox 14"/>
           <p:cNvSpPr txBox="1"/>
           <p:nvPr/>
         </p:nvSpPr>
         <p:spPr>
           <a:xfrm>
-            <a:off x="731520" y="2359152"/>
-            <a:ext cx="365760" cy="365760"/>
+            <a:off x="685800" y="2480310"/>
+            <a:ext cx="320040" cy="320040"/>
           </a:xfrm>
           <a:prstGeom prst="rect">
             <a:avLst/>
@@ -11450,9 +11722,9 @@
           <a:lstStyle/>
           <a:p>
             <a:pPr algn="ctr">
-              <a:defRPr sz="1100" b="1">
+              <a:defRPr sz="1000" b="1">
                 <a:solidFill>
-                  <a:srgbClr val="FFFFFF"/>
+                  <a:srgbClr val="F0F4FC"/>
                 </a:solidFill>
                 <a:latin typeface="Microsoft YaHei"/>
               </a:defRPr>
@@ -11465,14 +11737,14 @@
       </p:sp>
       <p:sp>
         <p:nvSpPr>
-          <p:cNvPr id="15" name="TextBox 14"/>
+          <p:cNvPr id="16" name="TextBox 15"/>
           <p:cNvSpPr txBox="1"/>
           <p:nvPr/>
         </p:nvSpPr>
         <p:spPr>
           <a:xfrm>
-            <a:off x="1280160" y="2286000"/>
-            <a:ext cx="10058400" cy="548640"/>
+            <a:off x="1188720" y="2457450"/>
+            <a:ext cx="10058400" cy="365760"/>
           </a:xfrm>
           <a:prstGeom prst="rect">
             <a:avLst/>
@@ -11486,9 +11758,9 @@
           <a:lstStyle/>
           <a:p>
             <a:pPr algn="l">
-              <a:defRPr sz="1500" b="0">
+              <a:defRPr sz="1400" b="0">
                 <a:solidFill>
-                  <a:srgbClr val="CBD5E8"/>
+                  <a:srgbClr val="A0AEC4"/>
                 </a:solidFill>
                 <a:latin typeface="Microsoft YaHei"/>
               </a:defRPr>
@@ -11501,20 +11773,20 @@
       </p:sp>
       <p:sp>
         <p:nvSpPr>
-          <p:cNvPr id="16" name="Rounded Rectangle 15"/>
-          <p:cNvSpPr/>
-          <p:nvPr/>
-        </p:nvSpPr>
-        <p:spPr>
-          <a:xfrm>
-            <a:off x="457200" y="3063240"/>
-            <a:ext cx="11247120" cy="731520"/>
+          <p:cNvPr id="17" name="Rounded Rectangle 16"/>
+          <p:cNvSpPr/>
+          <p:nvPr/>
+        </p:nvSpPr>
+        <p:spPr>
+          <a:xfrm>
+            <a:off x="457200" y="3314700"/>
+            <a:ext cx="11247120" cy="685800"/>
           </a:xfrm>
           <a:prstGeom prst="roundRect">
             <a:avLst/>
           </a:prstGeom>
           <a:solidFill>
-            <a:srgbClr val="141E33"/>
+            <a:srgbClr val="161F35"/>
           </a:solidFill>
           <a:ln>
             <a:noFill/>
@@ -11544,20 +11816,20 @@
       </p:sp>
       <p:sp>
         <p:nvSpPr>
-          <p:cNvPr id="17" name="Rectangle 16"/>
-          <p:cNvSpPr/>
-          <p:nvPr/>
-        </p:nvSpPr>
-        <p:spPr>
-          <a:xfrm>
-            <a:off x="457200" y="3063240"/>
-            <a:ext cx="73152" cy="731520"/>
-          </a:xfrm>
-          <a:prstGeom prst="rect">
-            <a:avLst/>
-          </a:prstGeom>
-          <a:solidFill>
-            <a:srgbClr val="7C3AED"/>
+          <p:cNvPr id="18" name="Rectangle 17"/>
+          <p:cNvSpPr/>
+          <p:nvPr/>
+        </p:nvSpPr>
+        <p:spPr>
+          <a:xfrm>
+            <a:off x="457200" y="3314700"/>
+            <a:ext cx="54864" cy="685800"/>
+          </a:xfrm>
+          <a:prstGeom prst="rect">
+            <a:avLst/>
+          </a:prstGeom>
+          <a:solidFill>
+            <a:srgbClr val="8B5CF6"/>
           </a:solidFill>
           <a:ln>
             <a:noFill/>
@@ -11587,20 +11859,20 @@
       </p:sp>
       <p:sp>
         <p:nvSpPr>
-          <p:cNvPr id="18" name="Oval 17"/>
-          <p:cNvSpPr/>
-          <p:nvPr/>
-        </p:nvSpPr>
-        <p:spPr>
-          <a:xfrm>
-            <a:off x="731520" y="3227832"/>
-            <a:ext cx="365760" cy="365760"/>
+          <p:cNvPr id="19" name="Oval 18"/>
+          <p:cNvSpPr/>
+          <p:nvPr/>
+        </p:nvSpPr>
+        <p:spPr>
+          <a:xfrm>
+            <a:off x="685800" y="3497580"/>
+            <a:ext cx="320040" cy="320040"/>
           </a:xfrm>
           <a:prstGeom prst="ellipse">
             <a:avLst/>
           </a:prstGeom>
           <a:solidFill>
-            <a:srgbClr val="7C3AED"/>
+            <a:srgbClr val="8B5CF6"/>
           </a:solidFill>
           <a:ln>
             <a:noFill/>
@@ -11630,14 +11902,14 @@
       </p:sp>
       <p:sp>
         <p:nvSpPr>
-          <p:cNvPr id="19" name="TextBox 18"/>
+          <p:cNvPr id="20" name="TextBox 19"/>
           <p:cNvSpPr txBox="1"/>
           <p:nvPr/>
         </p:nvSpPr>
         <p:spPr>
           <a:xfrm>
-            <a:off x="731520" y="3227832"/>
-            <a:ext cx="365760" cy="365760"/>
+            <a:off x="685800" y="3497580"/>
+            <a:ext cx="320040" cy="320040"/>
           </a:xfrm>
           <a:prstGeom prst="rect">
             <a:avLst/>
@@ -11651,9 +11923,9 @@
           <a:lstStyle/>
           <a:p>
             <a:pPr algn="ctr">
-              <a:defRPr sz="1100" b="1">
+              <a:defRPr sz="1000" b="1">
                 <a:solidFill>
-                  <a:srgbClr val="FFFFFF"/>
+                  <a:srgbClr val="F0F4FC"/>
                 </a:solidFill>
                 <a:latin typeface="Microsoft YaHei"/>
               </a:defRPr>
@@ -11666,14 +11938,14 @@
       </p:sp>
       <p:sp>
         <p:nvSpPr>
-          <p:cNvPr id="20" name="TextBox 19"/>
+          <p:cNvPr id="21" name="TextBox 20"/>
           <p:cNvSpPr txBox="1"/>
           <p:nvPr/>
         </p:nvSpPr>
         <p:spPr>
           <a:xfrm>
-            <a:off x="1280160" y="3154680"/>
-            <a:ext cx="10058400" cy="548640"/>
+            <a:off x="1188720" y="3474720"/>
+            <a:ext cx="10058400" cy="365760"/>
           </a:xfrm>
           <a:prstGeom prst="rect">
             <a:avLst/>
@@ -11687,9 +11959,9 @@
           <a:lstStyle/>
           <a:p>
             <a:pPr algn="l">
-              <a:defRPr sz="1500" b="0">
+              <a:defRPr sz="1400" b="0">
                 <a:solidFill>
-                  <a:srgbClr val="CBD5E8"/>
+                  <a:srgbClr val="A0AEC4"/>
                 </a:solidFill>
                 <a:latin typeface="Microsoft YaHei"/>
               </a:defRPr>
@@ -11702,20 +11974,20 @@
       </p:sp>
       <p:sp>
         <p:nvSpPr>
-          <p:cNvPr id="21" name="Rounded Rectangle 20"/>
-          <p:cNvSpPr/>
-          <p:nvPr/>
-        </p:nvSpPr>
-        <p:spPr>
-          <a:xfrm>
-            <a:off x="457200" y="3931919"/>
-            <a:ext cx="11247120" cy="731520"/>
+          <p:cNvPr id="22" name="Rounded Rectangle 21"/>
+          <p:cNvSpPr/>
+          <p:nvPr/>
+        </p:nvSpPr>
+        <p:spPr>
+          <a:xfrm>
+            <a:off x="457200" y="4331970"/>
+            <a:ext cx="11247120" cy="685800"/>
           </a:xfrm>
           <a:prstGeom prst="roundRect">
             <a:avLst/>
           </a:prstGeom>
           <a:solidFill>
-            <a:srgbClr val="141E33"/>
+            <a:srgbClr val="161F35"/>
           </a:solidFill>
           <a:ln>
             <a:noFill/>
@@ -11745,20 +12017,20 @@
       </p:sp>
       <p:sp>
         <p:nvSpPr>
-          <p:cNvPr id="22" name="Rectangle 21"/>
-          <p:cNvSpPr/>
-          <p:nvPr/>
-        </p:nvSpPr>
-        <p:spPr>
-          <a:xfrm>
-            <a:off x="457200" y="3931919"/>
-            <a:ext cx="73152" cy="731520"/>
-          </a:xfrm>
-          <a:prstGeom prst="rect">
-            <a:avLst/>
-          </a:prstGeom>
-          <a:solidFill>
-            <a:srgbClr val="7C3AED"/>
+          <p:cNvPr id="23" name="Rectangle 22"/>
+          <p:cNvSpPr/>
+          <p:nvPr/>
+        </p:nvSpPr>
+        <p:spPr>
+          <a:xfrm>
+            <a:off x="457200" y="4331970"/>
+            <a:ext cx="54864" cy="685800"/>
+          </a:xfrm>
+          <a:prstGeom prst="rect">
+            <a:avLst/>
+          </a:prstGeom>
+          <a:solidFill>
+            <a:srgbClr val="8B5CF6"/>
           </a:solidFill>
           <a:ln>
             <a:noFill/>
@@ -11788,20 +12060,20 @@
       </p:sp>
       <p:sp>
         <p:nvSpPr>
-          <p:cNvPr id="23" name="Oval 22"/>
-          <p:cNvSpPr/>
-          <p:nvPr/>
-        </p:nvSpPr>
-        <p:spPr>
-          <a:xfrm>
-            <a:off x="731520" y="4096511"/>
-            <a:ext cx="365760" cy="365760"/>
+          <p:cNvPr id="24" name="Oval 23"/>
+          <p:cNvSpPr/>
+          <p:nvPr/>
+        </p:nvSpPr>
+        <p:spPr>
+          <a:xfrm>
+            <a:off x="685800" y="4514850"/>
+            <a:ext cx="320040" cy="320040"/>
           </a:xfrm>
           <a:prstGeom prst="ellipse">
             <a:avLst/>
           </a:prstGeom>
           <a:solidFill>
-            <a:srgbClr val="7C3AED"/>
+            <a:srgbClr val="8B5CF6"/>
           </a:solidFill>
           <a:ln>
             <a:noFill/>
@@ -11831,14 +12103,14 @@
       </p:sp>
       <p:sp>
         <p:nvSpPr>
-          <p:cNvPr id="24" name="TextBox 23"/>
+          <p:cNvPr id="25" name="TextBox 24"/>
           <p:cNvSpPr txBox="1"/>
           <p:nvPr/>
         </p:nvSpPr>
         <p:spPr>
           <a:xfrm>
-            <a:off x="731520" y="4096511"/>
-            <a:ext cx="365760" cy="365760"/>
+            <a:off x="685800" y="4514850"/>
+            <a:ext cx="320040" cy="320040"/>
           </a:xfrm>
           <a:prstGeom prst="rect">
             <a:avLst/>
@@ -11852,9 +12124,9 @@
           <a:lstStyle/>
           <a:p>
             <a:pPr algn="ctr">
-              <a:defRPr sz="1100" b="1">
+              <a:defRPr sz="1000" b="1">
                 <a:solidFill>
-                  <a:srgbClr val="FFFFFF"/>
+                  <a:srgbClr val="F0F4FC"/>
                 </a:solidFill>
                 <a:latin typeface="Microsoft YaHei"/>
               </a:defRPr>
@@ -11867,14 +12139,14 @@
       </p:sp>
       <p:sp>
         <p:nvSpPr>
-          <p:cNvPr id="25" name="TextBox 24"/>
+          <p:cNvPr id="26" name="TextBox 25"/>
           <p:cNvSpPr txBox="1"/>
           <p:nvPr/>
         </p:nvSpPr>
         <p:spPr>
           <a:xfrm>
-            <a:off x="1280160" y="4023359"/>
-            <a:ext cx="10058400" cy="548640"/>
+            <a:off x="1188720" y="4491990"/>
+            <a:ext cx="10058400" cy="365760"/>
           </a:xfrm>
           <a:prstGeom prst="rect">
             <a:avLst/>
@@ -11888,9 +12160,9 @@
           <a:lstStyle/>
           <a:p>
             <a:pPr algn="l">
-              <a:defRPr sz="1500" b="0">
+              <a:defRPr sz="1400" b="0">
                 <a:solidFill>
-                  <a:srgbClr val="CBD5E8"/>
+                  <a:srgbClr val="A0AEC4"/>
                 </a:solidFill>
                 <a:latin typeface="Microsoft YaHei"/>
               </a:defRPr>
@@ -11903,20 +12175,20 @@
       </p:sp>
       <p:sp>
         <p:nvSpPr>
-          <p:cNvPr id="26" name="Rounded Rectangle 25"/>
-          <p:cNvSpPr/>
-          <p:nvPr/>
-        </p:nvSpPr>
-        <p:spPr>
-          <a:xfrm>
-            <a:off x="457200" y="4800600"/>
-            <a:ext cx="11247120" cy="731520"/>
+          <p:cNvPr id="27" name="Rounded Rectangle 26"/>
+          <p:cNvSpPr/>
+          <p:nvPr/>
+        </p:nvSpPr>
+        <p:spPr>
+          <a:xfrm>
+            <a:off x="457200" y="5349240"/>
+            <a:ext cx="11247120" cy="685800"/>
           </a:xfrm>
           <a:prstGeom prst="roundRect">
             <a:avLst/>
           </a:prstGeom>
           <a:solidFill>
-            <a:srgbClr val="141E33"/>
+            <a:srgbClr val="161F35"/>
           </a:solidFill>
           <a:ln>
             <a:noFill/>
@@ -11946,20 +12218,20 @@
       </p:sp>
       <p:sp>
         <p:nvSpPr>
-          <p:cNvPr id="27" name="Rectangle 26"/>
-          <p:cNvSpPr/>
-          <p:nvPr/>
-        </p:nvSpPr>
-        <p:spPr>
-          <a:xfrm>
-            <a:off x="457200" y="4800600"/>
-            <a:ext cx="73152" cy="731520"/>
-          </a:xfrm>
-          <a:prstGeom prst="rect">
-            <a:avLst/>
-          </a:prstGeom>
-          <a:solidFill>
-            <a:srgbClr val="7C3AED"/>
+          <p:cNvPr id="28" name="Rectangle 27"/>
+          <p:cNvSpPr/>
+          <p:nvPr/>
+        </p:nvSpPr>
+        <p:spPr>
+          <a:xfrm>
+            <a:off x="457200" y="5349240"/>
+            <a:ext cx="54864" cy="685800"/>
+          </a:xfrm>
+          <a:prstGeom prst="rect">
+            <a:avLst/>
+          </a:prstGeom>
+          <a:solidFill>
+            <a:srgbClr val="8B5CF6"/>
           </a:solidFill>
           <a:ln>
             <a:noFill/>
@@ -11989,20 +12261,20 @@
       </p:sp>
       <p:sp>
         <p:nvSpPr>
-          <p:cNvPr id="28" name="Oval 27"/>
-          <p:cNvSpPr/>
-          <p:nvPr/>
-        </p:nvSpPr>
-        <p:spPr>
-          <a:xfrm>
-            <a:off x="731520" y="4965192"/>
-            <a:ext cx="365760" cy="365760"/>
+          <p:cNvPr id="29" name="Oval 28"/>
+          <p:cNvSpPr/>
+          <p:nvPr/>
+        </p:nvSpPr>
+        <p:spPr>
+          <a:xfrm>
+            <a:off x="685800" y="5532120"/>
+            <a:ext cx="320040" cy="320040"/>
           </a:xfrm>
           <a:prstGeom prst="ellipse">
             <a:avLst/>
           </a:prstGeom>
           <a:solidFill>
-            <a:srgbClr val="7C3AED"/>
+            <a:srgbClr val="8B5CF6"/>
           </a:solidFill>
           <a:ln>
             <a:noFill/>
@@ -12032,14 +12304,14 @@
       </p:sp>
       <p:sp>
         <p:nvSpPr>
-          <p:cNvPr id="29" name="TextBox 28"/>
+          <p:cNvPr id="30" name="TextBox 29"/>
           <p:cNvSpPr txBox="1"/>
           <p:nvPr/>
         </p:nvSpPr>
         <p:spPr>
           <a:xfrm>
-            <a:off x="731520" y="4965192"/>
-            <a:ext cx="365760" cy="365760"/>
+            <a:off x="685800" y="5532120"/>
+            <a:ext cx="320040" cy="320040"/>
           </a:xfrm>
           <a:prstGeom prst="rect">
             <a:avLst/>
@@ -12053,9 +12325,9 @@
           <a:lstStyle/>
           <a:p>
             <a:pPr algn="ctr">
-              <a:defRPr sz="1100" b="1">
+              <a:defRPr sz="1000" b="1">
                 <a:solidFill>
-                  <a:srgbClr val="FFFFFF"/>
+                  <a:srgbClr val="F0F4FC"/>
                 </a:solidFill>
                 <a:latin typeface="Microsoft YaHei"/>
               </a:defRPr>
@@ -12068,14 +12340,14 @@
       </p:sp>
       <p:sp>
         <p:nvSpPr>
-          <p:cNvPr id="30" name="TextBox 29"/>
+          <p:cNvPr id="31" name="TextBox 30"/>
           <p:cNvSpPr txBox="1"/>
           <p:nvPr/>
         </p:nvSpPr>
         <p:spPr>
           <a:xfrm>
-            <a:off x="1280160" y="4892040"/>
-            <a:ext cx="10058400" cy="548640"/>
+            <a:off x="1188720" y="5509260"/>
+            <a:ext cx="10058400" cy="365760"/>
           </a:xfrm>
           <a:prstGeom prst="rect">
             <a:avLst/>
@@ -12089,9 +12361,9 @@
           <a:lstStyle/>
           <a:p>
             <a:pPr algn="l">
-              <a:defRPr sz="1500" b="0">
+              <a:defRPr sz="1400" b="0">
                 <a:solidFill>
-                  <a:srgbClr val="CBD5E8"/>
+                  <a:srgbClr val="A0AEC4"/>
                 </a:solidFill>
                 <a:latin typeface="Microsoft YaHei"/>
               </a:defRPr>
@@ -12104,20 +12376,20 @@
       </p:sp>
       <p:sp>
         <p:nvSpPr>
-          <p:cNvPr id="31" name="Rectangle 30"/>
+          <p:cNvPr id="32" name="Rectangle 31"/>
           <p:cNvSpPr/>
           <p:nvPr/>
         </p:nvSpPr>
         <p:spPr>
           <a:xfrm>
             <a:off x="0" y="6446520"/>
-            <a:ext cx="12191695" cy="19050"/>
-          </a:xfrm>
-          <a:prstGeom prst="rect">
-            <a:avLst/>
-          </a:prstGeom>
-          <a:solidFill>
-            <a:srgbClr val="2D3B55"/>
+            <a:ext cx="12191695" cy="12700"/>
+          </a:xfrm>
+          <a:prstGeom prst="rect">
+            <a:avLst/>
+          </a:prstGeom>
+          <a:solidFill>
+            <a:srgbClr val="253350"/>
           </a:solidFill>
           <a:ln>
             <a:noFill/>
@@ -12147,14 +12419,14 @@
       </p:sp>
       <p:sp>
         <p:nvSpPr>
-          <p:cNvPr id="32" name="TextBox 31"/>
+          <p:cNvPr id="33" name="TextBox 32"/>
           <p:cNvSpPr txBox="1"/>
           <p:nvPr/>
         </p:nvSpPr>
         <p:spPr>
           <a:xfrm>
-            <a:off x="457200" y="6492240"/>
-            <a:ext cx="5486400" cy="274320"/>
+            <a:off x="731520" y="6492240"/>
+            <a:ext cx="4572000" cy="274320"/>
           </a:xfrm>
           <a:prstGeom prst="rect">
             <a:avLst/>
@@ -12170,20 +12442,20 @@
             <a:pPr algn="l">
               <a:defRPr sz="900" b="0">
                 <a:solidFill>
-                  <a:srgbClr val="6B7B9E"/>
+                  <a:srgbClr val="607090"/>
                 </a:solidFill>
                 <a:latin typeface="Microsoft YaHei"/>
               </a:defRPr>
             </a:pPr>
             <a:r>
-              <a:t>模块07：Seedance 2.0深度精通</a:t>
-            </a:r>
-          </a:p>
-        </p:txBody>
-      </p:sp>
-      <p:sp>
-        <p:nvSpPr>
-          <p:cNvPr id="33" name="TextBox 32"/>
+              <a:t>模块07 · Seedance 2.0深度精通</a:t>
+            </a:r>
+          </a:p>
+        </p:txBody>
+      </p:sp>
+      <p:sp>
+        <p:nvSpPr>
+          <p:cNvPr id="34" name="TextBox 33"/>
           <p:cNvSpPr txBox="1"/>
           <p:nvPr/>
         </p:nvSpPr>
@@ -12206,7 +12478,7 @@
             <a:pPr algn="r">
               <a:defRPr sz="900" b="0">
                 <a:solidFill>
-                  <a:srgbClr val="6B7B9E"/>
+                  <a:srgbClr val="607090"/>
                 </a:solidFill>
                 <a:latin typeface="Microsoft YaHei"/>
               </a:defRPr>
@@ -12231,7 +12503,7 @@
     <p:bg>
       <p:bgPr>
         <a:solidFill>
-          <a:srgbClr val="0B1120"/>
+          <a:srgbClr val="0A0E1A"/>
         </a:solidFill>
         <a:effectLst/>
       </p:bgPr>
@@ -12252,13 +12524,13 @@
         <p:spPr>
           <a:xfrm>
             <a:off x="0" y="0"/>
-            <a:ext cx="12191695" cy="1051560"/>
-          </a:xfrm>
-          <a:prstGeom prst="rect">
-            <a:avLst/>
-          </a:prstGeom>
-          <a:solidFill>
-            <a:srgbClr val="141E33"/>
+            <a:ext cx="12191695" cy="38100"/>
+          </a:xfrm>
+          <a:prstGeom prst="rect">
+            <a:avLst/>
+          </a:prstGeom>
+          <a:solidFill>
+            <a:srgbClr val="8B5CF6"/>
           </a:solidFill>
           <a:ln>
             <a:noFill/>
@@ -12294,14 +12566,14 @@
         </p:nvSpPr>
         <p:spPr>
           <a:xfrm>
-            <a:off x="0" y="0"/>
-            <a:ext cx="109728" cy="1051560"/>
-          </a:xfrm>
-          <a:prstGeom prst="rect">
-            <a:avLst/>
-          </a:prstGeom>
-          <a:solidFill>
-            <a:srgbClr val="7C3AED"/>
+            <a:off x="0" y="38100"/>
+            <a:ext cx="12191695" cy="914400"/>
+          </a:xfrm>
+          <a:prstGeom prst="rect">
+            <a:avLst/>
+          </a:prstGeom>
+          <a:solidFill>
+            <a:srgbClr val="161F35"/>
           </a:solidFill>
           <a:ln>
             <a:noFill/>
@@ -12331,14 +12603,57 @@
       </p:sp>
       <p:sp>
         <p:nvSpPr>
-          <p:cNvPr id="4" name="TextBox 3"/>
+          <p:cNvPr id="4" name="Rectangle 3"/>
+          <p:cNvSpPr/>
+          <p:nvPr/>
+        </p:nvSpPr>
+        <p:spPr>
+          <a:xfrm>
+            <a:off x="0" y="38100"/>
+            <a:ext cx="91440" cy="914400"/>
+          </a:xfrm>
+          <a:prstGeom prst="rect">
+            <a:avLst/>
+          </a:prstGeom>
+          <a:solidFill>
+            <a:srgbClr val="8B5CF6"/>
+          </a:solidFill>
+          <a:ln>
+            <a:noFill/>
+          </a:ln>
+        </p:spPr>
+        <p:style>
+          <a:lnRef idx="1">
+            <a:schemeClr val="accent1"/>
+          </a:lnRef>
+          <a:fillRef idx="3">
+            <a:schemeClr val="accent1"/>
+          </a:fillRef>
+          <a:effectRef idx="2">
+            <a:schemeClr val="accent1"/>
+          </a:effectRef>
+          <a:fontRef idx="minor">
+            <a:schemeClr val="lt1"/>
+          </a:fontRef>
+        </p:style>
+        <p:txBody>
+          <a:bodyPr rtlCol="0" anchor="ctr"/>
+          <a:lstStyle/>
+          <a:p>
+            <a:pPr algn="ctr"/>
+          </a:p>
+        </p:txBody>
+      </p:sp>
+      <p:sp>
+        <p:nvSpPr>
+          <p:cNvPr id="5" name="TextBox 4"/>
           <p:cNvSpPr txBox="1"/>
           <p:nvPr/>
         </p:nvSpPr>
         <p:spPr>
           <a:xfrm>
-            <a:off x="548640" y="182880"/>
-            <a:ext cx="10058400" cy="640080"/>
+            <a:off x="731520" y="137160"/>
+            <a:ext cx="10728655" cy="640080"/>
           </a:xfrm>
           <a:prstGeom prst="rect">
             <a:avLst/>
@@ -12352,9 +12667,9 @@
           <a:lstStyle/>
           <a:p>
             <a:pPr algn="l">
-              <a:defRPr sz="2600" b="1">
+              <a:defRPr sz="2400" b="1">
                 <a:solidFill>
-                  <a:srgbClr val="FFFFFF"/>
+                  <a:srgbClr val="F0F4FC"/>
                 </a:solidFill>
                 <a:latin typeface="Microsoft YaHei"/>
               </a:defRPr>
@@ -12367,20 +12682,20 @@
       </p:sp>
       <p:sp>
         <p:nvSpPr>
-          <p:cNvPr id="5" name="Rectangle 4"/>
-          <p:cNvSpPr/>
-          <p:nvPr/>
-        </p:nvSpPr>
-        <p:spPr>
-          <a:xfrm>
-            <a:off x="0" y="1051560"/>
-            <a:ext cx="12191695" cy="25400"/>
-          </a:xfrm>
-          <a:prstGeom prst="rect">
-            <a:avLst/>
-          </a:prstGeom>
-          <a:solidFill>
-            <a:srgbClr val="7C3AED"/>
+          <p:cNvPr id="6" name="Rectangle 5"/>
+          <p:cNvSpPr/>
+          <p:nvPr/>
+        </p:nvSpPr>
+        <p:spPr>
+          <a:xfrm>
+            <a:off x="0" y="1078992"/>
+            <a:ext cx="12191695" cy="12700"/>
+          </a:xfrm>
+          <a:prstGeom prst="rect">
+            <a:avLst/>
+          </a:prstGeom>
+          <a:solidFill>
+            <a:srgbClr val="253350"/>
           </a:solidFill>
           <a:ln>
             <a:noFill/>
@@ -12410,20 +12725,20 @@
       </p:sp>
       <p:sp>
         <p:nvSpPr>
-          <p:cNvPr id="6" name="Rounded Rectangle 5"/>
-          <p:cNvSpPr/>
-          <p:nvPr/>
-        </p:nvSpPr>
-        <p:spPr>
-          <a:xfrm>
-            <a:off x="457200" y="1371600"/>
-            <a:ext cx="11247120" cy="685800"/>
+          <p:cNvPr id="7" name="Rounded Rectangle 6"/>
+          <p:cNvSpPr/>
+          <p:nvPr/>
+        </p:nvSpPr>
+        <p:spPr>
+          <a:xfrm>
+            <a:off x="457200" y="1280160"/>
+            <a:ext cx="11247120" cy="658368"/>
           </a:xfrm>
           <a:prstGeom prst="roundRect">
             <a:avLst/>
           </a:prstGeom>
           <a:solidFill>
-            <a:srgbClr val="141E33"/>
+            <a:srgbClr val="161F35"/>
           </a:solidFill>
           <a:ln>
             <a:noFill/>
@@ -12453,20 +12768,20 @@
       </p:sp>
       <p:sp>
         <p:nvSpPr>
-          <p:cNvPr id="7" name="Rectangle 6"/>
-          <p:cNvSpPr/>
-          <p:nvPr/>
-        </p:nvSpPr>
-        <p:spPr>
-          <a:xfrm>
-            <a:off x="457200" y="1371600"/>
-            <a:ext cx="73152" cy="685800"/>
-          </a:xfrm>
-          <a:prstGeom prst="rect">
-            <a:avLst/>
-          </a:prstGeom>
-          <a:solidFill>
-            <a:srgbClr val="00D4FF"/>
+          <p:cNvPr id="8" name="Rectangle 7"/>
+          <p:cNvSpPr/>
+          <p:nvPr/>
+        </p:nvSpPr>
+        <p:spPr>
+          <a:xfrm>
+            <a:off x="457200" y="1280160"/>
+            <a:ext cx="54864" cy="658368"/>
+          </a:xfrm>
+          <a:prstGeom prst="rect">
+            <a:avLst/>
+          </a:prstGeom>
+          <a:solidFill>
+            <a:srgbClr val="00C8F0"/>
           </a:solidFill>
           <a:ln>
             <a:noFill/>
@@ -12496,20 +12811,20 @@
       </p:sp>
       <p:sp>
         <p:nvSpPr>
-          <p:cNvPr id="8" name="Oval 7"/>
-          <p:cNvSpPr/>
-          <p:nvPr/>
-        </p:nvSpPr>
-        <p:spPr>
-          <a:xfrm>
-            <a:off x="731520" y="1481328"/>
-            <a:ext cx="411480" cy="411480"/>
+          <p:cNvPr id="9" name="Oval 8"/>
+          <p:cNvSpPr/>
+          <p:nvPr/>
+        </p:nvSpPr>
+        <p:spPr>
+          <a:xfrm>
+            <a:off x="685800" y="1399032"/>
+            <a:ext cx="365760" cy="365760"/>
           </a:xfrm>
           <a:prstGeom prst="ellipse">
             <a:avLst/>
           </a:prstGeom>
           <a:solidFill>
-            <a:srgbClr val="00D4FF"/>
+            <a:srgbClr val="00C8F0"/>
           </a:solidFill>
           <a:ln>
             <a:noFill/>
@@ -12539,14 +12854,14 @@
       </p:sp>
       <p:sp>
         <p:nvSpPr>
-          <p:cNvPr id="9" name="TextBox 8"/>
+          <p:cNvPr id="10" name="TextBox 9"/>
           <p:cNvSpPr txBox="1"/>
           <p:nvPr/>
         </p:nvSpPr>
         <p:spPr>
           <a:xfrm>
-            <a:off x="731520" y="1481328"/>
-            <a:ext cx="411480" cy="411480"/>
+            <a:off x="685800" y="1399032"/>
+            <a:ext cx="365760" cy="365760"/>
           </a:xfrm>
           <a:prstGeom prst="rect">
             <a:avLst/>
@@ -12560,9 +12875,9 @@
           <a:lstStyle/>
           <a:p>
             <a:pPr algn="ctr">
-              <a:defRPr sz="1300" b="1">
+              <a:defRPr sz="1200" b="1">
                 <a:solidFill>
-                  <a:srgbClr val="FFFFFF"/>
+                  <a:srgbClr val="F0F4FC"/>
                 </a:solidFill>
                 <a:latin typeface="Microsoft YaHei"/>
               </a:defRPr>
@@ -12575,14 +12890,14 @@
       </p:sp>
       <p:sp>
         <p:nvSpPr>
-          <p:cNvPr id="10" name="TextBox 9"/>
+          <p:cNvPr id="11" name="TextBox 10"/>
           <p:cNvSpPr txBox="1"/>
           <p:nvPr/>
         </p:nvSpPr>
         <p:spPr>
           <a:xfrm>
-            <a:off x="1371600" y="1463040"/>
-            <a:ext cx="10058400" cy="502920"/>
+            <a:off x="1234440" y="1371600"/>
+            <a:ext cx="10058400" cy="457200"/>
           </a:xfrm>
           <a:prstGeom prst="rect">
             <a:avLst/>
@@ -12596,9 +12911,9 @@
           <a:lstStyle/>
           <a:p>
             <a:pPr algn="l">
-              <a:defRPr sz="1500" b="0">
+              <a:defRPr sz="1400" b="0">
                 <a:solidFill>
-                  <a:srgbClr val="CBD5E8"/>
+                  <a:srgbClr val="A0AEC4"/>
                 </a:solidFill>
                 <a:latin typeface="Microsoft YaHei"/>
               </a:defRPr>
@@ -12611,20 +12926,20 @@
       </p:sp>
       <p:sp>
         <p:nvSpPr>
-          <p:cNvPr id="11" name="Rectangle 10"/>
-          <p:cNvSpPr/>
-          <p:nvPr/>
-        </p:nvSpPr>
-        <p:spPr>
-          <a:xfrm>
-            <a:off x="914400" y="2057400"/>
-            <a:ext cx="25400" cy="137160"/>
-          </a:xfrm>
-          <a:prstGeom prst="rect">
-            <a:avLst/>
-          </a:prstGeom>
-          <a:solidFill>
-            <a:srgbClr val="00D4FF"/>
+          <p:cNvPr id="12" name="Rectangle 11"/>
+          <p:cNvSpPr/>
+          <p:nvPr/>
+        </p:nvSpPr>
+        <p:spPr>
+          <a:xfrm>
+            <a:off x="850392" y="1938528"/>
+            <a:ext cx="19050" cy="146304"/>
+          </a:xfrm>
+          <a:prstGeom prst="rect">
+            <a:avLst/>
+          </a:prstGeom>
+          <a:solidFill>
+            <a:srgbClr val="00C8F0"/>
           </a:solidFill>
           <a:ln>
             <a:noFill/>
@@ -12654,20 +12969,20 @@
       </p:sp>
       <p:sp>
         <p:nvSpPr>
-          <p:cNvPr id="12" name="Rounded Rectangle 11"/>
-          <p:cNvSpPr/>
-          <p:nvPr/>
-        </p:nvSpPr>
-        <p:spPr>
-          <a:xfrm>
-            <a:off x="457200" y="2194560"/>
-            <a:ext cx="11247120" cy="685800"/>
+          <p:cNvPr id="13" name="Rounded Rectangle 12"/>
+          <p:cNvSpPr/>
+          <p:nvPr/>
+        </p:nvSpPr>
+        <p:spPr>
+          <a:xfrm>
+            <a:off x="457200" y="2084832"/>
+            <a:ext cx="11247120" cy="658368"/>
           </a:xfrm>
           <a:prstGeom prst="roundRect">
             <a:avLst/>
           </a:prstGeom>
           <a:solidFill>
-            <a:srgbClr val="141E33"/>
+            <a:srgbClr val="161F35"/>
           </a:solidFill>
           <a:ln>
             <a:noFill/>
@@ -12697,20 +13012,20 @@
       </p:sp>
       <p:sp>
         <p:nvSpPr>
-          <p:cNvPr id="13" name="Rectangle 12"/>
-          <p:cNvSpPr/>
-          <p:nvPr/>
-        </p:nvSpPr>
-        <p:spPr>
-          <a:xfrm>
-            <a:off x="457200" y="2194560"/>
-            <a:ext cx="73152" cy="685800"/>
-          </a:xfrm>
-          <a:prstGeom prst="rect">
-            <a:avLst/>
-          </a:prstGeom>
-          <a:solidFill>
-            <a:srgbClr val="7C3AED"/>
+          <p:cNvPr id="14" name="Rectangle 13"/>
+          <p:cNvSpPr/>
+          <p:nvPr/>
+        </p:nvSpPr>
+        <p:spPr>
+          <a:xfrm>
+            <a:off x="457200" y="2084832"/>
+            <a:ext cx="54864" cy="658368"/>
+          </a:xfrm>
+          <a:prstGeom prst="rect">
+            <a:avLst/>
+          </a:prstGeom>
+          <a:solidFill>
+            <a:srgbClr val="8B5CF6"/>
           </a:solidFill>
           <a:ln>
             <a:noFill/>
@@ -12740,20 +13055,20 @@
       </p:sp>
       <p:sp>
         <p:nvSpPr>
-          <p:cNvPr id="14" name="Oval 13"/>
-          <p:cNvSpPr/>
-          <p:nvPr/>
-        </p:nvSpPr>
-        <p:spPr>
-          <a:xfrm>
-            <a:off x="731520" y="2304288"/>
-            <a:ext cx="411480" cy="411480"/>
+          <p:cNvPr id="15" name="Oval 14"/>
+          <p:cNvSpPr/>
+          <p:nvPr/>
+        </p:nvSpPr>
+        <p:spPr>
+          <a:xfrm>
+            <a:off x="685800" y="2203704"/>
+            <a:ext cx="365760" cy="365760"/>
           </a:xfrm>
           <a:prstGeom prst="ellipse">
             <a:avLst/>
           </a:prstGeom>
           <a:solidFill>
-            <a:srgbClr val="7C3AED"/>
+            <a:srgbClr val="8B5CF6"/>
           </a:solidFill>
           <a:ln>
             <a:noFill/>
@@ -12783,14 +13098,14 @@
       </p:sp>
       <p:sp>
         <p:nvSpPr>
-          <p:cNvPr id="15" name="TextBox 14"/>
+          <p:cNvPr id="16" name="TextBox 15"/>
           <p:cNvSpPr txBox="1"/>
           <p:nvPr/>
         </p:nvSpPr>
         <p:spPr>
           <a:xfrm>
-            <a:off x="731520" y="2304288"/>
-            <a:ext cx="411480" cy="411480"/>
+            <a:off x="685800" y="2203704"/>
+            <a:ext cx="365760" cy="365760"/>
           </a:xfrm>
           <a:prstGeom prst="rect">
             <a:avLst/>
@@ -12804,9 +13119,9 @@
           <a:lstStyle/>
           <a:p>
             <a:pPr algn="ctr">
-              <a:defRPr sz="1300" b="1">
+              <a:defRPr sz="1200" b="1">
                 <a:solidFill>
-                  <a:srgbClr val="FFFFFF"/>
+                  <a:srgbClr val="F0F4FC"/>
                 </a:solidFill>
                 <a:latin typeface="Microsoft YaHei"/>
               </a:defRPr>
@@ -12819,14 +13134,14 @@
       </p:sp>
       <p:sp>
         <p:nvSpPr>
-          <p:cNvPr id="16" name="TextBox 15"/>
+          <p:cNvPr id="17" name="TextBox 16"/>
           <p:cNvSpPr txBox="1"/>
           <p:nvPr/>
         </p:nvSpPr>
         <p:spPr>
           <a:xfrm>
-            <a:off x="1371600" y="2286000"/>
-            <a:ext cx="10058400" cy="502920"/>
+            <a:off x="1234440" y="2176272"/>
+            <a:ext cx="10058400" cy="457200"/>
           </a:xfrm>
           <a:prstGeom prst="rect">
             <a:avLst/>
@@ -12840,9 +13155,9 @@
           <a:lstStyle/>
           <a:p>
             <a:pPr algn="l">
-              <a:defRPr sz="1500" b="0">
+              <a:defRPr sz="1400" b="0">
                 <a:solidFill>
-                  <a:srgbClr val="CBD5E8"/>
+                  <a:srgbClr val="A0AEC4"/>
                 </a:solidFill>
                 <a:latin typeface="Microsoft YaHei"/>
               </a:defRPr>
@@ -12855,20 +13170,20 @@
       </p:sp>
       <p:sp>
         <p:nvSpPr>
-          <p:cNvPr id="17" name="Rectangle 16"/>
-          <p:cNvSpPr/>
-          <p:nvPr/>
-        </p:nvSpPr>
-        <p:spPr>
-          <a:xfrm>
-            <a:off x="914400" y="2880360"/>
-            <a:ext cx="25400" cy="137160"/>
-          </a:xfrm>
-          <a:prstGeom prst="rect">
-            <a:avLst/>
-          </a:prstGeom>
-          <a:solidFill>
-            <a:srgbClr val="7C3AED"/>
+          <p:cNvPr id="18" name="Rectangle 17"/>
+          <p:cNvSpPr/>
+          <p:nvPr/>
+        </p:nvSpPr>
+        <p:spPr>
+          <a:xfrm>
+            <a:off x="850392" y="2743200"/>
+            <a:ext cx="19050" cy="146304"/>
+          </a:xfrm>
+          <a:prstGeom prst="rect">
+            <a:avLst/>
+          </a:prstGeom>
+          <a:solidFill>
+            <a:srgbClr val="8B5CF6"/>
           </a:solidFill>
           <a:ln>
             <a:noFill/>
@@ -12898,20 +13213,20 @@
       </p:sp>
       <p:sp>
         <p:nvSpPr>
-          <p:cNvPr id="18" name="Rounded Rectangle 17"/>
-          <p:cNvSpPr/>
-          <p:nvPr/>
-        </p:nvSpPr>
-        <p:spPr>
-          <a:xfrm>
-            <a:off x="457200" y="3017520"/>
-            <a:ext cx="11247120" cy="685800"/>
+          <p:cNvPr id="19" name="Rounded Rectangle 18"/>
+          <p:cNvSpPr/>
+          <p:nvPr/>
+        </p:nvSpPr>
+        <p:spPr>
+          <a:xfrm>
+            <a:off x="457200" y="2889504"/>
+            <a:ext cx="11247120" cy="658368"/>
           </a:xfrm>
           <a:prstGeom prst="roundRect">
             <a:avLst/>
           </a:prstGeom>
           <a:solidFill>
-            <a:srgbClr val="141E33"/>
+            <a:srgbClr val="161F35"/>
           </a:solidFill>
           <a:ln>
             <a:noFill/>
@@ -12941,20 +13256,20 @@
       </p:sp>
       <p:sp>
         <p:nvSpPr>
-          <p:cNvPr id="19" name="Rectangle 18"/>
-          <p:cNvSpPr/>
-          <p:nvPr/>
-        </p:nvSpPr>
-        <p:spPr>
-          <a:xfrm>
-            <a:off x="457200" y="3017520"/>
-            <a:ext cx="73152" cy="685800"/>
-          </a:xfrm>
-          <a:prstGeom prst="rect">
-            <a:avLst/>
-          </a:prstGeom>
-          <a:solidFill>
-            <a:srgbClr val="FF6B35"/>
+          <p:cNvPr id="20" name="Rectangle 19"/>
+          <p:cNvSpPr/>
+          <p:nvPr/>
+        </p:nvSpPr>
+        <p:spPr>
+          <a:xfrm>
+            <a:off x="457200" y="2889504"/>
+            <a:ext cx="54864" cy="658368"/>
+          </a:xfrm>
+          <a:prstGeom prst="rect">
+            <a:avLst/>
+          </a:prstGeom>
+          <a:solidFill>
+            <a:srgbClr val="F07A35"/>
           </a:solidFill>
           <a:ln>
             <a:noFill/>
@@ -12984,20 +13299,20 @@
       </p:sp>
       <p:sp>
         <p:nvSpPr>
-          <p:cNvPr id="20" name="Oval 19"/>
-          <p:cNvSpPr/>
-          <p:nvPr/>
-        </p:nvSpPr>
-        <p:spPr>
-          <a:xfrm>
-            <a:off x="731520" y="3127248"/>
-            <a:ext cx="411480" cy="411480"/>
+          <p:cNvPr id="21" name="Oval 20"/>
+          <p:cNvSpPr/>
+          <p:nvPr/>
+        </p:nvSpPr>
+        <p:spPr>
+          <a:xfrm>
+            <a:off x="685800" y="3008376"/>
+            <a:ext cx="365760" cy="365760"/>
           </a:xfrm>
           <a:prstGeom prst="ellipse">
             <a:avLst/>
           </a:prstGeom>
           <a:solidFill>
-            <a:srgbClr val="FF6B35"/>
+            <a:srgbClr val="F07A35"/>
           </a:solidFill>
           <a:ln>
             <a:noFill/>
@@ -13027,14 +13342,14 @@
       </p:sp>
       <p:sp>
         <p:nvSpPr>
-          <p:cNvPr id="21" name="TextBox 20"/>
+          <p:cNvPr id="22" name="TextBox 21"/>
           <p:cNvSpPr txBox="1"/>
           <p:nvPr/>
         </p:nvSpPr>
         <p:spPr>
           <a:xfrm>
-            <a:off x="731520" y="3127248"/>
-            <a:ext cx="411480" cy="411480"/>
+            <a:off x="685800" y="3008376"/>
+            <a:ext cx="365760" cy="365760"/>
           </a:xfrm>
           <a:prstGeom prst="rect">
             <a:avLst/>
@@ -13048,9 +13363,9 @@
           <a:lstStyle/>
           <a:p>
             <a:pPr algn="ctr">
-              <a:defRPr sz="1300" b="1">
+              <a:defRPr sz="1200" b="1">
                 <a:solidFill>
-                  <a:srgbClr val="FFFFFF"/>
+                  <a:srgbClr val="F0F4FC"/>
                 </a:solidFill>
                 <a:latin typeface="Microsoft YaHei"/>
               </a:defRPr>
@@ -13063,14 +13378,14 @@
       </p:sp>
       <p:sp>
         <p:nvSpPr>
-          <p:cNvPr id="22" name="TextBox 21"/>
+          <p:cNvPr id="23" name="TextBox 22"/>
           <p:cNvSpPr txBox="1"/>
           <p:nvPr/>
         </p:nvSpPr>
         <p:spPr>
           <a:xfrm>
-            <a:off x="1371600" y="3108960"/>
-            <a:ext cx="10058400" cy="502920"/>
+            <a:off x="1234440" y="2980944"/>
+            <a:ext cx="10058400" cy="457200"/>
           </a:xfrm>
           <a:prstGeom prst="rect">
             <a:avLst/>
@@ -13084,9 +13399,9 @@
           <a:lstStyle/>
           <a:p>
             <a:pPr algn="l">
-              <a:defRPr sz="1500" b="0">
+              <a:defRPr sz="1400" b="0">
                 <a:solidFill>
-                  <a:srgbClr val="CBD5E8"/>
+                  <a:srgbClr val="A0AEC4"/>
                 </a:solidFill>
                 <a:latin typeface="Microsoft YaHei"/>
               </a:defRPr>
@@ -13099,20 +13414,20 @@
       </p:sp>
       <p:sp>
         <p:nvSpPr>
-          <p:cNvPr id="23" name="Rectangle 22"/>
-          <p:cNvSpPr/>
-          <p:nvPr/>
-        </p:nvSpPr>
-        <p:spPr>
-          <a:xfrm>
-            <a:off x="914400" y="3703320"/>
-            <a:ext cx="25400" cy="137160"/>
-          </a:xfrm>
-          <a:prstGeom prst="rect">
-            <a:avLst/>
-          </a:prstGeom>
-          <a:solidFill>
-            <a:srgbClr val="FF6B35"/>
+          <p:cNvPr id="24" name="Rectangle 23"/>
+          <p:cNvSpPr/>
+          <p:nvPr/>
+        </p:nvSpPr>
+        <p:spPr>
+          <a:xfrm>
+            <a:off x="850392" y="3547872"/>
+            <a:ext cx="19050" cy="146304"/>
+          </a:xfrm>
+          <a:prstGeom prst="rect">
+            <a:avLst/>
+          </a:prstGeom>
+          <a:solidFill>
+            <a:srgbClr val="F07A35"/>
           </a:solidFill>
           <a:ln>
             <a:noFill/>
@@ -13142,20 +13457,20 @@
       </p:sp>
       <p:sp>
         <p:nvSpPr>
-          <p:cNvPr id="24" name="Rounded Rectangle 23"/>
-          <p:cNvSpPr/>
-          <p:nvPr/>
-        </p:nvSpPr>
-        <p:spPr>
-          <a:xfrm>
-            <a:off x="457200" y="3840480"/>
-            <a:ext cx="11247120" cy="685800"/>
+          <p:cNvPr id="25" name="Rounded Rectangle 24"/>
+          <p:cNvSpPr/>
+          <p:nvPr/>
+        </p:nvSpPr>
+        <p:spPr>
+          <a:xfrm>
+            <a:off x="457200" y="3694176"/>
+            <a:ext cx="11247120" cy="658368"/>
           </a:xfrm>
           <a:prstGeom prst="roundRect">
             <a:avLst/>
           </a:prstGeom>
           <a:solidFill>
-            <a:srgbClr val="141E33"/>
+            <a:srgbClr val="161F35"/>
           </a:solidFill>
           <a:ln>
             <a:noFill/>
@@ -13185,14 +13500,14 @@
       </p:sp>
       <p:sp>
         <p:nvSpPr>
-          <p:cNvPr id="25" name="Rectangle 24"/>
-          <p:cNvSpPr/>
-          <p:nvPr/>
-        </p:nvSpPr>
-        <p:spPr>
-          <a:xfrm>
-            <a:off x="457200" y="3840480"/>
-            <a:ext cx="73152" cy="685800"/>
+          <p:cNvPr id="26" name="Rectangle 25"/>
+          <p:cNvSpPr/>
+          <p:nvPr/>
+        </p:nvSpPr>
+        <p:spPr>
+          <a:xfrm>
+            <a:off x="457200" y="3694176"/>
+            <a:ext cx="54864" cy="658368"/>
           </a:xfrm>
           <a:prstGeom prst="rect">
             <a:avLst/>
@@ -13228,14 +13543,14 @@
       </p:sp>
       <p:sp>
         <p:nvSpPr>
-          <p:cNvPr id="26" name="Oval 25"/>
-          <p:cNvSpPr/>
-          <p:nvPr/>
-        </p:nvSpPr>
-        <p:spPr>
-          <a:xfrm>
-            <a:off x="731520" y="3950208"/>
-            <a:ext cx="411480" cy="411480"/>
+          <p:cNvPr id="27" name="Oval 26"/>
+          <p:cNvSpPr/>
+          <p:nvPr/>
+        </p:nvSpPr>
+        <p:spPr>
+          <a:xfrm>
+            <a:off x="685800" y="3813048"/>
+            <a:ext cx="365760" cy="365760"/>
           </a:xfrm>
           <a:prstGeom prst="ellipse">
             <a:avLst/>
@@ -13271,14 +13586,14 @@
       </p:sp>
       <p:sp>
         <p:nvSpPr>
-          <p:cNvPr id="27" name="TextBox 26"/>
+          <p:cNvPr id="28" name="TextBox 27"/>
           <p:cNvSpPr txBox="1"/>
           <p:nvPr/>
         </p:nvSpPr>
         <p:spPr>
           <a:xfrm>
-            <a:off x="731520" y="3950208"/>
-            <a:ext cx="411480" cy="411480"/>
+            <a:off x="685800" y="3813048"/>
+            <a:ext cx="365760" cy="365760"/>
           </a:xfrm>
           <a:prstGeom prst="rect">
             <a:avLst/>
@@ -13292,9 +13607,9 @@
           <a:lstStyle/>
           <a:p>
             <a:pPr algn="ctr">
-              <a:defRPr sz="1300" b="1">
+              <a:defRPr sz="1200" b="1">
                 <a:solidFill>
-                  <a:srgbClr val="FFFFFF"/>
+                  <a:srgbClr val="F0F4FC"/>
                 </a:solidFill>
                 <a:latin typeface="Microsoft YaHei"/>
               </a:defRPr>
@@ -13307,14 +13622,14 @@
       </p:sp>
       <p:sp>
         <p:nvSpPr>
-          <p:cNvPr id="28" name="TextBox 27"/>
+          <p:cNvPr id="29" name="TextBox 28"/>
           <p:cNvSpPr txBox="1"/>
           <p:nvPr/>
         </p:nvSpPr>
         <p:spPr>
           <a:xfrm>
-            <a:off x="1371600" y="3931920"/>
-            <a:ext cx="10058400" cy="502920"/>
+            <a:off x="1234440" y="3785616"/>
+            <a:ext cx="10058400" cy="457200"/>
           </a:xfrm>
           <a:prstGeom prst="rect">
             <a:avLst/>
@@ -13328,9 +13643,9 @@
           <a:lstStyle/>
           <a:p>
             <a:pPr algn="l">
-              <a:defRPr sz="1500" b="0">
+              <a:defRPr sz="1400" b="0">
                 <a:solidFill>
-                  <a:srgbClr val="CBD5E8"/>
+                  <a:srgbClr val="A0AEC4"/>
                 </a:solidFill>
                 <a:latin typeface="Microsoft YaHei"/>
               </a:defRPr>
@@ -13343,14 +13658,14 @@
       </p:sp>
       <p:sp>
         <p:nvSpPr>
-          <p:cNvPr id="29" name="Rectangle 28"/>
-          <p:cNvSpPr/>
-          <p:nvPr/>
-        </p:nvSpPr>
-        <p:spPr>
-          <a:xfrm>
-            <a:off x="914400" y="4526280"/>
-            <a:ext cx="25400" cy="137160"/>
+          <p:cNvPr id="30" name="Rectangle 29"/>
+          <p:cNvSpPr/>
+          <p:nvPr/>
+        </p:nvSpPr>
+        <p:spPr>
+          <a:xfrm>
+            <a:off x="850392" y="4352544"/>
+            <a:ext cx="19050" cy="146304"/>
           </a:xfrm>
           <a:prstGeom prst="rect">
             <a:avLst/>
@@ -13386,20 +13701,20 @@
       </p:sp>
       <p:sp>
         <p:nvSpPr>
-          <p:cNvPr id="30" name="Rounded Rectangle 29"/>
-          <p:cNvSpPr/>
-          <p:nvPr/>
-        </p:nvSpPr>
-        <p:spPr>
-          <a:xfrm>
-            <a:off x="457200" y="4663440"/>
-            <a:ext cx="11247120" cy="685800"/>
+          <p:cNvPr id="31" name="Rounded Rectangle 30"/>
+          <p:cNvSpPr/>
+          <p:nvPr/>
+        </p:nvSpPr>
+        <p:spPr>
+          <a:xfrm>
+            <a:off x="457200" y="4498848"/>
+            <a:ext cx="11247120" cy="658368"/>
           </a:xfrm>
           <a:prstGeom prst="roundRect">
             <a:avLst/>
           </a:prstGeom>
           <a:solidFill>
-            <a:srgbClr val="141E33"/>
+            <a:srgbClr val="161F35"/>
           </a:solidFill>
           <a:ln>
             <a:noFill/>
@@ -13429,14 +13744,14 @@
       </p:sp>
       <p:sp>
         <p:nvSpPr>
-          <p:cNvPr id="31" name="Rectangle 30"/>
-          <p:cNvSpPr/>
-          <p:nvPr/>
-        </p:nvSpPr>
-        <p:spPr>
-          <a:xfrm>
-            <a:off x="457200" y="4663440"/>
-            <a:ext cx="73152" cy="685800"/>
+          <p:cNvPr id="32" name="Rectangle 31"/>
+          <p:cNvSpPr/>
+          <p:nvPr/>
+        </p:nvSpPr>
+        <p:spPr>
+          <a:xfrm>
+            <a:off x="457200" y="4498848"/>
+            <a:ext cx="54864" cy="658368"/>
           </a:xfrm>
           <a:prstGeom prst="rect">
             <a:avLst/>
@@ -13472,14 +13787,14 @@
       </p:sp>
       <p:sp>
         <p:nvSpPr>
-          <p:cNvPr id="32" name="Oval 31"/>
-          <p:cNvSpPr/>
-          <p:nvPr/>
-        </p:nvSpPr>
-        <p:spPr>
-          <a:xfrm>
-            <a:off x="731520" y="4773168"/>
-            <a:ext cx="411480" cy="411480"/>
+          <p:cNvPr id="33" name="Oval 32"/>
+          <p:cNvSpPr/>
+          <p:nvPr/>
+        </p:nvSpPr>
+        <p:spPr>
+          <a:xfrm>
+            <a:off x="685800" y="4617720"/>
+            <a:ext cx="365760" cy="365760"/>
           </a:xfrm>
           <a:prstGeom prst="ellipse">
             <a:avLst/>
@@ -13515,14 +13830,14 @@
       </p:sp>
       <p:sp>
         <p:nvSpPr>
-          <p:cNvPr id="33" name="TextBox 32"/>
+          <p:cNvPr id="34" name="TextBox 33"/>
           <p:cNvSpPr txBox="1"/>
           <p:nvPr/>
         </p:nvSpPr>
         <p:spPr>
           <a:xfrm>
-            <a:off x="731520" y="4773168"/>
-            <a:ext cx="411480" cy="411480"/>
+            <a:off x="685800" y="4617720"/>
+            <a:ext cx="365760" cy="365760"/>
           </a:xfrm>
           <a:prstGeom prst="rect">
             <a:avLst/>
@@ -13536,9 +13851,9 @@
           <a:lstStyle/>
           <a:p>
             <a:pPr algn="ctr">
-              <a:defRPr sz="1300" b="1">
+              <a:defRPr sz="1200" b="1">
                 <a:solidFill>
-                  <a:srgbClr val="FFFFFF"/>
+                  <a:srgbClr val="F0F4FC"/>
                 </a:solidFill>
                 <a:latin typeface="Microsoft YaHei"/>
               </a:defRPr>
@@ -13551,14 +13866,14 @@
       </p:sp>
       <p:sp>
         <p:nvSpPr>
-          <p:cNvPr id="34" name="TextBox 33"/>
+          <p:cNvPr id="35" name="TextBox 34"/>
           <p:cNvSpPr txBox="1"/>
           <p:nvPr/>
         </p:nvSpPr>
         <p:spPr>
           <a:xfrm>
-            <a:off x="1371600" y="4754880"/>
-            <a:ext cx="10058400" cy="502920"/>
+            <a:off x="1234440" y="4590288"/>
+            <a:ext cx="10058400" cy="457200"/>
           </a:xfrm>
           <a:prstGeom prst="rect">
             <a:avLst/>
@@ -13572,9 +13887,9 @@
           <a:lstStyle/>
           <a:p>
             <a:pPr algn="l">
-              <a:defRPr sz="1500" b="0">
+              <a:defRPr sz="1400" b="0">
                 <a:solidFill>
-                  <a:srgbClr val="CBD5E8"/>
+                  <a:srgbClr val="A0AEC4"/>
                 </a:solidFill>
                 <a:latin typeface="Microsoft YaHei"/>
               </a:defRPr>
@@ -13587,14 +13902,14 @@
       </p:sp>
       <p:sp>
         <p:nvSpPr>
-          <p:cNvPr id="35" name="Rectangle 34"/>
-          <p:cNvSpPr/>
-          <p:nvPr/>
-        </p:nvSpPr>
-        <p:spPr>
-          <a:xfrm>
-            <a:off x="914400" y="5349240"/>
-            <a:ext cx="25400" cy="137160"/>
+          <p:cNvPr id="36" name="Rectangle 35"/>
+          <p:cNvSpPr/>
+          <p:nvPr/>
+        </p:nvSpPr>
+        <p:spPr>
+          <a:xfrm>
+            <a:off x="850392" y="5157216"/>
+            <a:ext cx="19050" cy="146304"/>
           </a:xfrm>
           <a:prstGeom prst="rect">
             <a:avLst/>
@@ -13630,20 +13945,20 @@
       </p:sp>
       <p:sp>
         <p:nvSpPr>
-          <p:cNvPr id="36" name="Rounded Rectangle 35"/>
-          <p:cNvSpPr/>
-          <p:nvPr/>
-        </p:nvSpPr>
-        <p:spPr>
-          <a:xfrm>
-            <a:off x="457200" y="5486400"/>
-            <a:ext cx="11247120" cy="685800"/>
+          <p:cNvPr id="37" name="Rounded Rectangle 36"/>
+          <p:cNvSpPr/>
+          <p:nvPr/>
+        </p:nvSpPr>
+        <p:spPr>
+          <a:xfrm>
+            <a:off x="457200" y="5303520"/>
+            <a:ext cx="11247120" cy="658368"/>
           </a:xfrm>
           <a:prstGeom prst="roundRect">
             <a:avLst/>
           </a:prstGeom>
           <a:solidFill>
-            <a:srgbClr val="141E33"/>
+            <a:srgbClr val="161F35"/>
           </a:solidFill>
           <a:ln>
             <a:noFill/>
@@ -13673,20 +13988,20 @@
       </p:sp>
       <p:sp>
         <p:nvSpPr>
-          <p:cNvPr id="37" name="Rectangle 36"/>
-          <p:cNvSpPr/>
-          <p:nvPr/>
-        </p:nvSpPr>
-        <p:spPr>
-          <a:xfrm>
-            <a:off x="457200" y="5486400"/>
-            <a:ext cx="73152" cy="685800"/>
-          </a:xfrm>
-          <a:prstGeom prst="rect">
-            <a:avLst/>
-          </a:prstGeom>
-          <a:solidFill>
-            <a:srgbClr val="EF4444"/>
+          <p:cNvPr id="38" name="Rectangle 37"/>
+          <p:cNvSpPr/>
+          <p:nvPr/>
+        </p:nvSpPr>
+        <p:spPr>
+          <a:xfrm>
+            <a:off x="457200" y="5303520"/>
+            <a:ext cx="54864" cy="658368"/>
+          </a:xfrm>
+          <a:prstGeom prst="rect">
+            <a:avLst/>
+          </a:prstGeom>
+          <a:solidFill>
+            <a:srgbClr val="F43F5E"/>
           </a:solidFill>
           <a:ln>
             <a:noFill/>
@@ -13716,20 +14031,20 @@
       </p:sp>
       <p:sp>
         <p:nvSpPr>
-          <p:cNvPr id="38" name="Oval 37"/>
-          <p:cNvSpPr/>
-          <p:nvPr/>
-        </p:nvSpPr>
-        <p:spPr>
-          <a:xfrm>
-            <a:off x="731520" y="5596128"/>
-            <a:ext cx="411480" cy="411480"/>
+          <p:cNvPr id="39" name="Oval 38"/>
+          <p:cNvSpPr/>
+          <p:nvPr/>
+        </p:nvSpPr>
+        <p:spPr>
+          <a:xfrm>
+            <a:off x="685800" y="5422392"/>
+            <a:ext cx="365760" cy="365760"/>
           </a:xfrm>
           <a:prstGeom prst="ellipse">
             <a:avLst/>
           </a:prstGeom>
           <a:solidFill>
-            <a:srgbClr val="EF4444"/>
+            <a:srgbClr val="F43F5E"/>
           </a:solidFill>
           <a:ln>
             <a:noFill/>
@@ -13759,14 +14074,14 @@
       </p:sp>
       <p:sp>
         <p:nvSpPr>
-          <p:cNvPr id="39" name="TextBox 38"/>
+          <p:cNvPr id="40" name="TextBox 39"/>
           <p:cNvSpPr txBox="1"/>
           <p:nvPr/>
         </p:nvSpPr>
         <p:spPr>
           <a:xfrm>
-            <a:off x="731520" y="5596128"/>
-            <a:ext cx="411480" cy="411480"/>
+            <a:off x="685800" y="5422392"/>
+            <a:ext cx="365760" cy="365760"/>
           </a:xfrm>
           <a:prstGeom prst="rect">
             <a:avLst/>
@@ -13780,9 +14095,9 @@
           <a:lstStyle/>
           <a:p>
             <a:pPr algn="ctr">
-              <a:defRPr sz="1300" b="1">
+              <a:defRPr sz="1200" b="1">
                 <a:solidFill>
-                  <a:srgbClr val="FFFFFF"/>
+                  <a:srgbClr val="F0F4FC"/>
                 </a:solidFill>
                 <a:latin typeface="Microsoft YaHei"/>
               </a:defRPr>
@@ -13795,14 +14110,14 @@
       </p:sp>
       <p:sp>
         <p:nvSpPr>
-          <p:cNvPr id="40" name="TextBox 39"/>
+          <p:cNvPr id="41" name="TextBox 40"/>
           <p:cNvSpPr txBox="1"/>
           <p:nvPr/>
         </p:nvSpPr>
         <p:spPr>
           <a:xfrm>
-            <a:off x="1371600" y="5577840"/>
-            <a:ext cx="10058400" cy="502920"/>
+            <a:off x="1234440" y="5394960"/>
+            <a:ext cx="10058400" cy="457200"/>
           </a:xfrm>
           <a:prstGeom prst="rect">
             <a:avLst/>
@@ -13816,9 +14131,9 @@
           <a:lstStyle/>
           <a:p>
             <a:pPr algn="l">
-              <a:defRPr sz="1500" b="0">
+              <a:defRPr sz="1400" b="0">
                 <a:solidFill>
-                  <a:srgbClr val="CBD5E8"/>
+                  <a:srgbClr val="A0AEC4"/>
                 </a:solidFill>
                 <a:latin typeface="Microsoft YaHei"/>
               </a:defRPr>
@@ -13831,20 +14146,20 @@
       </p:sp>
       <p:sp>
         <p:nvSpPr>
-          <p:cNvPr id="41" name="Rectangle 40"/>
+          <p:cNvPr id="42" name="Rectangle 41"/>
           <p:cNvSpPr/>
           <p:nvPr/>
         </p:nvSpPr>
         <p:spPr>
           <a:xfrm>
             <a:off x="0" y="6446520"/>
-            <a:ext cx="12191695" cy="19050"/>
-          </a:xfrm>
-          <a:prstGeom prst="rect">
-            <a:avLst/>
-          </a:prstGeom>
-          <a:solidFill>
-            <a:srgbClr val="2D3B55"/>
+            <a:ext cx="12191695" cy="12700"/>
+          </a:xfrm>
+          <a:prstGeom prst="rect">
+            <a:avLst/>
+          </a:prstGeom>
+          <a:solidFill>
+            <a:srgbClr val="253350"/>
           </a:solidFill>
           <a:ln>
             <a:noFill/>
@@ -13874,14 +14189,14 @@
       </p:sp>
       <p:sp>
         <p:nvSpPr>
-          <p:cNvPr id="42" name="TextBox 41"/>
+          <p:cNvPr id="43" name="TextBox 42"/>
           <p:cNvSpPr txBox="1"/>
           <p:nvPr/>
         </p:nvSpPr>
         <p:spPr>
           <a:xfrm>
-            <a:off x="457200" y="6492240"/>
-            <a:ext cx="5486400" cy="274320"/>
+            <a:off x="731520" y="6492240"/>
+            <a:ext cx="4572000" cy="274320"/>
           </a:xfrm>
           <a:prstGeom prst="rect">
             <a:avLst/>
@@ -13897,20 +14212,20 @@
             <a:pPr algn="l">
               <a:defRPr sz="900" b="0">
                 <a:solidFill>
-                  <a:srgbClr val="6B7B9E"/>
+                  <a:srgbClr val="607090"/>
                 </a:solidFill>
                 <a:latin typeface="Microsoft YaHei"/>
               </a:defRPr>
             </a:pPr>
             <a:r>
-              <a:t>模块07：Seedance 2.0深度精通</a:t>
-            </a:r>
-          </a:p>
-        </p:txBody>
-      </p:sp>
-      <p:sp>
-        <p:nvSpPr>
-          <p:cNvPr id="43" name="TextBox 42"/>
+              <a:t>模块07 · Seedance 2.0深度精通</a:t>
+            </a:r>
+          </a:p>
+        </p:txBody>
+      </p:sp>
+      <p:sp>
+        <p:nvSpPr>
+          <p:cNvPr id="44" name="TextBox 43"/>
           <p:cNvSpPr txBox="1"/>
           <p:nvPr/>
         </p:nvSpPr>
@@ -13933,7 +14248,7 @@
             <a:pPr algn="r">
               <a:defRPr sz="900" b="0">
                 <a:solidFill>
-                  <a:srgbClr val="6B7B9E"/>
+                  <a:srgbClr val="607090"/>
                 </a:solidFill>
                 <a:latin typeface="Microsoft YaHei"/>
               </a:defRPr>
@@ -13958,7 +14273,7 @@
     <p:bg>
       <p:bgPr>
         <a:solidFill>
-          <a:srgbClr val="0B1120"/>
+          <a:srgbClr val="0A0E1A"/>
         </a:solidFill>
         <a:effectLst/>
       </p:bgPr>
@@ -13979,13 +14294,13 @@
         <p:spPr>
           <a:xfrm>
             <a:off x="0" y="0"/>
-            <a:ext cx="12191695" cy="1051560"/>
-          </a:xfrm>
-          <a:prstGeom prst="rect">
-            <a:avLst/>
-          </a:prstGeom>
-          <a:solidFill>
-            <a:srgbClr val="141E33"/>
+            <a:ext cx="12191695" cy="38100"/>
+          </a:xfrm>
+          <a:prstGeom prst="rect">
+            <a:avLst/>
+          </a:prstGeom>
+          <a:solidFill>
+            <a:srgbClr val="8B5CF6"/>
           </a:solidFill>
           <a:ln>
             <a:noFill/>
@@ -14021,14 +14336,14 @@
         </p:nvSpPr>
         <p:spPr>
           <a:xfrm>
-            <a:off x="0" y="0"/>
-            <a:ext cx="109728" cy="1051560"/>
-          </a:xfrm>
-          <a:prstGeom prst="rect">
-            <a:avLst/>
-          </a:prstGeom>
-          <a:solidFill>
-            <a:srgbClr val="7C3AED"/>
+            <a:off x="0" y="38100"/>
+            <a:ext cx="12191695" cy="914400"/>
+          </a:xfrm>
+          <a:prstGeom prst="rect">
+            <a:avLst/>
+          </a:prstGeom>
+          <a:solidFill>
+            <a:srgbClr val="161F35"/>
           </a:solidFill>
           <a:ln>
             <a:noFill/>
@@ -14058,14 +14373,57 @@
       </p:sp>
       <p:sp>
         <p:nvSpPr>
-          <p:cNvPr id="4" name="TextBox 3"/>
+          <p:cNvPr id="4" name="Rectangle 3"/>
+          <p:cNvSpPr/>
+          <p:nvPr/>
+        </p:nvSpPr>
+        <p:spPr>
+          <a:xfrm>
+            <a:off x="0" y="38100"/>
+            <a:ext cx="91440" cy="914400"/>
+          </a:xfrm>
+          <a:prstGeom prst="rect">
+            <a:avLst/>
+          </a:prstGeom>
+          <a:solidFill>
+            <a:srgbClr val="8B5CF6"/>
+          </a:solidFill>
+          <a:ln>
+            <a:noFill/>
+          </a:ln>
+        </p:spPr>
+        <p:style>
+          <a:lnRef idx="1">
+            <a:schemeClr val="accent1"/>
+          </a:lnRef>
+          <a:fillRef idx="3">
+            <a:schemeClr val="accent1"/>
+          </a:fillRef>
+          <a:effectRef idx="2">
+            <a:schemeClr val="accent1"/>
+          </a:effectRef>
+          <a:fontRef idx="minor">
+            <a:schemeClr val="lt1"/>
+          </a:fontRef>
+        </p:style>
+        <p:txBody>
+          <a:bodyPr rtlCol="0" anchor="ctr"/>
+          <a:lstStyle/>
+          <a:p>
+            <a:pPr algn="ctr"/>
+          </a:p>
+        </p:txBody>
+      </p:sp>
+      <p:sp>
+        <p:nvSpPr>
+          <p:cNvPr id="5" name="TextBox 4"/>
           <p:cNvSpPr txBox="1"/>
           <p:nvPr/>
         </p:nvSpPr>
         <p:spPr>
           <a:xfrm>
-            <a:off x="548640" y="182880"/>
-            <a:ext cx="10058400" cy="640080"/>
+            <a:off x="731520" y="137160"/>
+            <a:ext cx="10728655" cy="640080"/>
           </a:xfrm>
           <a:prstGeom prst="rect">
             <a:avLst/>
@@ -14079,9 +14437,9 @@
           <a:lstStyle/>
           <a:p>
             <a:pPr algn="l">
-              <a:defRPr sz="2600" b="1">
+              <a:defRPr sz="2400" b="1">
                 <a:solidFill>
-                  <a:srgbClr val="FFFFFF"/>
+                  <a:srgbClr val="F0F4FC"/>
                 </a:solidFill>
                 <a:latin typeface="Microsoft YaHei"/>
               </a:defRPr>
@@ -14094,20 +14452,20 @@
       </p:sp>
       <p:sp>
         <p:nvSpPr>
-          <p:cNvPr id="5" name="Rectangle 4"/>
-          <p:cNvSpPr/>
-          <p:nvPr/>
-        </p:nvSpPr>
-        <p:spPr>
-          <a:xfrm>
-            <a:off x="0" y="1051560"/>
-            <a:ext cx="12191695" cy="25400"/>
-          </a:xfrm>
-          <a:prstGeom prst="rect">
-            <a:avLst/>
-          </a:prstGeom>
-          <a:solidFill>
-            <a:srgbClr val="7C3AED"/>
+          <p:cNvPr id="6" name="Rectangle 5"/>
+          <p:cNvSpPr/>
+          <p:nvPr/>
+        </p:nvSpPr>
+        <p:spPr>
+          <a:xfrm>
+            <a:off x="0" y="1078992"/>
+            <a:ext cx="12191695" cy="12700"/>
+          </a:xfrm>
+          <a:prstGeom prst="rect">
+            <a:avLst/>
+          </a:prstGeom>
+          <a:solidFill>
+            <a:srgbClr val="253350"/>
           </a:solidFill>
           <a:ln>
             <a:noFill/>
@@ -14137,20 +14495,20 @@
       </p:sp>
       <p:sp>
         <p:nvSpPr>
-          <p:cNvPr id="6" name="Rounded Rectangle 5"/>
-          <p:cNvSpPr/>
-          <p:nvPr/>
-        </p:nvSpPr>
-        <p:spPr>
-          <a:xfrm>
-            <a:off x="457200" y="1325880"/>
-            <a:ext cx="11247120" cy="731520"/>
+          <p:cNvPr id="7" name="Rounded Rectangle 6"/>
+          <p:cNvSpPr/>
+          <p:nvPr/>
+        </p:nvSpPr>
+        <p:spPr>
+          <a:xfrm>
+            <a:off x="457200" y="1280160"/>
+            <a:ext cx="11247120" cy="685800"/>
           </a:xfrm>
           <a:prstGeom prst="roundRect">
             <a:avLst/>
           </a:prstGeom>
           <a:solidFill>
-            <a:srgbClr val="141E33"/>
+            <a:srgbClr val="161F35"/>
           </a:solidFill>
           <a:ln>
             <a:noFill/>
@@ -14180,20 +14538,20 @@
       </p:sp>
       <p:sp>
         <p:nvSpPr>
-          <p:cNvPr id="7" name="Rectangle 6"/>
-          <p:cNvSpPr/>
-          <p:nvPr/>
-        </p:nvSpPr>
-        <p:spPr>
-          <a:xfrm>
-            <a:off x="457200" y="1325880"/>
-            <a:ext cx="73152" cy="731520"/>
-          </a:xfrm>
-          <a:prstGeom prst="rect">
-            <a:avLst/>
-          </a:prstGeom>
-          <a:solidFill>
-            <a:srgbClr val="7C3AED"/>
+          <p:cNvPr id="8" name="Rectangle 7"/>
+          <p:cNvSpPr/>
+          <p:nvPr/>
+        </p:nvSpPr>
+        <p:spPr>
+          <a:xfrm>
+            <a:off x="457200" y="1280160"/>
+            <a:ext cx="54864" cy="685800"/>
+          </a:xfrm>
+          <a:prstGeom prst="rect">
+            <a:avLst/>
+          </a:prstGeom>
+          <a:solidFill>
+            <a:srgbClr val="8B5CF6"/>
           </a:solidFill>
           <a:ln>
             <a:noFill/>
@@ -14223,20 +14581,20 @@
       </p:sp>
       <p:sp>
         <p:nvSpPr>
-          <p:cNvPr id="8" name="Oval 7"/>
-          <p:cNvSpPr/>
-          <p:nvPr/>
-        </p:nvSpPr>
-        <p:spPr>
-          <a:xfrm>
-            <a:off x="731520" y="1490472"/>
-            <a:ext cx="365760" cy="365760"/>
+          <p:cNvPr id="9" name="Oval 8"/>
+          <p:cNvSpPr/>
+          <p:nvPr/>
+        </p:nvSpPr>
+        <p:spPr>
+          <a:xfrm>
+            <a:off x="685800" y="1463040"/>
+            <a:ext cx="320040" cy="320040"/>
           </a:xfrm>
           <a:prstGeom prst="ellipse">
             <a:avLst/>
           </a:prstGeom>
           <a:solidFill>
-            <a:srgbClr val="7C3AED"/>
+            <a:srgbClr val="8B5CF6"/>
           </a:solidFill>
           <a:ln>
             <a:noFill/>
@@ -14266,14 +14624,14 @@
       </p:sp>
       <p:sp>
         <p:nvSpPr>
-          <p:cNvPr id="9" name="TextBox 8"/>
+          <p:cNvPr id="10" name="TextBox 9"/>
           <p:cNvSpPr txBox="1"/>
           <p:nvPr/>
         </p:nvSpPr>
         <p:spPr>
           <a:xfrm>
-            <a:off x="731520" y="1490472"/>
-            <a:ext cx="365760" cy="365760"/>
+            <a:off x="685800" y="1463040"/>
+            <a:ext cx="320040" cy="320040"/>
           </a:xfrm>
           <a:prstGeom prst="rect">
             <a:avLst/>
@@ -14287,9 +14645,9 @@
           <a:lstStyle/>
           <a:p>
             <a:pPr algn="ctr">
-              <a:defRPr sz="1100" b="1">
+              <a:defRPr sz="1000" b="1">
                 <a:solidFill>
-                  <a:srgbClr val="FFFFFF"/>
+                  <a:srgbClr val="F0F4FC"/>
                 </a:solidFill>
                 <a:latin typeface="Microsoft YaHei"/>
               </a:defRPr>
@@ -14302,14 +14660,14 @@
       </p:sp>
       <p:sp>
         <p:nvSpPr>
-          <p:cNvPr id="10" name="TextBox 9"/>
+          <p:cNvPr id="11" name="TextBox 10"/>
           <p:cNvSpPr txBox="1"/>
           <p:nvPr/>
         </p:nvSpPr>
         <p:spPr>
           <a:xfrm>
-            <a:off x="1280160" y="1417320"/>
-            <a:ext cx="10058400" cy="548640"/>
+            <a:off x="1188720" y="1440180"/>
+            <a:ext cx="10058400" cy="365760"/>
           </a:xfrm>
           <a:prstGeom prst="rect">
             <a:avLst/>
@@ -14323,9 +14681,9 @@
           <a:lstStyle/>
           <a:p>
             <a:pPr algn="l">
-              <a:defRPr sz="1500" b="0">
+              <a:defRPr sz="1400" b="0">
                 <a:solidFill>
-                  <a:srgbClr val="CBD5E8"/>
+                  <a:srgbClr val="A0AEC4"/>
                 </a:solidFill>
                 <a:latin typeface="Microsoft YaHei"/>
               </a:defRPr>
@@ -14338,20 +14696,20 @@
       </p:sp>
       <p:sp>
         <p:nvSpPr>
-          <p:cNvPr id="11" name="Rounded Rectangle 10"/>
-          <p:cNvSpPr/>
-          <p:nvPr/>
-        </p:nvSpPr>
-        <p:spPr>
-          <a:xfrm>
-            <a:off x="457200" y="2194560"/>
-            <a:ext cx="11247120" cy="731520"/>
+          <p:cNvPr id="12" name="Rounded Rectangle 11"/>
+          <p:cNvSpPr/>
+          <p:nvPr/>
+        </p:nvSpPr>
+        <p:spPr>
+          <a:xfrm>
+            <a:off x="457200" y="2297430"/>
+            <a:ext cx="11247120" cy="685800"/>
           </a:xfrm>
           <a:prstGeom prst="roundRect">
             <a:avLst/>
           </a:prstGeom>
           <a:solidFill>
-            <a:srgbClr val="141E33"/>
+            <a:srgbClr val="161F35"/>
           </a:solidFill>
           <a:ln>
             <a:noFill/>
@@ -14381,20 +14739,20 @@
       </p:sp>
       <p:sp>
         <p:nvSpPr>
-          <p:cNvPr id="12" name="Rectangle 11"/>
-          <p:cNvSpPr/>
-          <p:nvPr/>
-        </p:nvSpPr>
-        <p:spPr>
-          <a:xfrm>
-            <a:off x="457200" y="2194560"/>
-            <a:ext cx="73152" cy="731520"/>
-          </a:xfrm>
-          <a:prstGeom prst="rect">
-            <a:avLst/>
-          </a:prstGeom>
-          <a:solidFill>
-            <a:srgbClr val="7C3AED"/>
+          <p:cNvPr id="13" name="Rectangle 12"/>
+          <p:cNvSpPr/>
+          <p:nvPr/>
+        </p:nvSpPr>
+        <p:spPr>
+          <a:xfrm>
+            <a:off x="457200" y="2297430"/>
+            <a:ext cx="54864" cy="685800"/>
+          </a:xfrm>
+          <a:prstGeom prst="rect">
+            <a:avLst/>
+          </a:prstGeom>
+          <a:solidFill>
+            <a:srgbClr val="8B5CF6"/>
           </a:solidFill>
           <a:ln>
             <a:noFill/>
@@ -14424,20 +14782,20 @@
       </p:sp>
       <p:sp>
         <p:nvSpPr>
-          <p:cNvPr id="13" name="Oval 12"/>
-          <p:cNvSpPr/>
-          <p:nvPr/>
-        </p:nvSpPr>
-        <p:spPr>
-          <a:xfrm>
-            <a:off x="731520" y="2359152"/>
-            <a:ext cx="365760" cy="365760"/>
+          <p:cNvPr id="14" name="Oval 13"/>
+          <p:cNvSpPr/>
+          <p:nvPr/>
+        </p:nvSpPr>
+        <p:spPr>
+          <a:xfrm>
+            <a:off x="685800" y="2480310"/>
+            <a:ext cx="320040" cy="320040"/>
           </a:xfrm>
           <a:prstGeom prst="ellipse">
             <a:avLst/>
           </a:prstGeom>
           <a:solidFill>
-            <a:srgbClr val="7C3AED"/>
+            <a:srgbClr val="8B5CF6"/>
           </a:solidFill>
           <a:ln>
             <a:noFill/>
@@ -14467,14 +14825,14 @@
       </p:sp>
       <p:sp>
         <p:nvSpPr>
-          <p:cNvPr id="14" name="TextBox 13"/>
+          <p:cNvPr id="15" name="TextBox 14"/>
           <p:cNvSpPr txBox="1"/>
           <p:nvPr/>
         </p:nvSpPr>
         <p:spPr>
           <a:xfrm>
-            <a:off x="731520" y="2359152"/>
-            <a:ext cx="365760" cy="365760"/>
+            <a:off x="685800" y="2480310"/>
+            <a:ext cx="320040" cy="320040"/>
           </a:xfrm>
           <a:prstGeom prst="rect">
             <a:avLst/>
@@ -14488,9 +14846,9 @@
           <a:lstStyle/>
           <a:p>
             <a:pPr algn="ctr">
-              <a:defRPr sz="1100" b="1">
+              <a:defRPr sz="1000" b="1">
                 <a:solidFill>
-                  <a:srgbClr val="FFFFFF"/>
+                  <a:srgbClr val="F0F4FC"/>
                 </a:solidFill>
                 <a:latin typeface="Microsoft YaHei"/>
               </a:defRPr>
@@ -14503,14 +14861,14 @@
       </p:sp>
       <p:sp>
         <p:nvSpPr>
-          <p:cNvPr id="15" name="TextBox 14"/>
+          <p:cNvPr id="16" name="TextBox 15"/>
           <p:cNvSpPr txBox="1"/>
           <p:nvPr/>
         </p:nvSpPr>
         <p:spPr>
           <a:xfrm>
-            <a:off x="1280160" y="2286000"/>
-            <a:ext cx="10058400" cy="548640"/>
+            <a:off x="1188720" y="2457450"/>
+            <a:ext cx="10058400" cy="365760"/>
           </a:xfrm>
           <a:prstGeom prst="rect">
             <a:avLst/>
@@ -14524,9 +14882,9 @@
           <a:lstStyle/>
           <a:p>
             <a:pPr algn="l">
-              <a:defRPr sz="1500" b="0">
+              <a:defRPr sz="1400" b="0">
                 <a:solidFill>
-                  <a:srgbClr val="CBD5E8"/>
+                  <a:srgbClr val="A0AEC4"/>
                 </a:solidFill>
                 <a:latin typeface="Microsoft YaHei"/>
               </a:defRPr>
@@ -14539,20 +14897,20 @@
       </p:sp>
       <p:sp>
         <p:nvSpPr>
-          <p:cNvPr id="16" name="Rounded Rectangle 15"/>
-          <p:cNvSpPr/>
-          <p:nvPr/>
-        </p:nvSpPr>
-        <p:spPr>
-          <a:xfrm>
-            <a:off x="457200" y="3063240"/>
-            <a:ext cx="11247120" cy="731520"/>
+          <p:cNvPr id="17" name="Rounded Rectangle 16"/>
+          <p:cNvSpPr/>
+          <p:nvPr/>
+        </p:nvSpPr>
+        <p:spPr>
+          <a:xfrm>
+            <a:off x="457200" y="3314700"/>
+            <a:ext cx="11247120" cy="685800"/>
           </a:xfrm>
           <a:prstGeom prst="roundRect">
             <a:avLst/>
           </a:prstGeom>
           <a:solidFill>
-            <a:srgbClr val="141E33"/>
+            <a:srgbClr val="161F35"/>
           </a:solidFill>
           <a:ln>
             <a:noFill/>
@@ -14582,20 +14940,20 @@
       </p:sp>
       <p:sp>
         <p:nvSpPr>
-          <p:cNvPr id="17" name="Rectangle 16"/>
-          <p:cNvSpPr/>
-          <p:nvPr/>
-        </p:nvSpPr>
-        <p:spPr>
-          <a:xfrm>
-            <a:off x="457200" y="3063240"/>
-            <a:ext cx="73152" cy="731520"/>
-          </a:xfrm>
-          <a:prstGeom prst="rect">
-            <a:avLst/>
-          </a:prstGeom>
-          <a:solidFill>
-            <a:srgbClr val="7C3AED"/>
+          <p:cNvPr id="18" name="Rectangle 17"/>
+          <p:cNvSpPr/>
+          <p:nvPr/>
+        </p:nvSpPr>
+        <p:spPr>
+          <a:xfrm>
+            <a:off x="457200" y="3314700"/>
+            <a:ext cx="54864" cy="685800"/>
+          </a:xfrm>
+          <a:prstGeom prst="rect">
+            <a:avLst/>
+          </a:prstGeom>
+          <a:solidFill>
+            <a:srgbClr val="8B5CF6"/>
           </a:solidFill>
           <a:ln>
             <a:noFill/>
@@ -14625,20 +14983,20 @@
       </p:sp>
       <p:sp>
         <p:nvSpPr>
-          <p:cNvPr id="18" name="Oval 17"/>
-          <p:cNvSpPr/>
-          <p:nvPr/>
-        </p:nvSpPr>
-        <p:spPr>
-          <a:xfrm>
-            <a:off x="731520" y="3227832"/>
-            <a:ext cx="365760" cy="365760"/>
+          <p:cNvPr id="19" name="Oval 18"/>
+          <p:cNvSpPr/>
+          <p:nvPr/>
+        </p:nvSpPr>
+        <p:spPr>
+          <a:xfrm>
+            <a:off x="685800" y="3497580"/>
+            <a:ext cx="320040" cy="320040"/>
           </a:xfrm>
           <a:prstGeom prst="ellipse">
             <a:avLst/>
           </a:prstGeom>
           <a:solidFill>
-            <a:srgbClr val="7C3AED"/>
+            <a:srgbClr val="8B5CF6"/>
           </a:solidFill>
           <a:ln>
             <a:noFill/>
@@ -14668,14 +15026,14 @@
       </p:sp>
       <p:sp>
         <p:nvSpPr>
-          <p:cNvPr id="19" name="TextBox 18"/>
+          <p:cNvPr id="20" name="TextBox 19"/>
           <p:cNvSpPr txBox="1"/>
           <p:nvPr/>
         </p:nvSpPr>
         <p:spPr>
           <a:xfrm>
-            <a:off x="731520" y="3227832"/>
-            <a:ext cx="365760" cy="365760"/>
+            <a:off x="685800" y="3497580"/>
+            <a:ext cx="320040" cy="320040"/>
           </a:xfrm>
           <a:prstGeom prst="rect">
             <a:avLst/>
@@ -14689,9 +15047,9 @@
           <a:lstStyle/>
           <a:p>
             <a:pPr algn="ctr">
-              <a:defRPr sz="1100" b="1">
+              <a:defRPr sz="1000" b="1">
                 <a:solidFill>
-                  <a:srgbClr val="FFFFFF"/>
+                  <a:srgbClr val="F0F4FC"/>
                 </a:solidFill>
                 <a:latin typeface="Microsoft YaHei"/>
               </a:defRPr>
@@ -14704,14 +15062,14 @@
       </p:sp>
       <p:sp>
         <p:nvSpPr>
-          <p:cNvPr id="20" name="TextBox 19"/>
+          <p:cNvPr id="21" name="TextBox 20"/>
           <p:cNvSpPr txBox="1"/>
           <p:nvPr/>
         </p:nvSpPr>
         <p:spPr>
           <a:xfrm>
-            <a:off x="1280160" y="3154680"/>
-            <a:ext cx="10058400" cy="548640"/>
+            <a:off x="1188720" y="3474720"/>
+            <a:ext cx="10058400" cy="365760"/>
           </a:xfrm>
           <a:prstGeom prst="rect">
             <a:avLst/>
@@ -14725,9 +15083,9 @@
           <a:lstStyle/>
           <a:p>
             <a:pPr algn="l">
-              <a:defRPr sz="1500" b="0">
+              <a:defRPr sz="1400" b="0">
                 <a:solidFill>
-                  <a:srgbClr val="CBD5E8"/>
+                  <a:srgbClr val="A0AEC4"/>
                 </a:solidFill>
                 <a:latin typeface="Microsoft YaHei"/>
               </a:defRPr>
@@ -14740,20 +15098,20 @@
       </p:sp>
       <p:sp>
         <p:nvSpPr>
-          <p:cNvPr id="21" name="Rounded Rectangle 20"/>
-          <p:cNvSpPr/>
-          <p:nvPr/>
-        </p:nvSpPr>
-        <p:spPr>
-          <a:xfrm>
-            <a:off x="457200" y="3931919"/>
-            <a:ext cx="11247120" cy="731520"/>
+          <p:cNvPr id="22" name="Rounded Rectangle 21"/>
+          <p:cNvSpPr/>
+          <p:nvPr/>
+        </p:nvSpPr>
+        <p:spPr>
+          <a:xfrm>
+            <a:off x="457200" y="4331970"/>
+            <a:ext cx="11247120" cy="685800"/>
           </a:xfrm>
           <a:prstGeom prst="roundRect">
             <a:avLst/>
           </a:prstGeom>
           <a:solidFill>
-            <a:srgbClr val="141E33"/>
+            <a:srgbClr val="161F35"/>
           </a:solidFill>
           <a:ln>
             <a:noFill/>
@@ -14783,20 +15141,20 @@
       </p:sp>
       <p:sp>
         <p:nvSpPr>
-          <p:cNvPr id="22" name="Rectangle 21"/>
-          <p:cNvSpPr/>
-          <p:nvPr/>
-        </p:nvSpPr>
-        <p:spPr>
-          <a:xfrm>
-            <a:off x="457200" y="3931919"/>
-            <a:ext cx="73152" cy="731520"/>
-          </a:xfrm>
-          <a:prstGeom prst="rect">
-            <a:avLst/>
-          </a:prstGeom>
-          <a:solidFill>
-            <a:srgbClr val="7C3AED"/>
+          <p:cNvPr id="23" name="Rectangle 22"/>
+          <p:cNvSpPr/>
+          <p:nvPr/>
+        </p:nvSpPr>
+        <p:spPr>
+          <a:xfrm>
+            <a:off x="457200" y="4331970"/>
+            <a:ext cx="54864" cy="685800"/>
+          </a:xfrm>
+          <a:prstGeom prst="rect">
+            <a:avLst/>
+          </a:prstGeom>
+          <a:solidFill>
+            <a:srgbClr val="8B5CF6"/>
           </a:solidFill>
           <a:ln>
             <a:noFill/>
@@ -14826,20 +15184,20 @@
       </p:sp>
       <p:sp>
         <p:nvSpPr>
-          <p:cNvPr id="23" name="Oval 22"/>
-          <p:cNvSpPr/>
-          <p:nvPr/>
-        </p:nvSpPr>
-        <p:spPr>
-          <a:xfrm>
-            <a:off x="731520" y="4096511"/>
-            <a:ext cx="365760" cy="365760"/>
+          <p:cNvPr id="24" name="Oval 23"/>
+          <p:cNvSpPr/>
+          <p:nvPr/>
+        </p:nvSpPr>
+        <p:spPr>
+          <a:xfrm>
+            <a:off x="685800" y="4514850"/>
+            <a:ext cx="320040" cy="320040"/>
           </a:xfrm>
           <a:prstGeom prst="ellipse">
             <a:avLst/>
           </a:prstGeom>
           <a:solidFill>
-            <a:srgbClr val="7C3AED"/>
+            <a:srgbClr val="8B5CF6"/>
           </a:solidFill>
           <a:ln>
             <a:noFill/>
@@ -14869,14 +15227,14 @@
       </p:sp>
       <p:sp>
         <p:nvSpPr>
-          <p:cNvPr id="24" name="TextBox 23"/>
+          <p:cNvPr id="25" name="TextBox 24"/>
           <p:cNvSpPr txBox="1"/>
           <p:nvPr/>
         </p:nvSpPr>
         <p:spPr>
           <a:xfrm>
-            <a:off x="731520" y="4096511"/>
-            <a:ext cx="365760" cy="365760"/>
+            <a:off x="685800" y="4514850"/>
+            <a:ext cx="320040" cy="320040"/>
           </a:xfrm>
           <a:prstGeom prst="rect">
             <a:avLst/>
@@ -14890,9 +15248,9 @@
           <a:lstStyle/>
           <a:p>
             <a:pPr algn="ctr">
-              <a:defRPr sz="1100" b="1">
+              <a:defRPr sz="1000" b="1">
                 <a:solidFill>
-                  <a:srgbClr val="FFFFFF"/>
+                  <a:srgbClr val="F0F4FC"/>
                 </a:solidFill>
                 <a:latin typeface="Microsoft YaHei"/>
               </a:defRPr>
@@ -14905,14 +15263,14 @@
       </p:sp>
       <p:sp>
         <p:nvSpPr>
-          <p:cNvPr id="25" name="TextBox 24"/>
+          <p:cNvPr id="26" name="TextBox 25"/>
           <p:cNvSpPr txBox="1"/>
           <p:nvPr/>
         </p:nvSpPr>
         <p:spPr>
           <a:xfrm>
-            <a:off x="1280160" y="4023359"/>
-            <a:ext cx="10058400" cy="548640"/>
+            <a:off x="1188720" y="4491990"/>
+            <a:ext cx="10058400" cy="365760"/>
           </a:xfrm>
           <a:prstGeom prst="rect">
             <a:avLst/>
@@ -14926,9 +15284,9 @@
           <a:lstStyle/>
           <a:p>
             <a:pPr algn="l">
-              <a:defRPr sz="1500" b="0">
+              <a:defRPr sz="1400" b="0">
                 <a:solidFill>
-                  <a:srgbClr val="CBD5E8"/>
+                  <a:srgbClr val="A0AEC4"/>
                 </a:solidFill>
                 <a:latin typeface="Microsoft YaHei"/>
               </a:defRPr>
@@ -14941,20 +15299,20 @@
       </p:sp>
       <p:sp>
         <p:nvSpPr>
-          <p:cNvPr id="26" name="Rounded Rectangle 25"/>
-          <p:cNvSpPr/>
-          <p:nvPr/>
-        </p:nvSpPr>
-        <p:spPr>
-          <a:xfrm>
-            <a:off x="457200" y="4800600"/>
-            <a:ext cx="11247120" cy="731520"/>
+          <p:cNvPr id="27" name="Rounded Rectangle 26"/>
+          <p:cNvSpPr/>
+          <p:nvPr/>
+        </p:nvSpPr>
+        <p:spPr>
+          <a:xfrm>
+            <a:off x="457200" y="5349240"/>
+            <a:ext cx="11247120" cy="685800"/>
           </a:xfrm>
           <a:prstGeom prst="roundRect">
             <a:avLst/>
           </a:prstGeom>
           <a:solidFill>
-            <a:srgbClr val="141E33"/>
+            <a:srgbClr val="161F35"/>
           </a:solidFill>
           <a:ln>
             <a:noFill/>
@@ -14984,20 +15342,20 @@
       </p:sp>
       <p:sp>
         <p:nvSpPr>
-          <p:cNvPr id="27" name="Rectangle 26"/>
-          <p:cNvSpPr/>
-          <p:nvPr/>
-        </p:nvSpPr>
-        <p:spPr>
-          <a:xfrm>
-            <a:off x="457200" y="4800600"/>
-            <a:ext cx="73152" cy="731520"/>
-          </a:xfrm>
-          <a:prstGeom prst="rect">
-            <a:avLst/>
-          </a:prstGeom>
-          <a:solidFill>
-            <a:srgbClr val="7C3AED"/>
+          <p:cNvPr id="28" name="Rectangle 27"/>
+          <p:cNvSpPr/>
+          <p:nvPr/>
+        </p:nvSpPr>
+        <p:spPr>
+          <a:xfrm>
+            <a:off x="457200" y="5349240"/>
+            <a:ext cx="54864" cy="685800"/>
+          </a:xfrm>
+          <a:prstGeom prst="rect">
+            <a:avLst/>
+          </a:prstGeom>
+          <a:solidFill>
+            <a:srgbClr val="8B5CF6"/>
           </a:solidFill>
           <a:ln>
             <a:noFill/>
@@ -15027,20 +15385,20 @@
       </p:sp>
       <p:sp>
         <p:nvSpPr>
-          <p:cNvPr id="28" name="Oval 27"/>
-          <p:cNvSpPr/>
-          <p:nvPr/>
-        </p:nvSpPr>
-        <p:spPr>
-          <a:xfrm>
-            <a:off x="731520" y="4965192"/>
-            <a:ext cx="365760" cy="365760"/>
+          <p:cNvPr id="29" name="Oval 28"/>
+          <p:cNvSpPr/>
+          <p:nvPr/>
+        </p:nvSpPr>
+        <p:spPr>
+          <a:xfrm>
+            <a:off x="685800" y="5532120"/>
+            <a:ext cx="320040" cy="320040"/>
           </a:xfrm>
           <a:prstGeom prst="ellipse">
             <a:avLst/>
           </a:prstGeom>
           <a:solidFill>
-            <a:srgbClr val="7C3AED"/>
+            <a:srgbClr val="8B5CF6"/>
           </a:solidFill>
           <a:ln>
             <a:noFill/>
@@ -15070,14 +15428,14 @@
       </p:sp>
       <p:sp>
         <p:nvSpPr>
-          <p:cNvPr id="29" name="TextBox 28"/>
+          <p:cNvPr id="30" name="TextBox 29"/>
           <p:cNvSpPr txBox="1"/>
           <p:nvPr/>
         </p:nvSpPr>
         <p:spPr>
           <a:xfrm>
-            <a:off x="731520" y="4965192"/>
-            <a:ext cx="365760" cy="365760"/>
+            <a:off x="685800" y="5532120"/>
+            <a:ext cx="320040" cy="320040"/>
           </a:xfrm>
           <a:prstGeom prst="rect">
             <a:avLst/>
@@ -15091,9 +15449,9 @@
           <a:lstStyle/>
           <a:p>
             <a:pPr algn="ctr">
-              <a:defRPr sz="1100" b="1">
+              <a:defRPr sz="1000" b="1">
                 <a:solidFill>
-                  <a:srgbClr val="FFFFFF"/>
+                  <a:srgbClr val="F0F4FC"/>
                 </a:solidFill>
                 <a:latin typeface="Microsoft YaHei"/>
               </a:defRPr>
@@ -15106,14 +15464,14 @@
       </p:sp>
       <p:sp>
         <p:nvSpPr>
-          <p:cNvPr id="30" name="TextBox 29"/>
+          <p:cNvPr id="31" name="TextBox 30"/>
           <p:cNvSpPr txBox="1"/>
           <p:nvPr/>
         </p:nvSpPr>
         <p:spPr>
           <a:xfrm>
-            <a:off x="1280160" y="4892040"/>
-            <a:ext cx="10058400" cy="548640"/>
+            <a:off x="1188720" y="5509260"/>
+            <a:ext cx="10058400" cy="365760"/>
           </a:xfrm>
           <a:prstGeom prst="rect">
             <a:avLst/>
@@ -15127,9 +15485,9 @@
           <a:lstStyle/>
           <a:p>
             <a:pPr algn="l">
-              <a:defRPr sz="1500" b="0">
+              <a:defRPr sz="1400" b="0">
                 <a:solidFill>
-                  <a:srgbClr val="CBD5E8"/>
+                  <a:srgbClr val="A0AEC4"/>
                 </a:solidFill>
                 <a:latin typeface="Microsoft YaHei"/>
               </a:defRPr>
@@ -15142,20 +15500,20 @@
       </p:sp>
       <p:sp>
         <p:nvSpPr>
-          <p:cNvPr id="31" name="Rectangle 30"/>
+          <p:cNvPr id="32" name="Rectangle 31"/>
           <p:cNvSpPr/>
           <p:nvPr/>
         </p:nvSpPr>
         <p:spPr>
           <a:xfrm>
             <a:off x="0" y="6446520"/>
-            <a:ext cx="12191695" cy="19050"/>
-          </a:xfrm>
-          <a:prstGeom prst="rect">
-            <a:avLst/>
-          </a:prstGeom>
-          <a:solidFill>
-            <a:srgbClr val="2D3B55"/>
+            <a:ext cx="12191695" cy="12700"/>
+          </a:xfrm>
+          <a:prstGeom prst="rect">
+            <a:avLst/>
+          </a:prstGeom>
+          <a:solidFill>
+            <a:srgbClr val="253350"/>
           </a:solidFill>
           <a:ln>
             <a:noFill/>
@@ -15185,14 +15543,14 @@
       </p:sp>
       <p:sp>
         <p:nvSpPr>
-          <p:cNvPr id="32" name="TextBox 31"/>
+          <p:cNvPr id="33" name="TextBox 32"/>
           <p:cNvSpPr txBox="1"/>
           <p:nvPr/>
         </p:nvSpPr>
         <p:spPr>
           <a:xfrm>
-            <a:off x="457200" y="6492240"/>
-            <a:ext cx="5486400" cy="274320"/>
+            <a:off x="731520" y="6492240"/>
+            <a:ext cx="4572000" cy="274320"/>
           </a:xfrm>
           <a:prstGeom prst="rect">
             <a:avLst/>
@@ -15208,20 +15566,20 @@
             <a:pPr algn="l">
               <a:defRPr sz="900" b="0">
                 <a:solidFill>
-                  <a:srgbClr val="6B7B9E"/>
+                  <a:srgbClr val="607090"/>
                 </a:solidFill>
                 <a:latin typeface="Microsoft YaHei"/>
               </a:defRPr>
             </a:pPr>
             <a:r>
-              <a:t>模块07：Seedance 2.0深度精通</a:t>
-            </a:r>
-          </a:p>
-        </p:txBody>
-      </p:sp>
-      <p:sp>
-        <p:nvSpPr>
-          <p:cNvPr id="33" name="TextBox 32"/>
+              <a:t>模块07 · Seedance 2.0深度精通</a:t>
+            </a:r>
+          </a:p>
+        </p:txBody>
+      </p:sp>
+      <p:sp>
+        <p:nvSpPr>
+          <p:cNvPr id="34" name="TextBox 33"/>
           <p:cNvSpPr txBox="1"/>
           <p:nvPr/>
         </p:nvSpPr>
@@ -15244,7 +15602,7 @@
             <a:pPr algn="r">
               <a:defRPr sz="900" b="0">
                 <a:solidFill>
-                  <a:srgbClr val="6B7B9E"/>
+                  <a:srgbClr val="607090"/>
                 </a:solidFill>
                 <a:latin typeface="Microsoft YaHei"/>
               </a:defRPr>

--- a/AI漫剧制作课程/PPT课件/模块07-Seedance 2.0深度精通.pptx
+++ b/AI漫剧制作课程/PPT课件/模块07-Seedance 2.0深度精通.pptx
@@ -7513,7 +7513,7 @@
               </a:defRPr>
             </a:pPr>
             <a:r>
-              <a:t>🛠️  本模块实操任务</a:t>
+              <a:t>◆  本模块实操任务</a:t>
             </a:r>
           </a:p>
         </p:txBody>
@@ -11280,7 +11280,7 @@
               </a:defRPr>
             </a:pPr>
             <a:r>
-              <a:t>✓</a:t>
+              <a:t>◆</a:t>
             </a:r>
           </a:p>
         </p:txBody>
@@ -13397,7 +13397,7 @@
               </a:defRPr>
             </a:pPr>
             <a:r>
-              <a:t>📋  本节内容</a:t>
+              <a:t>§  本节内容</a:t>
             </a:r>
           </a:p>
         </p:txBody>
